--- a/IT PROJECT MANAGEMENT - 21MGH303P/Unit-5/2_Software_Project_Management_Activitys.pptx
+++ b/IT PROJECT MANAGEMENT - 21MGH303P/Unit-5/2_Software_Project_Management_Activitys.pptx
@@ -71,20 +71,39 @@
             <a:noAutofit/>
           </a:bodyPr>
           <a:p>
+            <a:pPr algn="ctr"/>
             <a:r>
-              <a:rPr b="0" lang="en-US" sz="1800" spc="-1" strike="noStrike">
-                <a:solidFill>
-                  <a:schemeClr val="dk1"/>
-                </a:solidFill>
-                <a:latin typeface="Calibri"/>
-              </a:rPr>
-              <a:t>Click to move the slide</a:t>
+              <a:rPr b="0" lang="en-US" sz="4400" spc="-1" strike="noStrike">
+                <a:solidFill>
+                  <a:srgbClr val="000000"/>
+                </a:solidFill>
+                <a:latin typeface="Arial"/>
+              </a:rPr>
+              <a:t>Click to </a:t>
             </a:r>
-            <a:endParaRPr b="0" lang="en-US" sz="1800" spc="-1" strike="noStrike">
-              <a:solidFill>
-                <a:schemeClr val="dk1"/>
-              </a:solidFill>
-              <a:latin typeface="Calibri"/>
+            <a:r>
+              <a:rPr b="0" lang="en-US" sz="4400" spc="-1" strike="noStrike">
+                <a:solidFill>
+                  <a:srgbClr val="000000"/>
+                </a:solidFill>
+                <a:latin typeface="Arial"/>
+              </a:rPr>
+              <a:t>move the </a:t>
+            </a:r>
+            <a:r>
+              <a:rPr b="0" lang="en-US" sz="4400" spc="-1" strike="noStrike">
+                <a:solidFill>
+                  <a:srgbClr val="000000"/>
+                </a:solidFill>
+                <a:latin typeface="Arial"/>
+              </a:rPr>
+              <a:t>slide</a:t>
+            </a:r>
+            <a:endParaRPr b="0" lang="en-US" sz="4400" spc="-1" strike="noStrike">
+              <a:solidFill>
+                <a:srgbClr val="000000"/>
+              </a:solidFill>
+              <a:latin typeface="Arial"/>
             </a:endParaRPr>
           </a:p>
         </p:txBody>
@@ -349,7 +368,7 @@
             <a:pPr indent="0" algn="r">
               <a:buNone/>
             </a:pPr>
-            <a:fld id="{2DA3170F-45B7-4018-9B9C-9179EA8FDEBD}" type="slidenum">
+            <a:fld id="{35F1383A-C497-47C8-BBA2-E070DB37BB7C}" type="slidenum">
               <a:rPr b="0" lang="en-US" sz="1400" spc="-1" strike="noStrike">
                 <a:solidFill>
                   <a:srgbClr val="000000"/>
@@ -403,7 +422,7 @@
         <p:spPr>
           <a:xfrm>
             <a:off x="685800" y="1143000"/>
-            <a:ext cx="5486040" cy="3085920"/>
+            <a:ext cx="5485680" cy="3085560"/>
           </a:xfrm>
           <a:prstGeom prst="rect">
             <a:avLst/>
@@ -426,7 +445,7 @@
         <p:spPr>
           <a:xfrm>
             <a:off x="685800" y="4400640"/>
-            <a:ext cx="5486040" cy="3600000"/>
+            <a:ext cx="5485680" cy="3599640"/>
           </a:xfrm>
           <a:prstGeom prst="rect">
             <a:avLst/>
@@ -466,7 +485,7 @@
         <p:spPr>
           <a:xfrm>
             <a:off x="3884760" y="8685360"/>
-            <a:ext cx="2971440" cy="458280"/>
+            <a:ext cx="2971080" cy="457920"/>
           </a:xfrm>
           <a:prstGeom prst="rect">
             <a:avLst/>
@@ -486,6 +505,9 @@
                 <a:spcPct val="100000"/>
               </a:lnSpc>
               <a:buNone/>
+              <a:tabLst>
+                <a:tab algn="l" pos="0"/>
+              </a:tabLst>
               <a:defRPr b="0" lang="en-US" sz="1200" spc="-1" strike="noStrike">
                 <a:solidFill>
                   <a:schemeClr val="dk1"/>
@@ -501,8 +523,11 @@
                 <a:spcPct val="100000"/>
               </a:lnSpc>
               <a:buNone/>
-            </a:pPr>
-            <a:fld id="{8F144313-FA48-474F-ADFB-41C073039C65}" type="slidenum">
+              <a:tabLst>
+                <a:tab algn="l" pos="0"/>
+              </a:tabLst>
+            </a:pPr>
+            <a:fld id="{0FF19F32-B4FB-4EF7-828E-D85B00F0520B}" type="slidenum">
               <a:rPr b="0" lang="en-US" sz="1200" spc="-1" strike="noStrike">
                 <a:solidFill>
                   <a:schemeClr val="dk1"/>
@@ -556,7 +581,7 @@
         <p:spPr>
           <a:xfrm>
             <a:off x="685800" y="1143000"/>
-            <a:ext cx="5486040" cy="3085920"/>
+            <a:ext cx="5485680" cy="3085560"/>
           </a:xfrm>
           <a:prstGeom prst="rect">
             <a:avLst/>
@@ -579,7 +604,7 @@
         <p:spPr>
           <a:xfrm>
             <a:off x="685800" y="4400640"/>
-            <a:ext cx="5486040" cy="3600000"/>
+            <a:ext cx="5485680" cy="3599640"/>
           </a:xfrm>
           <a:prstGeom prst="rect">
             <a:avLst/>
@@ -619,7 +644,7 @@
         <p:spPr>
           <a:xfrm>
             <a:off x="3884760" y="8685360"/>
-            <a:ext cx="2971440" cy="458280"/>
+            <a:ext cx="2971080" cy="457920"/>
           </a:xfrm>
           <a:prstGeom prst="rect">
             <a:avLst/>
@@ -639,6 +664,9 @@
                 <a:spcPct val="100000"/>
               </a:lnSpc>
               <a:buNone/>
+              <a:tabLst>
+                <a:tab algn="l" pos="0"/>
+              </a:tabLst>
               <a:defRPr b="0" lang="en-US" sz="1200" spc="-1" strike="noStrike">
                 <a:solidFill>
                   <a:schemeClr val="dk1"/>
@@ -654,8 +682,11 @@
                 <a:spcPct val="100000"/>
               </a:lnSpc>
               <a:buNone/>
-            </a:pPr>
-            <a:fld id="{A52EB24A-45D1-4375-AEFB-C69AC3BC9F42}" type="slidenum">
+              <a:tabLst>
+                <a:tab algn="l" pos="0"/>
+              </a:tabLst>
+            </a:pPr>
+            <a:fld id="{601A55D2-121C-4FB8-A4E5-29182CCF4427}" type="slidenum">
               <a:rPr b="0" lang="en-US" sz="1200" spc="-1" strike="noStrike">
                 <a:solidFill>
                   <a:schemeClr val="dk1"/>
@@ -709,7 +740,7 @@
         <p:spPr>
           <a:xfrm>
             <a:off x="685800" y="1143000"/>
-            <a:ext cx="5486040" cy="3085920"/>
+            <a:ext cx="5485680" cy="3085560"/>
           </a:xfrm>
           <a:prstGeom prst="rect">
             <a:avLst/>
@@ -732,7 +763,7 @@
         <p:spPr>
           <a:xfrm>
             <a:off x="685800" y="4400640"/>
-            <a:ext cx="5486040" cy="3600000"/>
+            <a:ext cx="5485680" cy="3599640"/>
           </a:xfrm>
           <a:prstGeom prst="rect">
             <a:avLst/>
@@ -772,7 +803,7 @@
         <p:spPr>
           <a:xfrm>
             <a:off x="3884760" y="8685360"/>
-            <a:ext cx="2971440" cy="458280"/>
+            <a:ext cx="2971080" cy="457920"/>
           </a:xfrm>
           <a:prstGeom prst="rect">
             <a:avLst/>
@@ -792,6 +823,9 @@
                 <a:spcPct val="100000"/>
               </a:lnSpc>
               <a:buNone/>
+              <a:tabLst>
+                <a:tab algn="l" pos="0"/>
+              </a:tabLst>
               <a:defRPr b="0" lang="en-US" sz="1200" spc="-1" strike="noStrike">
                 <a:solidFill>
                   <a:schemeClr val="dk1"/>
@@ -807,8 +841,11 @@
                 <a:spcPct val="100000"/>
               </a:lnSpc>
               <a:buNone/>
-            </a:pPr>
-            <a:fld id="{BD8E857B-250A-4F87-BA17-79A22F9A92EC}" type="slidenum">
+              <a:tabLst>
+                <a:tab algn="l" pos="0"/>
+              </a:tabLst>
+            </a:pPr>
+            <a:fld id="{EF15C87F-795E-436D-9B1E-4107F98F33F2}" type="slidenum">
               <a:rPr b="0" lang="en-US" sz="1200" spc="-1" strike="noStrike">
                 <a:solidFill>
                   <a:schemeClr val="dk1"/>
@@ -862,7 +899,7 @@
         <p:spPr>
           <a:xfrm>
             <a:off x="685800" y="1143000"/>
-            <a:ext cx="5486040" cy="3085920"/>
+            <a:ext cx="5485680" cy="3085560"/>
           </a:xfrm>
           <a:prstGeom prst="rect">
             <a:avLst/>
@@ -885,7 +922,7 @@
         <p:spPr>
           <a:xfrm>
             <a:off x="685800" y="4400640"/>
-            <a:ext cx="5486040" cy="3600000"/>
+            <a:ext cx="5485680" cy="3599640"/>
           </a:xfrm>
           <a:prstGeom prst="rect">
             <a:avLst/>
@@ -925,7 +962,7 @@
         <p:spPr>
           <a:xfrm>
             <a:off x="3884760" y="8685360"/>
-            <a:ext cx="2971440" cy="458280"/>
+            <a:ext cx="2971080" cy="457920"/>
           </a:xfrm>
           <a:prstGeom prst="rect">
             <a:avLst/>
@@ -945,6 +982,9 @@
                 <a:spcPct val="100000"/>
               </a:lnSpc>
               <a:buNone/>
+              <a:tabLst>
+                <a:tab algn="l" pos="0"/>
+              </a:tabLst>
               <a:defRPr b="0" lang="en-US" sz="1200" spc="-1" strike="noStrike">
                 <a:solidFill>
                   <a:schemeClr val="dk1"/>
@@ -960,8 +1000,11 @@
                 <a:spcPct val="100000"/>
               </a:lnSpc>
               <a:buNone/>
-            </a:pPr>
-            <a:fld id="{2B6F75D6-E810-4B13-BC4A-DA17149C7178}" type="slidenum">
+              <a:tabLst>
+                <a:tab algn="l" pos="0"/>
+              </a:tabLst>
+            </a:pPr>
+            <a:fld id="{267D4FF5-995D-49F1-BD75-48750F0EF4CD}" type="slidenum">
               <a:rPr b="0" lang="en-US" sz="1200" spc="-1" strike="noStrike">
                 <a:solidFill>
                   <a:schemeClr val="dk1"/>
@@ -1015,7 +1058,7 @@
         <p:spPr>
           <a:xfrm>
             <a:off x="685800" y="1143000"/>
-            <a:ext cx="5486040" cy="3085920"/>
+            <a:ext cx="5485680" cy="3085560"/>
           </a:xfrm>
           <a:prstGeom prst="rect">
             <a:avLst/>
@@ -1038,7 +1081,7 @@
         <p:spPr>
           <a:xfrm>
             <a:off x="685800" y="4400640"/>
-            <a:ext cx="5486040" cy="3600000"/>
+            <a:ext cx="5485680" cy="3599640"/>
           </a:xfrm>
           <a:prstGeom prst="rect">
             <a:avLst/>
@@ -1078,7 +1121,7 @@
         <p:spPr>
           <a:xfrm>
             <a:off x="3884760" y="8685360"/>
-            <a:ext cx="2971440" cy="458280"/>
+            <a:ext cx="2971080" cy="457920"/>
           </a:xfrm>
           <a:prstGeom prst="rect">
             <a:avLst/>
@@ -1098,6 +1141,9 @@
                 <a:spcPct val="100000"/>
               </a:lnSpc>
               <a:buNone/>
+              <a:tabLst>
+                <a:tab algn="l" pos="0"/>
+              </a:tabLst>
               <a:defRPr b="0" lang="en-US" sz="1200" spc="-1" strike="noStrike">
                 <a:solidFill>
                   <a:schemeClr val="dk1"/>
@@ -1113,8 +1159,11 @@
                 <a:spcPct val="100000"/>
               </a:lnSpc>
               <a:buNone/>
-            </a:pPr>
-            <a:fld id="{11FFA858-516E-4A49-B15A-63FEE4E11E39}" type="slidenum">
+              <a:tabLst>
+                <a:tab algn="l" pos="0"/>
+              </a:tabLst>
+            </a:pPr>
+            <a:fld id="{CF29ECC8-5565-447A-848D-83418F09F2C7}" type="slidenum">
               <a:rPr b="0" lang="en-US" sz="1200" spc="-1" strike="noStrike">
                 <a:solidFill>
                   <a:schemeClr val="dk1"/>
@@ -1168,7 +1217,7 @@
         <p:spPr>
           <a:xfrm>
             <a:off x="685800" y="1143000"/>
-            <a:ext cx="5486040" cy="3085920"/>
+            <a:ext cx="5485680" cy="3085560"/>
           </a:xfrm>
           <a:prstGeom prst="rect">
             <a:avLst/>
@@ -1191,7 +1240,7 @@
         <p:spPr>
           <a:xfrm>
             <a:off x="685800" y="4400640"/>
-            <a:ext cx="5486040" cy="3600000"/>
+            <a:ext cx="5485680" cy="3599640"/>
           </a:xfrm>
           <a:prstGeom prst="rect">
             <a:avLst/>
@@ -1231,7 +1280,7 @@
         <p:spPr>
           <a:xfrm>
             <a:off x="3884760" y="8685360"/>
-            <a:ext cx="2971440" cy="458280"/>
+            <a:ext cx="2971080" cy="457920"/>
           </a:xfrm>
           <a:prstGeom prst="rect">
             <a:avLst/>
@@ -1251,6 +1300,9 @@
                 <a:spcPct val="100000"/>
               </a:lnSpc>
               <a:buNone/>
+              <a:tabLst>
+                <a:tab algn="l" pos="0"/>
+              </a:tabLst>
               <a:defRPr b="0" lang="en-US" sz="1200" spc="-1" strike="noStrike">
                 <a:solidFill>
                   <a:schemeClr val="dk1"/>
@@ -1266,8 +1318,11 @@
                 <a:spcPct val="100000"/>
               </a:lnSpc>
               <a:buNone/>
-            </a:pPr>
-            <a:fld id="{BE616A3D-A21F-4B0E-BC7A-557C7ADCC162}" type="slidenum">
+              <a:tabLst>
+                <a:tab algn="l" pos="0"/>
+              </a:tabLst>
+            </a:pPr>
+            <a:fld id="{874477C9-FEED-41B6-932C-202192947817}" type="slidenum">
               <a:rPr b="0" lang="en-US" sz="1200" spc="-1" strike="noStrike">
                 <a:solidFill>
                   <a:schemeClr val="dk1"/>
@@ -1321,7 +1376,7 @@
         <p:spPr>
           <a:xfrm>
             <a:off x="685800" y="1143000"/>
-            <a:ext cx="5486040" cy="3085920"/>
+            <a:ext cx="5485680" cy="3085560"/>
           </a:xfrm>
           <a:prstGeom prst="rect">
             <a:avLst/>
@@ -1344,7 +1399,7 @@
         <p:spPr>
           <a:xfrm>
             <a:off x="685800" y="4400640"/>
-            <a:ext cx="5486040" cy="3600000"/>
+            <a:ext cx="5485680" cy="3599640"/>
           </a:xfrm>
           <a:prstGeom prst="rect">
             <a:avLst/>
@@ -1384,7 +1439,7 @@
         <p:spPr>
           <a:xfrm>
             <a:off x="3884760" y="8685360"/>
-            <a:ext cx="2971440" cy="458280"/>
+            <a:ext cx="2971080" cy="457920"/>
           </a:xfrm>
           <a:prstGeom prst="rect">
             <a:avLst/>
@@ -1404,6 +1459,9 @@
                 <a:spcPct val="100000"/>
               </a:lnSpc>
               <a:buNone/>
+              <a:tabLst>
+                <a:tab algn="l" pos="0"/>
+              </a:tabLst>
               <a:defRPr b="0" lang="en-US" sz="1200" spc="-1" strike="noStrike">
                 <a:solidFill>
                   <a:schemeClr val="dk1"/>
@@ -1419,8 +1477,11 @@
                 <a:spcPct val="100000"/>
               </a:lnSpc>
               <a:buNone/>
-            </a:pPr>
-            <a:fld id="{0D2B421B-B14F-4B37-9C1F-21CCD96E3A18}" type="slidenum">
+              <a:tabLst>
+                <a:tab algn="l" pos="0"/>
+              </a:tabLst>
+            </a:pPr>
+            <a:fld id="{77F4A366-83A8-4054-85EE-C09B6C425522}" type="slidenum">
               <a:rPr b="0" lang="en-US" sz="1200" spc="-1" strike="noStrike">
                 <a:solidFill>
                   <a:schemeClr val="dk1"/>
@@ -1474,7 +1535,7 @@
         <p:spPr>
           <a:xfrm>
             <a:off x="685800" y="1143000"/>
-            <a:ext cx="5486040" cy="3085920"/>
+            <a:ext cx="5485680" cy="3085560"/>
           </a:xfrm>
           <a:prstGeom prst="rect">
             <a:avLst/>
@@ -1497,7 +1558,7 @@
         <p:spPr>
           <a:xfrm>
             <a:off x="685800" y="4400640"/>
-            <a:ext cx="5486040" cy="3600000"/>
+            <a:ext cx="5485680" cy="3599640"/>
           </a:xfrm>
           <a:prstGeom prst="rect">
             <a:avLst/>
@@ -1537,7 +1598,7 @@
         <p:spPr>
           <a:xfrm>
             <a:off x="3884760" y="8685360"/>
-            <a:ext cx="2971440" cy="458280"/>
+            <a:ext cx="2971080" cy="457920"/>
           </a:xfrm>
           <a:prstGeom prst="rect">
             <a:avLst/>
@@ -1557,6 +1618,9 @@
                 <a:spcPct val="100000"/>
               </a:lnSpc>
               <a:buNone/>
+              <a:tabLst>
+                <a:tab algn="l" pos="0"/>
+              </a:tabLst>
               <a:defRPr b="0" lang="en-US" sz="1200" spc="-1" strike="noStrike">
                 <a:solidFill>
                   <a:schemeClr val="dk1"/>
@@ -1572,8 +1636,11 @@
                 <a:spcPct val="100000"/>
               </a:lnSpc>
               <a:buNone/>
-            </a:pPr>
-            <a:fld id="{E1419F9B-B115-4118-ACDA-098C7FDC6705}" type="slidenum">
+              <a:tabLst>
+                <a:tab algn="l" pos="0"/>
+              </a:tabLst>
+            </a:pPr>
+            <a:fld id="{58656355-32F5-4284-A106-749F18D44BBB}" type="slidenum">
               <a:rPr b="0" lang="en-US" sz="1200" spc="-1" strike="noStrike">
                 <a:solidFill>
                   <a:schemeClr val="dk1"/>
@@ -1627,7 +1694,7 @@
         <p:spPr>
           <a:xfrm>
             <a:off x="685800" y="1143000"/>
-            <a:ext cx="5486040" cy="3085920"/>
+            <a:ext cx="5485680" cy="3085560"/>
           </a:xfrm>
           <a:prstGeom prst="rect">
             <a:avLst/>
@@ -1650,7 +1717,7 @@
         <p:spPr>
           <a:xfrm>
             <a:off x="685800" y="4400640"/>
-            <a:ext cx="5486040" cy="3600000"/>
+            <a:ext cx="5485680" cy="3599640"/>
           </a:xfrm>
           <a:prstGeom prst="rect">
             <a:avLst/>
@@ -1690,7 +1757,7 @@
         <p:spPr>
           <a:xfrm>
             <a:off x="3884760" y="8685360"/>
-            <a:ext cx="2971440" cy="458280"/>
+            <a:ext cx="2971080" cy="457920"/>
           </a:xfrm>
           <a:prstGeom prst="rect">
             <a:avLst/>
@@ -1710,6 +1777,9 @@
                 <a:spcPct val="100000"/>
               </a:lnSpc>
               <a:buNone/>
+              <a:tabLst>
+                <a:tab algn="l" pos="0"/>
+              </a:tabLst>
               <a:defRPr b="0" lang="en-US" sz="1200" spc="-1" strike="noStrike">
                 <a:solidFill>
                   <a:schemeClr val="dk1"/>
@@ -1725,8 +1795,11 @@
                 <a:spcPct val="100000"/>
               </a:lnSpc>
               <a:buNone/>
-            </a:pPr>
-            <a:fld id="{EB406DE2-0904-49E4-9F4F-8266E0793EDD}" type="slidenum">
+              <a:tabLst>
+                <a:tab algn="l" pos="0"/>
+              </a:tabLst>
+            </a:pPr>
+            <a:fld id="{EECFC88B-E450-4224-BE94-EE3E0B55B9F3}" type="slidenum">
               <a:rPr b="0" lang="en-US" sz="1200" spc="-1" strike="noStrike">
                 <a:solidFill>
                   <a:schemeClr val="dk1"/>
@@ -1780,7 +1853,7 @@
         <p:spPr>
           <a:xfrm>
             <a:off x="685800" y="1143000"/>
-            <a:ext cx="5486040" cy="3085920"/>
+            <a:ext cx="5485680" cy="3085560"/>
           </a:xfrm>
           <a:prstGeom prst="rect">
             <a:avLst/>
@@ -1803,7 +1876,7 @@
         <p:spPr>
           <a:xfrm>
             <a:off x="685800" y="4400640"/>
-            <a:ext cx="5486040" cy="3600000"/>
+            <a:ext cx="5485680" cy="3599640"/>
           </a:xfrm>
           <a:prstGeom prst="rect">
             <a:avLst/>
@@ -1843,7 +1916,7 @@
         <p:spPr>
           <a:xfrm>
             <a:off x="3884760" y="8685360"/>
-            <a:ext cx="2971440" cy="458280"/>
+            <a:ext cx="2971080" cy="457920"/>
           </a:xfrm>
           <a:prstGeom prst="rect">
             <a:avLst/>
@@ -1863,6 +1936,9 @@
                 <a:spcPct val="100000"/>
               </a:lnSpc>
               <a:buNone/>
+              <a:tabLst>
+                <a:tab algn="l" pos="0"/>
+              </a:tabLst>
               <a:defRPr b="0" lang="en-US" sz="1200" spc="-1" strike="noStrike">
                 <a:solidFill>
                   <a:schemeClr val="dk1"/>
@@ -1878,8 +1954,11 @@
                 <a:spcPct val="100000"/>
               </a:lnSpc>
               <a:buNone/>
-            </a:pPr>
-            <a:fld id="{9E23F607-7306-4FEC-9E2D-F9FE60AA6BEC}" type="slidenum">
+              <a:tabLst>
+                <a:tab algn="l" pos="0"/>
+              </a:tabLst>
+            </a:pPr>
+            <a:fld id="{A5C3AFC7-8E77-4B85-BFF0-86A6F658D8E1}" type="slidenum">
               <a:rPr b="0" lang="en-US" sz="1200" spc="-1" strike="noStrike">
                 <a:solidFill>
                   <a:schemeClr val="dk1"/>
@@ -1933,7 +2012,7 @@
         <p:spPr>
           <a:xfrm>
             <a:off x="685800" y="1143000"/>
-            <a:ext cx="5486040" cy="3085920"/>
+            <a:ext cx="5485680" cy="3085560"/>
           </a:xfrm>
           <a:prstGeom prst="rect">
             <a:avLst/>
@@ -1956,7 +2035,7 @@
         <p:spPr>
           <a:xfrm>
             <a:off x="685800" y="4400640"/>
-            <a:ext cx="5486040" cy="3600000"/>
+            <a:ext cx="5485680" cy="3599640"/>
           </a:xfrm>
           <a:prstGeom prst="rect">
             <a:avLst/>
@@ -1996,7 +2075,7 @@
         <p:spPr>
           <a:xfrm>
             <a:off x="3884760" y="8685360"/>
-            <a:ext cx="2971440" cy="458280"/>
+            <a:ext cx="2971080" cy="457920"/>
           </a:xfrm>
           <a:prstGeom prst="rect">
             <a:avLst/>
@@ -2016,6 +2095,9 @@
                 <a:spcPct val="100000"/>
               </a:lnSpc>
               <a:buNone/>
+              <a:tabLst>
+                <a:tab algn="l" pos="0"/>
+              </a:tabLst>
               <a:defRPr b="0" lang="en-US" sz="1200" spc="-1" strike="noStrike">
                 <a:solidFill>
                   <a:schemeClr val="dk1"/>
@@ -2031,8 +2113,11 @@
                 <a:spcPct val="100000"/>
               </a:lnSpc>
               <a:buNone/>
-            </a:pPr>
-            <a:fld id="{4B6894CB-8116-47D6-AB21-77F5A1FE9955}" type="slidenum">
+              <a:tabLst>
+                <a:tab algn="l" pos="0"/>
+              </a:tabLst>
+            </a:pPr>
+            <a:fld id="{4D334744-921F-4EDB-8528-FC427F261505}" type="slidenum">
               <a:rPr b="0" lang="en-US" sz="1200" spc="-1" strike="noStrike">
                 <a:solidFill>
                   <a:schemeClr val="dk1"/>
@@ -2086,7 +2171,7 @@
         <p:spPr>
           <a:xfrm>
             <a:off x="685800" y="1143000"/>
-            <a:ext cx="5486040" cy="3085920"/>
+            <a:ext cx="5485680" cy="3085560"/>
           </a:xfrm>
           <a:prstGeom prst="rect">
             <a:avLst/>
@@ -2109,7 +2194,7 @@
         <p:spPr>
           <a:xfrm>
             <a:off x="685800" y="4400640"/>
-            <a:ext cx="5486040" cy="3600000"/>
+            <a:ext cx="5485680" cy="3599640"/>
           </a:xfrm>
           <a:prstGeom prst="rect">
             <a:avLst/>
@@ -2149,7 +2234,7 @@
         <p:spPr>
           <a:xfrm>
             <a:off x="3884760" y="8685360"/>
-            <a:ext cx="2971440" cy="458280"/>
+            <a:ext cx="2971080" cy="457920"/>
           </a:xfrm>
           <a:prstGeom prst="rect">
             <a:avLst/>
@@ -2169,6 +2254,9 @@
                 <a:spcPct val="100000"/>
               </a:lnSpc>
               <a:buNone/>
+              <a:tabLst>
+                <a:tab algn="l" pos="0"/>
+              </a:tabLst>
               <a:defRPr b="0" lang="en-US" sz="1200" spc="-1" strike="noStrike">
                 <a:solidFill>
                   <a:schemeClr val="dk1"/>
@@ -2184,8 +2272,11 @@
                 <a:spcPct val="100000"/>
               </a:lnSpc>
               <a:buNone/>
-            </a:pPr>
-            <a:fld id="{16E6120D-5FD0-4761-9B88-1349DE91C020}" type="slidenum">
+              <a:tabLst>
+                <a:tab algn="l" pos="0"/>
+              </a:tabLst>
+            </a:pPr>
+            <a:fld id="{9AC8EA63-4DBC-4FA0-BB4A-0B328AC55889}" type="slidenum">
               <a:rPr b="0" lang="en-US" sz="1200" spc="-1" strike="noStrike">
                 <a:solidFill>
                   <a:schemeClr val="dk1"/>
@@ -2283,32 +2374,41 @@
             <a:noAutofit/>
           </a:bodyPr>
           <a:p>
-            <a:pPr indent="0">
+            <a:pPr indent="0" algn="ctr">
               <a:buNone/>
             </a:pPr>
             <a:r>
-              <a:rPr b="0" lang="en-US" sz="1800" spc="-1" strike="noStrike">
-                <a:solidFill>
-                  <a:schemeClr val="dk1"/>
-                </a:solidFill>
-                <a:latin typeface="Calibri"/>
-              </a:rPr>
-              <a:t>Click to edit the title text </a:t>
+              <a:rPr b="0" lang="en-US" sz="4400" spc="-1" strike="noStrike">
+                <a:solidFill>
+                  <a:srgbClr val="000000"/>
+                </a:solidFill>
+                <a:latin typeface="Arial"/>
+              </a:rPr>
+              <a:t>Click to edit </a:t>
             </a:r>
             <a:r>
-              <a:rPr b="0" lang="en-US" sz="1800" spc="-1" strike="noStrike">
-                <a:solidFill>
-                  <a:schemeClr val="dk1"/>
-                </a:solidFill>
-                <a:latin typeface="Calibri"/>
+              <a:rPr b="0" lang="en-US" sz="4400" spc="-1" strike="noStrike">
+                <a:solidFill>
+                  <a:srgbClr val="000000"/>
+                </a:solidFill>
+                <a:latin typeface="Arial"/>
+              </a:rPr>
+              <a:t>the title text </a:t>
+            </a:r>
+            <a:r>
+              <a:rPr b="0" lang="en-US" sz="4400" spc="-1" strike="noStrike">
+                <a:solidFill>
+                  <a:srgbClr val="000000"/>
+                </a:solidFill>
+                <a:latin typeface="Arial"/>
               </a:rPr>
               <a:t>format</a:t>
             </a:r>
-            <a:endParaRPr b="0" lang="en-US" sz="1800" spc="-1" strike="noStrike">
-              <a:solidFill>
-                <a:schemeClr val="dk1"/>
-              </a:solidFill>
-              <a:latin typeface="Calibri"/>
+            <a:endParaRPr b="0" lang="en-US" sz="4400" spc="-1" strike="noStrike">
+              <a:solidFill>
+                <a:srgbClr val="000000"/>
+              </a:solidFill>
+              <a:latin typeface="Arial"/>
             </a:endParaRPr>
           </a:p>
         </p:txBody>
@@ -2338,7 +2438,7 @@
         </p:spPr>
         <p:txBody>
           <a:bodyPr lIns="0" rIns="0" tIns="0" bIns="0" anchor="t">
-            <a:normAutofit fontScale="95303"/>
+            <a:normAutofit/>
           </a:bodyPr>
           <a:p>
             <a:pPr marL="432000" indent="-324000">
@@ -2355,17 +2455,17 @@
             <a:r>
               <a:rPr b="0" lang="en-US" sz="3200" spc="-1" strike="noStrike">
                 <a:solidFill>
-                  <a:schemeClr val="dk1"/>
-                </a:solidFill>
-                <a:latin typeface="Calibri"/>
+                  <a:srgbClr val="000000"/>
+                </a:solidFill>
+                <a:latin typeface="Arial"/>
               </a:rPr>
               <a:t>Click to edit the outline text format</a:t>
             </a:r>
             <a:endParaRPr b="0" lang="en-US" sz="3200" spc="-1" strike="noStrike">
               <a:solidFill>
-                <a:schemeClr val="dk1"/>
-              </a:solidFill>
-              <a:latin typeface="Calibri"/>
+                <a:srgbClr val="000000"/>
+              </a:solidFill>
+              <a:latin typeface="Arial"/>
             </a:endParaRPr>
           </a:p>
           <a:p>
@@ -2381,19 +2481,19 @@
               <a:buChar char=""/>
             </a:pPr>
             <a:r>
-              <a:rPr b="0" lang="en-US" sz="2400" spc="-1" strike="noStrike">
-                <a:solidFill>
-                  <a:schemeClr val="dk1"/>
-                </a:solidFill>
-                <a:latin typeface="Calibri"/>
+              <a:rPr b="0" lang="en-US" sz="2800" spc="-1" strike="noStrike">
+                <a:solidFill>
+                  <a:srgbClr val="000000"/>
+                </a:solidFill>
+                <a:latin typeface="Arial"/>
               </a:rPr>
               <a:t>Second Outline Level</a:t>
             </a:r>
-            <a:endParaRPr b="0" lang="en-US" sz="2400" spc="-1" strike="noStrike">
-              <a:solidFill>
-                <a:schemeClr val="dk1"/>
-              </a:solidFill>
-              <a:latin typeface="Calibri"/>
+            <a:endParaRPr b="0" lang="en-US" sz="2800" spc="-1" strike="noStrike">
+              <a:solidFill>
+                <a:srgbClr val="000000"/>
+              </a:solidFill>
+              <a:latin typeface="Arial"/>
             </a:endParaRPr>
           </a:p>
           <a:p>
@@ -2409,19 +2509,19 @@
               <a:buChar char=""/>
             </a:pPr>
             <a:r>
-              <a:rPr b="0" lang="en-US" sz="2000" spc="-1" strike="noStrike">
-                <a:solidFill>
-                  <a:schemeClr val="dk1"/>
-                </a:solidFill>
-                <a:latin typeface="Calibri"/>
+              <a:rPr b="0" lang="en-US" sz="2400" spc="-1" strike="noStrike">
+                <a:solidFill>
+                  <a:srgbClr val="000000"/>
+                </a:solidFill>
+                <a:latin typeface="Arial"/>
               </a:rPr>
               <a:t>Third Outline Level</a:t>
             </a:r>
-            <a:endParaRPr b="0" lang="en-US" sz="2000" spc="-1" strike="noStrike">
-              <a:solidFill>
-                <a:schemeClr val="dk1"/>
-              </a:solidFill>
-              <a:latin typeface="Calibri"/>
+            <a:endParaRPr b="0" lang="en-US" sz="2400" spc="-1" strike="noStrike">
+              <a:solidFill>
+                <a:srgbClr val="000000"/>
+              </a:solidFill>
+              <a:latin typeface="Arial"/>
             </a:endParaRPr>
           </a:p>
           <a:p>
@@ -2439,17 +2539,17 @@
             <a:r>
               <a:rPr b="0" lang="en-US" sz="2000" spc="-1" strike="noStrike">
                 <a:solidFill>
-                  <a:schemeClr val="dk1"/>
-                </a:solidFill>
-                <a:latin typeface="Calibri"/>
+                  <a:srgbClr val="000000"/>
+                </a:solidFill>
+                <a:latin typeface="Arial"/>
               </a:rPr>
               <a:t>Fourth Outline Level</a:t>
             </a:r>
             <a:endParaRPr b="0" lang="en-US" sz="2000" spc="-1" strike="noStrike">
               <a:solidFill>
-                <a:schemeClr val="dk1"/>
-              </a:solidFill>
-              <a:latin typeface="Calibri"/>
+                <a:srgbClr val="000000"/>
+              </a:solidFill>
+              <a:latin typeface="Arial"/>
             </a:endParaRPr>
           </a:p>
           <a:p>
@@ -2467,17 +2567,17 @@
             <a:r>
               <a:rPr b="0" lang="en-US" sz="2000" spc="-1" strike="noStrike">
                 <a:solidFill>
-                  <a:schemeClr val="dk1"/>
-                </a:solidFill>
-                <a:latin typeface="Calibri"/>
+                  <a:srgbClr val="000000"/>
+                </a:solidFill>
+                <a:latin typeface="Arial"/>
               </a:rPr>
               <a:t>Fifth Outline Level</a:t>
             </a:r>
             <a:endParaRPr b="0" lang="en-US" sz="2000" spc="-1" strike="noStrike">
               <a:solidFill>
-                <a:schemeClr val="dk1"/>
-              </a:solidFill>
-              <a:latin typeface="Calibri"/>
+                <a:srgbClr val="000000"/>
+              </a:solidFill>
+              <a:latin typeface="Arial"/>
             </a:endParaRPr>
           </a:p>
           <a:p>
@@ -2495,17 +2595,17 @@
             <a:r>
               <a:rPr b="0" lang="en-US" sz="2000" spc="-1" strike="noStrike">
                 <a:solidFill>
-                  <a:schemeClr val="dk1"/>
-                </a:solidFill>
-                <a:latin typeface="Calibri"/>
+                  <a:srgbClr val="000000"/>
+                </a:solidFill>
+                <a:latin typeface="Arial"/>
               </a:rPr>
               <a:t>Sixth Outline Level</a:t>
             </a:r>
             <a:endParaRPr b="0" lang="en-US" sz="2000" spc="-1" strike="noStrike">
               <a:solidFill>
-                <a:schemeClr val="dk1"/>
-              </a:solidFill>
-              <a:latin typeface="Calibri"/>
+                <a:srgbClr val="000000"/>
+              </a:solidFill>
+              <a:latin typeface="Arial"/>
             </a:endParaRPr>
           </a:p>
           <a:p>
@@ -2523,17 +2623,17 @@
             <a:r>
               <a:rPr b="0" lang="en-US" sz="2000" spc="-1" strike="noStrike">
                 <a:solidFill>
-                  <a:schemeClr val="dk1"/>
-                </a:solidFill>
-                <a:latin typeface="Calibri"/>
+                  <a:srgbClr val="000000"/>
+                </a:solidFill>
+                <a:latin typeface="Arial"/>
               </a:rPr>
               <a:t>Seventh Outline Level</a:t>
             </a:r>
             <a:endParaRPr b="0" lang="en-US" sz="2000" spc="-1" strike="noStrike">
               <a:solidFill>
-                <a:schemeClr val="dk1"/>
-              </a:solidFill>
-              <a:latin typeface="Calibri"/>
+                <a:srgbClr val="000000"/>
+              </a:solidFill>
+              <a:latin typeface="Arial"/>
             </a:endParaRPr>
           </a:p>
         </p:txBody>
@@ -2580,7 +2680,7 @@
         <p:spPr>
           <a:xfrm>
             <a:off x="5852160" y="0"/>
-            <a:ext cx="3291480" cy="5143320"/>
+            <a:ext cx="3291120" cy="5142960"/>
           </a:xfrm>
           <a:prstGeom prst="rect">
             <a:avLst/>
@@ -2606,6 +2706,11 @@
             <a:noAutofit/>
           </a:bodyPr>
           <a:p>
+            <a:pPr>
+              <a:lnSpc>
+                <a:spcPct val="100000"/>
+              </a:lnSpc>
+            </a:pPr>
             <a:endParaRPr b="0" lang="en-US" sz="1800" spc="-1" strike="noStrike">
               <a:solidFill>
                 <a:srgbClr val="ffffff"/>
@@ -2624,7 +2729,7 @@
         <p:spPr>
           <a:xfrm>
             <a:off x="6583680" y="0"/>
-            <a:ext cx="2559960" cy="5143320"/>
+            <a:ext cx="2559600" cy="5142960"/>
           </a:xfrm>
           <a:prstGeom prst="rect">
             <a:avLst/>
@@ -2654,6 +2759,11 @@
             <a:noAutofit/>
           </a:bodyPr>
           <a:p>
+            <a:pPr>
+              <a:lnSpc>
+                <a:spcPct val="100000"/>
+              </a:lnSpc>
+            </a:pPr>
             <a:endParaRPr b="0" lang="en-US" sz="1800" spc="-1" strike="noStrike">
               <a:solidFill>
                 <a:srgbClr val="ffffff"/>
@@ -2672,7 +2782,7 @@
         <p:spPr>
           <a:xfrm>
             <a:off x="6309360" y="-731520"/>
-            <a:ext cx="3108600" cy="3108600"/>
+            <a:ext cx="3108240" cy="3108240"/>
           </a:xfrm>
           <a:prstGeom prst="ellipse">
             <a:avLst/>
@@ -2700,6 +2810,11 @@
             <a:noAutofit/>
           </a:bodyPr>
           <a:p>
+            <a:pPr>
+              <a:lnSpc>
+                <a:spcPct val="100000"/>
+              </a:lnSpc>
+            </a:pPr>
             <a:endParaRPr b="0" lang="en-US" sz="1800" spc="-1" strike="noStrike">
               <a:solidFill>
                 <a:srgbClr val="ffffff"/>
@@ -2718,7 +2833,7 @@
         <p:spPr>
           <a:xfrm>
             <a:off x="7040880" y="-91440"/>
-            <a:ext cx="1737000" cy="1737000"/>
+            <a:ext cx="1736640" cy="1736640"/>
           </a:xfrm>
           <a:prstGeom prst="ellipse">
             <a:avLst/>
@@ -2746,6 +2861,11 @@
             <a:noAutofit/>
           </a:bodyPr>
           <a:p>
+            <a:pPr>
+              <a:lnSpc>
+                <a:spcPct val="100000"/>
+              </a:lnSpc>
+            </a:pPr>
             <a:endParaRPr b="0" lang="en-US" sz="1800" spc="-1" strike="noStrike">
               <a:solidFill>
                 <a:srgbClr val="ffffff"/>
@@ -2764,7 +2884,7 @@
         <p:spPr>
           <a:xfrm>
             <a:off x="7360920" y="3291840"/>
-            <a:ext cx="109440" cy="109440"/>
+            <a:ext cx="109080" cy="109080"/>
           </a:xfrm>
           <a:prstGeom prst="ellipse">
             <a:avLst/>
@@ -2794,6 +2914,11 @@
             <a:noAutofit/>
           </a:bodyPr>
           <a:p>
+            <a:pPr>
+              <a:lnSpc>
+                <a:spcPct val="100000"/>
+              </a:lnSpc>
+            </a:pPr>
             <a:endParaRPr b="0" lang="en-US" sz="1800" spc="-1" strike="noStrike">
               <a:solidFill>
                 <a:srgbClr val="000000"/>
@@ -2812,7 +2937,7 @@
         <p:spPr>
           <a:xfrm>
             <a:off x="7708320" y="3291840"/>
-            <a:ext cx="109440" cy="109440"/>
+            <a:ext cx="109080" cy="109080"/>
           </a:xfrm>
           <a:prstGeom prst="ellipse">
             <a:avLst/>
@@ -2842,6 +2967,11 @@
             <a:noAutofit/>
           </a:bodyPr>
           <a:p>
+            <a:pPr>
+              <a:lnSpc>
+                <a:spcPct val="100000"/>
+              </a:lnSpc>
+            </a:pPr>
             <a:endParaRPr b="0" lang="en-US" sz="1800" spc="-1" strike="noStrike">
               <a:solidFill>
                 <a:srgbClr val="000000"/>
@@ -2860,7 +2990,7 @@
         <p:spPr>
           <a:xfrm>
             <a:off x="8055720" y="3291840"/>
-            <a:ext cx="109440" cy="109440"/>
+            <a:ext cx="109080" cy="109080"/>
           </a:xfrm>
           <a:prstGeom prst="ellipse">
             <a:avLst/>
@@ -2890,6 +3020,11 @@
             <a:noAutofit/>
           </a:bodyPr>
           <a:p>
+            <a:pPr>
+              <a:lnSpc>
+                <a:spcPct val="100000"/>
+              </a:lnSpc>
+            </a:pPr>
             <a:endParaRPr b="0" lang="en-US" sz="1800" spc="-1" strike="noStrike">
               <a:solidFill>
                 <a:srgbClr val="000000"/>
@@ -2908,7 +3043,7 @@
         <p:spPr>
           <a:xfrm>
             <a:off x="8403480" y="3291840"/>
-            <a:ext cx="109440" cy="109440"/>
+            <a:ext cx="109080" cy="109080"/>
           </a:xfrm>
           <a:prstGeom prst="ellipse">
             <a:avLst/>
@@ -2938,6 +3073,11 @@
             <a:noAutofit/>
           </a:bodyPr>
           <a:p>
+            <a:pPr>
+              <a:lnSpc>
+                <a:spcPct val="100000"/>
+              </a:lnSpc>
+            </a:pPr>
             <a:endParaRPr b="0" lang="en-US" sz="1800" spc="-1" strike="noStrike">
               <a:solidFill>
                 <a:srgbClr val="000000"/>
@@ -2956,7 +3096,7 @@
         <p:spPr>
           <a:xfrm>
             <a:off x="7360920" y="3639240"/>
-            <a:ext cx="109440" cy="109440"/>
+            <a:ext cx="109080" cy="109080"/>
           </a:xfrm>
           <a:prstGeom prst="ellipse">
             <a:avLst/>
@@ -2986,6 +3126,11 @@
             <a:noAutofit/>
           </a:bodyPr>
           <a:p>
+            <a:pPr>
+              <a:lnSpc>
+                <a:spcPct val="100000"/>
+              </a:lnSpc>
+            </a:pPr>
             <a:endParaRPr b="0" lang="en-US" sz="1800" spc="-1" strike="noStrike">
               <a:solidFill>
                 <a:srgbClr val="000000"/>
@@ -3004,7 +3149,7 @@
         <p:spPr>
           <a:xfrm>
             <a:off x="7708320" y="3639240"/>
-            <a:ext cx="109440" cy="109440"/>
+            <a:ext cx="109080" cy="109080"/>
           </a:xfrm>
           <a:prstGeom prst="ellipse">
             <a:avLst/>
@@ -3034,6 +3179,11 @@
             <a:noAutofit/>
           </a:bodyPr>
           <a:p>
+            <a:pPr>
+              <a:lnSpc>
+                <a:spcPct val="100000"/>
+              </a:lnSpc>
+            </a:pPr>
             <a:endParaRPr b="0" lang="en-US" sz="1800" spc="-1" strike="noStrike">
               <a:solidFill>
                 <a:srgbClr val="000000"/>
@@ -3052,7 +3202,7 @@
         <p:spPr>
           <a:xfrm>
             <a:off x="8055720" y="3639240"/>
-            <a:ext cx="109440" cy="109440"/>
+            <a:ext cx="109080" cy="109080"/>
           </a:xfrm>
           <a:prstGeom prst="ellipse">
             <a:avLst/>
@@ -3082,6 +3232,11 @@
             <a:noAutofit/>
           </a:bodyPr>
           <a:p>
+            <a:pPr>
+              <a:lnSpc>
+                <a:spcPct val="100000"/>
+              </a:lnSpc>
+            </a:pPr>
             <a:endParaRPr b="0" lang="en-US" sz="1800" spc="-1" strike="noStrike">
               <a:solidFill>
                 <a:srgbClr val="000000"/>
@@ -3100,7 +3255,7 @@
         <p:spPr>
           <a:xfrm>
             <a:off x="8403480" y="3639240"/>
-            <a:ext cx="109440" cy="109440"/>
+            <a:ext cx="109080" cy="109080"/>
           </a:xfrm>
           <a:prstGeom prst="ellipse">
             <a:avLst/>
@@ -3130,6 +3285,11 @@
             <a:noAutofit/>
           </a:bodyPr>
           <a:p>
+            <a:pPr>
+              <a:lnSpc>
+                <a:spcPct val="100000"/>
+              </a:lnSpc>
+            </a:pPr>
             <a:endParaRPr b="0" lang="en-US" sz="1800" spc="-1" strike="noStrike">
               <a:solidFill>
                 <a:srgbClr val="000000"/>
@@ -3148,7 +3308,7 @@
         <p:spPr>
           <a:xfrm>
             <a:off x="7360920" y="3986640"/>
-            <a:ext cx="109440" cy="109440"/>
+            <a:ext cx="109080" cy="109080"/>
           </a:xfrm>
           <a:prstGeom prst="ellipse">
             <a:avLst/>
@@ -3178,6 +3338,11 @@
             <a:noAutofit/>
           </a:bodyPr>
           <a:p>
+            <a:pPr>
+              <a:lnSpc>
+                <a:spcPct val="100000"/>
+              </a:lnSpc>
+            </a:pPr>
             <a:endParaRPr b="0" lang="en-US" sz="1800" spc="-1" strike="noStrike">
               <a:solidFill>
                 <a:srgbClr val="000000"/>
@@ -3196,7 +3361,7 @@
         <p:spPr>
           <a:xfrm>
             <a:off x="7708320" y="3986640"/>
-            <a:ext cx="109440" cy="109440"/>
+            <a:ext cx="109080" cy="109080"/>
           </a:xfrm>
           <a:prstGeom prst="ellipse">
             <a:avLst/>
@@ -3226,6 +3391,11 @@
             <a:noAutofit/>
           </a:bodyPr>
           <a:p>
+            <a:pPr>
+              <a:lnSpc>
+                <a:spcPct val="100000"/>
+              </a:lnSpc>
+            </a:pPr>
             <a:endParaRPr b="0" lang="en-US" sz="1800" spc="-1" strike="noStrike">
               <a:solidFill>
                 <a:srgbClr val="000000"/>
@@ -3244,7 +3414,7 @@
         <p:spPr>
           <a:xfrm>
             <a:off x="8055720" y="3986640"/>
-            <a:ext cx="109440" cy="109440"/>
+            <a:ext cx="109080" cy="109080"/>
           </a:xfrm>
           <a:prstGeom prst="ellipse">
             <a:avLst/>
@@ -3274,6 +3444,11 @@
             <a:noAutofit/>
           </a:bodyPr>
           <a:p>
+            <a:pPr>
+              <a:lnSpc>
+                <a:spcPct val="100000"/>
+              </a:lnSpc>
+            </a:pPr>
             <a:endParaRPr b="0" lang="en-US" sz="1800" spc="-1" strike="noStrike">
               <a:solidFill>
                 <a:srgbClr val="000000"/>
@@ -3292,7 +3467,7 @@
         <p:spPr>
           <a:xfrm>
             <a:off x="8403480" y="3986640"/>
-            <a:ext cx="109440" cy="109440"/>
+            <a:ext cx="109080" cy="109080"/>
           </a:xfrm>
           <a:prstGeom prst="ellipse">
             <a:avLst/>
@@ -3322,6 +3497,11 @@
             <a:noAutofit/>
           </a:bodyPr>
           <a:p>
+            <a:pPr>
+              <a:lnSpc>
+                <a:spcPct val="100000"/>
+              </a:lnSpc>
+            </a:pPr>
             <a:endParaRPr b="0" lang="en-US" sz="1800" spc="-1" strike="noStrike">
               <a:solidFill>
                 <a:srgbClr val="000000"/>
@@ -3340,7 +3520,7 @@
         <p:spPr>
           <a:xfrm>
             <a:off x="7360920" y="4334400"/>
-            <a:ext cx="109440" cy="109440"/>
+            <a:ext cx="109080" cy="109080"/>
           </a:xfrm>
           <a:prstGeom prst="ellipse">
             <a:avLst/>
@@ -3370,6 +3550,11 @@
             <a:noAutofit/>
           </a:bodyPr>
           <a:p>
+            <a:pPr>
+              <a:lnSpc>
+                <a:spcPct val="100000"/>
+              </a:lnSpc>
+            </a:pPr>
             <a:endParaRPr b="0" lang="en-US" sz="1800" spc="-1" strike="noStrike">
               <a:solidFill>
                 <a:srgbClr val="000000"/>
@@ -3388,7 +3573,7 @@
         <p:spPr>
           <a:xfrm>
             <a:off x="7708320" y="4334400"/>
-            <a:ext cx="109440" cy="109440"/>
+            <a:ext cx="109080" cy="109080"/>
           </a:xfrm>
           <a:prstGeom prst="ellipse">
             <a:avLst/>
@@ -3418,6 +3603,11 @@
             <a:noAutofit/>
           </a:bodyPr>
           <a:p>
+            <a:pPr>
+              <a:lnSpc>
+                <a:spcPct val="100000"/>
+              </a:lnSpc>
+            </a:pPr>
             <a:endParaRPr b="0" lang="en-US" sz="1800" spc="-1" strike="noStrike">
               <a:solidFill>
                 <a:srgbClr val="000000"/>
@@ -3436,7 +3626,7 @@
         <p:spPr>
           <a:xfrm>
             <a:off x="8055720" y="4334400"/>
-            <a:ext cx="109440" cy="109440"/>
+            <a:ext cx="109080" cy="109080"/>
           </a:xfrm>
           <a:prstGeom prst="ellipse">
             <a:avLst/>
@@ -3466,6 +3656,11 @@
             <a:noAutofit/>
           </a:bodyPr>
           <a:p>
+            <a:pPr>
+              <a:lnSpc>
+                <a:spcPct val="100000"/>
+              </a:lnSpc>
+            </a:pPr>
             <a:endParaRPr b="0" lang="en-US" sz="1800" spc="-1" strike="noStrike">
               <a:solidFill>
                 <a:srgbClr val="000000"/>
@@ -3484,7 +3679,7 @@
         <p:spPr>
           <a:xfrm>
             <a:off x="8403480" y="4334400"/>
-            <a:ext cx="109440" cy="109440"/>
+            <a:ext cx="109080" cy="109080"/>
           </a:xfrm>
           <a:prstGeom prst="ellipse">
             <a:avLst/>
@@ -3514,6 +3709,11 @@
             <a:noAutofit/>
           </a:bodyPr>
           <a:p>
+            <a:pPr>
+              <a:lnSpc>
+                <a:spcPct val="100000"/>
+              </a:lnSpc>
+            </a:pPr>
             <a:endParaRPr b="0" lang="en-US" sz="1800" spc="-1" strike="noStrike">
               <a:solidFill>
                 <a:srgbClr val="000000"/>
@@ -3532,7 +3732,7 @@
         <p:spPr>
           <a:xfrm>
             <a:off x="0" y="0"/>
-            <a:ext cx="200880" cy="5143320"/>
+            <a:ext cx="200520" cy="5142960"/>
           </a:xfrm>
           <a:prstGeom prst="rect">
             <a:avLst/>
@@ -3558,6 +3758,11 @@
             <a:noAutofit/>
           </a:bodyPr>
           <a:p>
+            <a:pPr>
+              <a:lnSpc>
+                <a:spcPct val="100000"/>
+              </a:lnSpc>
+            </a:pPr>
             <a:endParaRPr b="0" lang="en-US" sz="1800" spc="-1" strike="noStrike">
               <a:solidFill>
                 <a:srgbClr val="ffffff"/>
@@ -3576,7 +3781,7 @@
         <p:spPr>
           <a:xfrm>
             <a:off x="457200" y="914400"/>
-            <a:ext cx="3474360" cy="347040"/>
+            <a:ext cx="3474000" cy="346680"/>
           </a:xfrm>
           <a:prstGeom prst="rect">
             <a:avLst/>
@@ -3602,6 +3807,11 @@
             <a:noAutofit/>
           </a:bodyPr>
           <a:p>
+            <a:pPr>
+              <a:lnSpc>
+                <a:spcPct val="100000"/>
+              </a:lnSpc>
+            </a:pPr>
             <a:endParaRPr b="0" lang="en-US" sz="1800" spc="-1" strike="noStrike">
               <a:solidFill>
                 <a:srgbClr val="ffffff"/>
@@ -3620,7 +3830,7 @@
         <p:spPr>
           <a:xfrm>
             <a:off x="457200" y="914400"/>
-            <a:ext cx="3474360" cy="347040"/>
+            <a:ext cx="3474000" cy="346680"/>
           </a:xfrm>
           <a:prstGeom prst="rect">
             <a:avLst/>
@@ -3650,13 +3860,22 @@
               </a:tabLst>
             </a:pPr>
             <a:r>
-              <a:rPr b="1" lang="en-US" sz="850" spc="148" strike="noStrike">
+              <a:rPr b="1" lang="en-US" sz="850" spc="145" strike="noStrike">
                 <a:solidFill>
                   <a:srgbClr val="ffffff"/>
                 </a:solidFill>
                 <a:latin typeface="Calibri"/>
               </a:rPr>
-              <a:t>SAIGON TECHNOLOGY · PROJECT MANAGEMENT GUIDE</a:t>
+              <a:t> </a:t>
+            </a:r>
+            <a:r>
+              <a:rPr b="1" lang="en-US" sz="850" spc="145" strike="noStrike">
+                <a:solidFill>
+                  <a:srgbClr val="ffffff"/>
+                </a:solidFill>
+                <a:latin typeface="Calibri"/>
+              </a:rPr>
+              <a:t>PROJECT MANAGEMENT GUIDE</a:t>
             </a:r>
             <a:endParaRPr b="0" lang="en-US" sz="850" spc="-1" strike="noStrike">
               <a:solidFill>
@@ -3676,7 +3895,7 @@
         <p:spPr>
           <a:xfrm>
             <a:off x="457200" y="1371600"/>
-            <a:ext cx="5760360" cy="2651400"/>
+            <a:ext cx="5760000" cy="2651040"/>
           </a:xfrm>
           <a:prstGeom prst="rect">
             <a:avLst/>
@@ -3706,7 +3925,7 @@
               </a:tabLst>
             </a:pPr>
             <a:r>
-              <a:rPr b="1" lang="en-US" sz="5200" spc="97" strike="noStrike">
+              <a:rPr b="1" lang="en-US" sz="5200" spc="94" strike="noStrike">
                 <a:solidFill>
                   <a:srgbClr val="ffffff"/>
                 </a:solidFill>
@@ -3732,7 +3951,7 @@
               </a:tabLst>
             </a:pPr>
             <a:r>
-              <a:rPr b="1" lang="en-US" sz="5200" spc="97" strike="noStrike">
+              <a:rPr b="1" lang="en-US" sz="5200" spc="94" strike="noStrike">
                 <a:solidFill>
                   <a:srgbClr val="ffffff"/>
                 </a:solidFill>
@@ -3758,7 +3977,7 @@
               </a:tabLst>
             </a:pPr>
             <a:r>
-              <a:rPr b="1" lang="en-US" sz="5200" spc="97" strike="noStrike">
+              <a:rPr b="1" lang="en-US" sz="5200" spc="94" strike="noStrike">
                 <a:solidFill>
                   <a:srgbClr val="ffffff"/>
                 </a:solidFill>
@@ -3785,7 +4004,7 @@
         <p:spPr>
           <a:xfrm>
             <a:off x="457200" y="4069080"/>
-            <a:ext cx="5760360" cy="411120"/>
+            <a:ext cx="5760000" cy="410760"/>
           </a:xfrm>
           <a:prstGeom prst="rect">
             <a:avLst/>
@@ -3841,7 +4060,7 @@
         <p:spPr>
           <a:xfrm>
             <a:off x="0" y="4873680"/>
-            <a:ext cx="9143640" cy="269280"/>
+            <a:ext cx="9143280" cy="268920"/>
           </a:xfrm>
           <a:prstGeom prst="rect">
             <a:avLst/>
@@ -3867,6 +4086,11 @@
             <a:noAutofit/>
           </a:bodyPr>
           <a:p>
+            <a:pPr>
+              <a:lnSpc>
+                <a:spcPct val="100000"/>
+              </a:lnSpc>
+            </a:pPr>
             <a:endParaRPr b="0" lang="en-US" sz="1800" spc="-1" strike="noStrike">
               <a:solidFill>
                 <a:srgbClr val="ffffff"/>
@@ -3885,7 +4109,7 @@
         <p:spPr>
           <a:xfrm>
             <a:off x="0" y="4873680"/>
-            <a:ext cx="9143640" cy="269280"/>
+            <a:ext cx="9143280" cy="268920"/>
           </a:xfrm>
           <a:prstGeom prst="rect">
             <a:avLst/>
@@ -3969,7 +4193,7 @@
         <p:spPr>
           <a:xfrm>
             <a:off x="0" y="0"/>
-            <a:ext cx="9143640" cy="776880"/>
+            <a:ext cx="9143280" cy="776520"/>
           </a:xfrm>
           <a:prstGeom prst="rect">
             <a:avLst/>
@@ -3995,6 +4219,11 @@
             <a:noAutofit/>
           </a:bodyPr>
           <a:p>
+            <a:pPr>
+              <a:lnSpc>
+                <a:spcPct val="100000"/>
+              </a:lnSpc>
+            </a:pPr>
             <a:endParaRPr b="0" lang="en-US" sz="1800" spc="-1" strike="noStrike">
               <a:solidFill>
                 <a:srgbClr val="ffffff"/>
@@ -4013,7 +4242,7 @@
         <p:spPr>
           <a:xfrm>
             <a:off x="365760" y="0"/>
-            <a:ext cx="8412120" cy="776880"/>
+            <a:ext cx="8411760" cy="776520"/>
           </a:xfrm>
           <a:prstGeom prst="rect">
             <a:avLst/>
@@ -4043,7 +4272,7 @@
               </a:tabLst>
             </a:pPr>
             <a:r>
-              <a:rPr b="1" lang="en-US" sz="1700" spc="199" strike="noStrike">
+              <a:rPr b="1" lang="en-US" sz="1700" spc="197" strike="noStrike">
                 <a:solidFill>
                   <a:srgbClr val="ffffff"/>
                 </a:solidFill>
@@ -4069,7 +4298,7 @@
         <p:spPr>
           <a:xfrm>
             <a:off x="1737360" y="1874520"/>
-            <a:ext cx="228240" cy="164160"/>
+            <a:ext cx="227880" cy="163800"/>
           </a:xfrm>
           <a:prstGeom prst="rect">
             <a:avLst/>
@@ -4095,6 +4324,11 @@
             <a:noAutofit/>
           </a:bodyPr>
           <a:p>
+            <a:pPr>
+              <a:lnSpc>
+                <a:spcPct val="100000"/>
+              </a:lnSpc>
+            </a:pPr>
             <a:endParaRPr b="0" lang="en-US" sz="1800" spc="-1" strike="noStrike">
               <a:solidFill>
                 <a:srgbClr val="ffffff"/>
@@ -4113,7 +4347,7 @@
         <p:spPr>
           <a:xfrm>
             <a:off x="411480" y="896040"/>
-            <a:ext cx="1005480" cy="1005480"/>
+            <a:ext cx="1005120" cy="1005120"/>
           </a:xfrm>
           <a:prstGeom prst="ellipse">
             <a:avLst/>
@@ -4139,6 +4373,11 @@
             <a:noAutofit/>
           </a:bodyPr>
           <a:p>
+            <a:pPr>
+              <a:lnSpc>
+                <a:spcPct val="100000"/>
+              </a:lnSpc>
+            </a:pPr>
             <a:endParaRPr b="0" lang="en-US" sz="1800" spc="-1" strike="noStrike">
               <a:solidFill>
                 <a:srgbClr val="ffffff"/>
@@ -4157,7 +4396,7 @@
         <p:spPr>
           <a:xfrm>
             <a:off x="411480" y="896040"/>
-            <a:ext cx="1005480" cy="1005480"/>
+            <a:ext cx="1005120" cy="1005120"/>
           </a:xfrm>
           <a:prstGeom prst="rect">
             <a:avLst/>
@@ -4213,7 +4452,7 @@
         <p:spPr>
           <a:xfrm>
             <a:off x="228600" y="2011680"/>
-            <a:ext cx="1599840" cy="2815920"/>
+            <a:ext cx="1599480" cy="2815560"/>
           </a:xfrm>
           <a:prstGeom prst="rect">
             <a:avLst/>
@@ -4246,6 +4485,11 @@
             <a:noAutofit/>
           </a:bodyPr>
           <a:p>
+            <a:pPr>
+              <a:lnSpc>
+                <a:spcPct val="100000"/>
+              </a:lnSpc>
+            </a:pPr>
             <a:endParaRPr b="0" lang="en-US" sz="1800" spc="-1" strike="noStrike">
               <a:solidFill>
                 <a:srgbClr val="000000"/>
@@ -4264,7 +4508,7 @@
         <p:spPr>
           <a:xfrm>
             <a:off x="228600" y="2011680"/>
-            <a:ext cx="1599840" cy="475200"/>
+            <a:ext cx="1599480" cy="474840"/>
           </a:xfrm>
           <a:prstGeom prst="rect">
             <a:avLst/>
@@ -4290,6 +4534,11 @@
             <a:noAutofit/>
           </a:bodyPr>
           <a:p>
+            <a:pPr>
+              <a:lnSpc>
+                <a:spcPct val="100000"/>
+              </a:lnSpc>
+            </a:pPr>
             <a:endParaRPr b="0" lang="en-US" sz="1800" spc="-1" strike="noStrike">
               <a:solidFill>
                 <a:srgbClr val="ffffff"/>
@@ -4308,7 +4557,7 @@
         <p:spPr>
           <a:xfrm>
             <a:off x="228600" y="2011680"/>
-            <a:ext cx="1599840" cy="475200"/>
+            <a:ext cx="1599480" cy="474840"/>
           </a:xfrm>
           <a:prstGeom prst="rect">
             <a:avLst/>
@@ -4364,7 +4613,7 @@
         <p:spPr>
           <a:xfrm>
             <a:off x="320040" y="2541960"/>
-            <a:ext cx="1416960" cy="2212560"/>
+            <a:ext cx="1416600" cy="2212200"/>
           </a:xfrm>
           <a:prstGeom prst="rect">
             <a:avLst/>
@@ -4420,7 +4669,7 @@
         <p:spPr>
           <a:xfrm>
             <a:off x="3474720" y="1874520"/>
-            <a:ext cx="228240" cy="164160"/>
+            <a:ext cx="227880" cy="163800"/>
           </a:xfrm>
           <a:prstGeom prst="rect">
             <a:avLst/>
@@ -4446,6 +4695,11 @@
             <a:noAutofit/>
           </a:bodyPr>
           <a:p>
+            <a:pPr>
+              <a:lnSpc>
+                <a:spcPct val="100000"/>
+              </a:lnSpc>
+            </a:pPr>
             <a:endParaRPr b="0" lang="en-US" sz="1800" spc="-1" strike="noStrike">
               <a:solidFill>
                 <a:srgbClr val="ffffff"/>
@@ -4464,7 +4718,7 @@
         <p:spPr>
           <a:xfrm>
             <a:off x="2148840" y="896040"/>
-            <a:ext cx="1005480" cy="1005480"/>
+            <a:ext cx="1005120" cy="1005120"/>
           </a:xfrm>
           <a:prstGeom prst="ellipse">
             <a:avLst/>
@@ -4490,6 +4744,11 @@
             <a:noAutofit/>
           </a:bodyPr>
           <a:p>
+            <a:pPr>
+              <a:lnSpc>
+                <a:spcPct val="100000"/>
+              </a:lnSpc>
+            </a:pPr>
             <a:endParaRPr b="0" lang="en-US" sz="1800" spc="-1" strike="noStrike">
               <a:solidFill>
                 <a:srgbClr val="ffffff"/>
@@ -4508,7 +4767,7 @@
         <p:spPr>
           <a:xfrm>
             <a:off x="2148840" y="896040"/>
-            <a:ext cx="1005480" cy="1005480"/>
+            <a:ext cx="1005120" cy="1005120"/>
           </a:xfrm>
           <a:prstGeom prst="rect">
             <a:avLst/>
@@ -4564,7 +4823,7 @@
         <p:spPr>
           <a:xfrm>
             <a:off x="1965960" y="2011680"/>
-            <a:ext cx="1599840" cy="2815920"/>
+            <a:ext cx="1599480" cy="2815560"/>
           </a:xfrm>
           <a:prstGeom prst="rect">
             <a:avLst/>
@@ -4597,6 +4856,11 @@
             <a:noAutofit/>
           </a:bodyPr>
           <a:p>
+            <a:pPr>
+              <a:lnSpc>
+                <a:spcPct val="100000"/>
+              </a:lnSpc>
+            </a:pPr>
             <a:endParaRPr b="0" lang="en-US" sz="1800" spc="-1" strike="noStrike">
               <a:solidFill>
                 <a:srgbClr val="000000"/>
@@ -4615,7 +4879,7 @@
         <p:spPr>
           <a:xfrm>
             <a:off x="1965960" y="2011680"/>
-            <a:ext cx="1599840" cy="475200"/>
+            <a:ext cx="1599480" cy="474840"/>
           </a:xfrm>
           <a:prstGeom prst="rect">
             <a:avLst/>
@@ -4641,6 +4905,11 @@
             <a:noAutofit/>
           </a:bodyPr>
           <a:p>
+            <a:pPr>
+              <a:lnSpc>
+                <a:spcPct val="100000"/>
+              </a:lnSpc>
+            </a:pPr>
             <a:endParaRPr b="0" lang="en-US" sz="1800" spc="-1" strike="noStrike">
               <a:solidFill>
                 <a:srgbClr val="ffffff"/>
@@ -4659,7 +4928,7 @@
         <p:spPr>
           <a:xfrm>
             <a:off x="1965960" y="2011680"/>
-            <a:ext cx="1599840" cy="475200"/>
+            <a:ext cx="1599480" cy="474840"/>
           </a:xfrm>
           <a:prstGeom prst="rect">
             <a:avLst/>
@@ -4715,7 +4984,7 @@
         <p:spPr>
           <a:xfrm>
             <a:off x="2057400" y="2541960"/>
-            <a:ext cx="1416960" cy="2212560"/>
+            <a:ext cx="1416600" cy="2212200"/>
           </a:xfrm>
           <a:prstGeom prst="rect">
             <a:avLst/>
@@ -4771,7 +5040,7 @@
         <p:spPr>
           <a:xfrm>
             <a:off x="5212080" y="1874520"/>
-            <a:ext cx="228240" cy="164160"/>
+            <a:ext cx="227880" cy="163800"/>
           </a:xfrm>
           <a:prstGeom prst="rect">
             <a:avLst/>
@@ -4797,6 +5066,11 @@
             <a:noAutofit/>
           </a:bodyPr>
           <a:p>
+            <a:pPr>
+              <a:lnSpc>
+                <a:spcPct val="100000"/>
+              </a:lnSpc>
+            </a:pPr>
             <a:endParaRPr b="0" lang="en-US" sz="1800" spc="-1" strike="noStrike">
               <a:solidFill>
                 <a:srgbClr val="ffffff"/>
@@ -4815,7 +5089,7 @@
         <p:spPr>
           <a:xfrm>
             <a:off x="3886200" y="896040"/>
-            <a:ext cx="1005480" cy="1005480"/>
+            <a:ext cx="1005120" cy="1005120"/>
           </a:xfrm>
           <a:prstGeom prst="ellipse">
             <a:avLst/>
@@ -4841,6 +5115,11 @@
             <a:noAutofit/>
           </a:bodyPr>
           <a:p>
+            <a:pPr>
+              <a:lnSpc>
+                <a:spcPct val="100000"/>
+              </a:lnSpc>
+            </a:pPr>
             <a:endParaRPr b="0" lang="en-US" sz="1800" spc="-1" strike="noStrike">
               <a:solidFill>
                 <a:srgbClr val="ffffff"/>
@@ -4859,7 +5138,7 @@
         <p:spPr>
           <a:xfrm>
             <a:off x="3886200" y="896040"/>
-            <a:ext cx="1005480" cy="1005480"/>
+            <a:ext cx="1005120" cy="1005120"/>
           </a:xfrm>
           <a:prstGeom prst="rect">
             <a:avLst/>
@@ -4915,7 +5194,7 @@
         <p:spPr>
           <a:xfrm>
             <a:off x="3703320" y="2011680"/>
-            <a:ext cx="1599840" cy="2815920"/>
+            <a:ext cx="1599480" cy="2815560"/>
           </a:xfrm>
           <a:prstGeom prst="rect">
             <a:avLst/>
@@ -4948,6 +5227,11 @@
             <a:noAutofit/>
           </a:bodyPr>
           <a:p>
+            <a:pPr>
+              <a:lnSpc>
+                <a:spcPct val="100000"/>
+              </a:lnSpc>
+            </a:pPr>
             <a:endParaRPr b="0" lang="en-US" sz="1800" spc="-1" strike="noStrike">
               <a:solidFill>
                 <a:srgbClr val="000000"/>
@@ -4966,7 +5250,7 @@
         <p:spPr>
           <a:xfrm>
             <a:off x="3703320" y="2011680"/>
-            <a:ext cx="1599840" cy="475200"/>
+            <a:ext cx="1599480" cy="474840"/>
           </a:xfrm>
           <a:prstGeom prst="rect">
             <a:avLst/>
@@ -4992,6 +5276,11 @@
             <a:noAutofit/>
           </a:bodyPr>
           <a:p>
+            <a:pPr>
+              <a:lnSpc>
+                <a:spcPct val="100000"/>
+              </a:lnSpc>
+            </a:pPr>
             <a:endParaRPr b="0" lang="en-US" sz="1800" spc="-1" strike="noStrike">
               <a:solidFill>
                 <a:srgbClr val="ffffff"/>
@@ -5010,7 +5299,7 @@
         <p:spPr>
           <a:xfrm>
             <a:off x="3703320" y="2011680"/>
-            <a:ext cx="1599840" cy="475200"/>
+            <a:ext cx="1599480" cy="474840"/>
           </a:xfrm>
           <a:prstGeom prst="rect">
             <a:avLst/>
@@ -5066,7 +5355,7 @@
         <p:spPr>
           <a:xfrm>
             <a:off x="3794760" y="2541960"/>
-            <a:ext cx="1416960" cy="2212560"/>
+            <a:ext cx="1416600" cy="2212200"/>
           </a:xfrm>
           <a:prstGeom prst="rect">
             <a:avLst/>
@@ -5122,7 +5411,7 @@
         <p:spPr>
           <a:xfrm>
             <a:off x="6949440" y="1874520"/>
-            <a:ext cx="228240" cy="164160"/>
+            <a:ext cx="227880" cy="163800"/>
           </a:xfrm>
           <a:prstGeom prst="rect">
             <a:avLst/>
@@ -5148,6 +5437,11 @@
             <a:noAutofit/>
           </a:bodyPr>
           <a:p>
+            <a:pPr>
+              <a:lnSpc>
+                <a:spcPct val="100000"/>
+              </a:lnSpc>
+            </a:pPr>
             <a:endParaRPr b="0" lang="en-US" sz="1800" spc="-1" strike="noStrike">
               <a:solidFill>
                 <a:srgbClr val="ffffff"/>
@@ -5166,7 +5460,7 @@
         <p:spPr>
           <a:xfrm>
             <a:off x="5623560" y="896040"/>
-            <a:ext cx="1005480" cy="1005480"/>
+            <a:ext cx="1005120" cy="1005120"/>
           </a:xfrm>
           <a:prstGeom prst="ellipse">
             <a:avLst/>
@@ -5192,6 +5486,11 @@
             <a:noAutofit/>
           </a:bodyPr>
           <a:p>
+            <a:pPr>
+              <a:lnSpc>
+                <a:spcPct val="100000"/>
+              </a:lnSpc>
+            </a:pPr>
             <a:endParaRPr b="0" lang="en-US" sz="1800" spc="-1" strike="noStrike">
               <a:solidFill>
                 <a:srgbClr val="ffffff"/>
@@ -5210,7 +5509,7 @@
         <p:spPr>
           <a:xfrm>
             <a:off x="5623560" y="896040"/>
-            <a:ext cx="1005480" cy="1005480"/>
+            <a:ext cx="1005120" cy="1005120"/>
           </a:xfrm>
           <a:prstGeom prst="rect">
             <a:avLst/>
@@ -5266,7 +5565,7 @@
         <p:spPr>
           <a:xfrm>
             <a:off x="5440680" y="2011680"/>
-            <a:ext cx="1599840" cy="2815920"/>
+            <a:ext cx="1599480" cy="2815560"/>
           </a:xfrm>
           <a:prstGeom prst="rect">
             <a:avLst/>
@@ -5299,6 +5598,11 @@
             <a:noAutofit/>
           </a:bodyPr>
           <a:p>
+            <a:pPr>
+              <a:lnSpc>
+                <a:spcPct val="100000"/>
+              </a:lnSpc>
+            </a:pPr>
             <a:endParaRPr b="0" lang="en-US" sz="1800" spc="-1" strike="noStrike">
               <a:solidFill>
                 <a:srgbClr val="000000"/>
@@ -5317,7 +5621,7 @@
         <p:spPr>
           <a:xfrm>
             <a:off x="5440680" y="2011680"/>
-            <a:ext cx="1599840" cy="475200"/>
+            <a:ext cx="1599480" cy="474840"/>
           </a:xfrm>
           <a:prstGeom prst="rect">
             <a:avLst/>
@@ -5343,6 +5647,11 @@
             <a:noAutofit/>
           </a:bodyPr>
           <a:p>
+            <a:pPr>
+              <a:lnSpc>
+                <a:spcPct val="100000"/>
+              </a:lnSpc>
+            </a:pPr>
             <a:endParaRPr b="0" lang="en-US" sz="1800" spc="-1" strike="noStrike">
               <a:solidFill>
                 <a:srgbClr val="ffffff"/>
@@ -5361,7 +5670,7 @@
         <p:spPr>
           <a:xfrm>
             <a:off x="5440680" y="2011680"/>
-            <a:ext cx="1599840" cy="475200"/>
+            <a:ext cx="1599480" cy="474840"/>
           </a:xfrm>
           <a:prstGeom prst="rect">
             <a:avLst/>
@@ -5417,7 +5726,7 @@
         <p:spPr>
           <a:xfrm>
             <a:off x="5532120" y="2541960"/>
-            <a:ext cx="1416960" cy="2212560"/>
+            <a:ext cx="1416600" cy="2212200"/>
           </a:xfrm>
           <a:prstGeom prst="rect">
             <a:avLst/>
@@ -5473,7 +5782,7 @@
         <p:spPr>
           <a:xfrm>
             <a:off x="7360920" y="896040"/>
-            <a:ext cx="1005480" cy="1005480"/>
+            <a:ext cx="1005120" cy="1005120"/>
           </a:xfrm>
           <a:prstGeom prst="ellipse">
             <a:avLst/>
@@ -5499,6 +5808,11 @@
             <a:noAutofit/>
           </a:bodyPr>
           <a:p>
+            <a:pPr>
+              <a:lnSpc>
+                <a:spcPct val="100000"/>
+              </a:lnSpc>
+            </a:pPr>
             <a:endParaRPr b="0" lang="en-US" sz="1800" spc="-1" strike="noStrike">
               <a:solidFill>
                 <a:srgbClr val="ffffff"/>
@@ -5517,7 +5831,7 @@
         <p:spPr>
           <a:xfrm>
             <a:off x="7360920" y="896040"/>
-            <a:ext cx="1005480" cy="1005480"/>
+            <a:ext cx="1005120" cy="1005120"/>
           </a:xfrm>
           <a:prstGeom prst="rect">
             <a:avLst/>
@@ -5573,7 +5887,7 @@
         <p:spPr>
           <a:xfrm>
             <a:off x="7178040" y="2011680"/>
-            <a:ext cx="1599840" cy="2815920"/>
+            <a:ext cx="1599480" cy="2815560"/>
           </a:xfrm>
           <a:prstGeom prst="rect">
             <a:avLst/>
@@ -5606,6 +5920,11 @@
             <a:noAutofit/>
           </a:bodyPr>
           <a:p>
+            <a:pPr>
+              <a:lnSpc>
+                <a:spcPct val="100000"/>
+              </a:lnSpc>
+            </a:pPr>
             <a:endParaRPr b="0" lang="en-US" sz="1800" spc="-1" strike="noStrike">
               <a:solidFill>
                 <a:srgbClr val="000000"/>
@@ -5624,7 +5943,7 @@
         <p:spPr>
           <a:xfrm>
             <a:off x="7178040" y="2011680"/>
-            <a:ext cx="1599840" cy="475200"/>
+            <a:ext cx="1599480" cy="474840"/>
           </a:xfrm>
           <a:prstGeom prst="rect">
             <a:avLst/>
@@ -5650,6 +5969,11 @@
             <a:noAutofit/>
           </a:bodyPr>
           <a:p>
+            <a:pPr>
+              <a:lnSpc>
+                <a:spcPct val="100000"/>
+              </a:lnSpc>
+            </a:pPr>
             <a:endParaRPr b="0" lang="en-US" sz="1800" spc="-1" strike="noStrike">
               <a:solidFill>
                 <a:srgbClr val="ffffff"/>
@@ -5668,7 +5992,7 @@
         <p:spPr>
           <a:xfrm>
             <a:off x="7178040" y="2011680"/>
-            <a:ext cx="1599840" cy="475200"/>
+            <a:ext cx="1599480" cy="474840"/>
           </a:xfrm>
           <a:prstGeom prst="rect">
             <a:avLst/>
@@ -5724,7 +6048,7 @@
         <p:spPr>
           <a:xfrm>
             <a:off x="7269480" y="2541960"/>
-            <a:ext cx="1416960" cy="2212560"/>
+            <a:ext cx="1416600" cy="2212200"/>
           </a:xfrm>
           <a:prstGeom prst="rect">
             <a:avLst/>
@@ -5817,7 +6141,7 @@
         <p:spPr>
           <a:xfrm>
             <a:off x="0" y="0"/>
-            <a:ext cx="9143640" cy="776880"/>
+            <a:ext cx="9143280" cy="776520"/>
           </a:xfrm>
           <a:prstGeom prst="rect">
             <a:avLst/>
@@ -5843,6 +6167,11 @@
             <a:noAutofit/>
           </a:bodyPr>
           <a:p>
+            <a:pPr>
+              <a:lnSpc>
+                <a:spcPct val="100000"/>
+              </a:lnSpc>
+            </a:pPr>
             <a:endParaRPr b="0" lang="en-US" sz="1800" spc="-1" strike="noStrike">
               <a:solidFill>
                 <a:srgbClr val="ffffff"/>
@@ -5861,7 +6190,7 @@
         <p:spPr>
           <a:xfrm>
             <a:off x="365760" y="0"/>
-            <a:ext cx="8412120" cy="776880"/>
+            <a:ext cx="8411760" cy="776520"/>
           </a:xfrm>
           <a:prstGeom prst="rect">
             <a:avLst/>
@@ -5891,7 +6220,7 @@
               </a:tabLst>
             </a:pPr>
             <a:r>
-              <a:rPr b="1" lang="en-US" sz="1800" spc="199" strike="noStrike">
+              <a:rPr b="1" lang="en-US" sz="1800" spc="197" strike="noStrike">
                 <a:solidFill>
                   <a:srgbClr val="ffffff"/>
                 </a:solidFill>
@@ -5917,7 +6246,7 @@
         <p:spPr>
           <a:xfrm>
             <a:off x="274320" y="914400"/>
-            <a:ext cx="4160160" cy="3913200"/>
+            <a:ext cx="4159800" cy="3912840"/>
           </a:xfrm>
           <a:prstGeom prst="rect">
             <a:avLst/>
@@ -5950,6 +6279,11 @@
             <a:noAutofit/>
           </a:bodyPr>
           <a:p>
+            <a:pPr>
+              <a:lnSpc>
+                <a:spcPct val="100000"/>
+              </a:lnSpc>
+            </a:pPr>
             <a:endParaRPr b="0" lang="en-US" sz="1800" spc="-1" strike="noStrike">
               <a:solidFill>
                 <a:srgbClr val="ffffff"/>
@@ -5968,7 +6302,7 @@
         <p:spPr>
           <a:xfrm>
             <a:off x="274320" y="914400"/>
-            <a:ext cx="4160160" cy="502560"/>
+            <a:ext cx="4159800" cy="502200"/>
           </a:xfrm>
           <a:prstGeom prst="rect">
             <a:avLst/>
@@ -5994,6 +6328,11 @@
             <a:noAutofit/>
           </a:bodyPr>
           <a:p>
+            <a:pPr>
+              <a:lnSpc>
+                <a:spcPct val="100000"/>
+              </a:lnSpc>
+            </a:pPr>
             <a:endParaRPr b="0" lang="en-US" sz="1800" spc="-1" strike="noStrike">
               <a:solidFill>
                 <a:srgbClr val="ffffff"/>
@@ -6012,7 +6351,7 @@
         <p:spPr>
           <a:xfrm>
             <a:off x="274320" y="914400"/>
-            <a:ext cx="4160160" cy="502560"/>
+            <a:ext cx="4159800" cy="502200"/>
           </a:xfrm>
           <a:prstGeom prst="rect">
             <a:avLst/>
@@ -6077,7 +6416,7 @@
         <p:spPr>
           <a:xfrm>
             <a:off x="411480" y="1591200"/>
-            <a:ext cx="273960" cy="273960"/>
+            <a:ext cx="273600" cy="273600"/>
           </a:xfrm>
           <a:prstGeom prst="ellipse">
             <a:avLst/>
@@ -6103,6 +6442,11 @@
             <a:noAutofit/>
           </a:bodyPr>
           <a:p>
+            <a:pPr>
+              <a:lnSpc>
+                <a:spcPct val="100000"/>
+              </a:lnSpc>
+            </a:pPr>
             <a:endParaRPr b="0" lang="en-US" sz="1800" spc="-1" strike="noStrike">
               <a:solidFill>
                 <a:srgbClr val="ffffff"/>
@@ -6121,7 +6465,7 @@
         <p:spPr>
           <a:xfrm>
             <a:off x="777240" y="1517760"/>
-            <a:ext cx="3520080" cy="255600"/>
+            <a:ext cx="3519720" cy="255240"/>
           </a:xfrm>
           <a:prstGeom prst="rect">
             <a:avLst/>
@@ -6177,7 +6521,7 @@
         <p:spPr>
           <a:xfrm>
             <a:off x="777240" y="1783080"/>
-            <a:ext cx="3520080" cy="200880"/>
+            <a:ext cx="3519720" cy="200520"/>
           </a:xfrm>
           <a:prstGeom prst="rect">
             <a:avLst/>
@@ -6233,7 +6577,7 @@
         <p:spPr>
           <a:xfrm>
             <a:off x="411480" y="2139840"/>
-            <a:ext cx="273960" cy="273960"/>
+            <a:ext cx="273600" cy="273600"/>
           </a:xfrm>
           <a:prstGeom prst="ellipse">
             <a:avLst/>
@@ -6259,6 +6603,11 @@
             <a:noAutofit/>
           </a:bodyPr>
           <a:p>
+            <a:pPr>
+              <a:lnSpc>
+                <a:spcPct val="100000"/>
+              </a:lnSpc>
+            </a:pPr>
             <a:endParaRPr b="0" lang="en-US" sz="1800" spc="-1" strike="noStrike">
               <a:solidFill>
                 <a:srgbClr val="ffffff"/>
@@ -6277,7 +6626,7 @@
         <p:spPr>
           <a:xfrm>
             <a:off x="777240" y="2066400"/>
-            <a:ext cx="3520080" cy="255600"/>
+            <a:ext cx="3519720" cy="255240"/>
           </a:xfrm>
           <a:prstGeom prst="rect">
             <a:avLst/>
@@ -6333,7 +6682,7 @@
         <p:spPr>
           <a:xfrm>
             <a:off x="777240" y="2331720"/>
-            <a:ext cx="3520080" cy="200880"/>
+            <a:ext cx="3519720" cy="200520"/>
           </a:xfrm>
           <a:prstGeom prst="rect">
             <a:avLst/>
@@ -6389,7 +6738,7 @@
         <p:spPr>
           <a:xfrm>
             <a:off x="411480" y="2688480"/>
-            <a:ext cx="273960" cy="273960"/>
+            <a:ext cx="273600" cy="273600"/>
           </a:xfrm>
           <a:prstGeom prst="ellipse">
             <a:avLst/>
@@ -6415,6 +6764,11 @@
             <a:noAutofit/>
           </a:bodyPr>
           <a:p>
+            <a:pPr>
+              <a:lnSpc>
+                <a:spcPct val="100000"/>
+              </a:lnSpc>
+            </a:pPr>
             <a:endParaRPr b="0" lang="en-US" sz="1800" spc="-1" strike="noStrike">
               <a:solidFill>
                 <a:srgbClr val="ffffff"/>
@@ -6433,7 +6787,7 @@
         <p:spPr>
           <a:xfrm>
             <a:off x="777240" y="2615040"/>
-            <a:ext cx="3520080" cy="255600"/>
+            <a:ext cx="3519720" cy="255240"/>
           </a:xfrm>
           <a:prstGeom prst="rect">
             <a:avLst/>
@@ -6489,7 +6843,7 @@
         <p:spPr>
           <a:xfrm>
             <a:off x="777240" y="2880360"/>
-            <a:ext cx="3520080" cy="200880"/>
+            <a:ext cx="3519720" cy="200520"/>
           </a:xfrm>
           <a:prstGeom prst="rect">
             <a:avLst/>
@@ -6545,7 +6899,7 @@
         <p:spPr>
           <a:xfrm>
             <a:off x="411480" y="3237120"/>
-            <a:ext cx="273960" cy="273960"/>
+            <a:ext cx="273600" cy="273600"/>
           </a:xfrm>
           <a:prstGeom prst="ellipse">
             <a:avLst/>
@@ -6571,6 +6925,11 @@
             <a:noAutofit/>
           </a:bodyPr>
           <a:p>
+            <a:pPr>
+              <a:lnSpc>
+                <a:spcPct val="100000"/>
+              </a:lnSpc>
+            </a:pPr>
             <a:endParaRPr b="0" lang="en-US" sz="1800" spc="-1" strike="noStrike">
               <a:solidFill>
                 <a:srgbClr val="ffffff"/>
@@ -6589,7 +6948,7 @@
         <p:spPr>
           <a:xfrm>
             <a:off x="777240" y="3163680"/>
-            <a:ext cx="3520080" cy="255600"/>
+            <a:ext cx="3519720" cy="255240"/>
           </a:xfrm>
           <a:prstGeom prst="rect">
             <a:avLst/>
@@ -6645,7 +7004,7 @@
         <p:spPr>
           <a:xfrm>
             <a:off x="777240" y="3429000"/>
-            <a:ext cx="3520080" cy="200880"/>
+            <a:ext cx="3519720" cy="200520"/>
           </a:xfrm>
           <a:prstGeom prst="rect">
             <a:avLst/>
@@ -6701,7 +7060,7 @@
         <p:spPr>
           <a:xfrm>
             <a:off x="411480" y="3785760"/>
-            <a:ext cx="273960" cy="273960"/>
+            <a:ext cx="273600" cy="273600"/>
           </a:xfrm>
           <a:prstGeom prst="ellipse">
             <a:avLst/>
@@ -6727,6 +7086,11 @@
             <a:noAutofit/>
           </a:bodyPr>
           <a:p>
+            <a:pPr>
+              <a:lnSpc>
+                <a:spcPct val="100000"/>
+              </a:lnSpc>
+            </a:pPr>
             <a:endParaRPr b="0" lang="en-US" sz="1800" spc="-1" strike="noStrike">
               <a:solidFill>
                 <a:srgbClr val="ffffff"/>
@@ -6745,7 +7109,7 @@
         <p:spPr>
           <a:xfrm>
             <a:off x="777240" y="3712320"/>
-            <a:ext cx="3520080" cy="255600"/>
+            <a:ext cx="3519720" cy="255240"/>
           </a:xfrm>
           <a:prstGeom prst="rect">
             <a:avLst/>
@@ -6801,7 +7165,7 @@
         <p:spPr>
           <a:xfrm>
             <a:off x="777240" y="3977640"/>
-            <a:ext cx="3520080" cy="200880"/>
+            <a:ext cx="3519720" cy="200520"/>
           </a:xfrm>
           <a:prstGeom prst="rect">
             <a:avLst/>
@@ -6857,7 +7221,7 @@
         <p:spPr>
           <a:xfrm>
             <a:off x="411480" y="4334400"/>
-            <a:ext cx="273960" cy="273960"/>
+            <a:ext cx="273600" cy="273600"/>
           </a:xfrm>
           <a:prstGeom prst="ellipse">
             <a:avLst/>
@@ -6883,6 +7247,11 @@
             <a:noAutofit/>
           </a:bodyPr>
           <a:p>
+            <a:pPr>
+              <a:lnSpc>
+                <a:spcPct val="100000"/>
+              </a:lnSpc>
+            </a:pPr>
             <a:endParaRPr b="0" lang="en-US" sz="1800" spc="-1" strike="noStrike">
               <a:solidFill>
                 <a:srgbClr val="ffffff"/>
@@ -6901,7 +7270,7 @@
         <p:spPr>
           <a:xfrm>
             <a:off x="777240" y="4260960"/>
-            <a:ext cx="3520080" cy="255600"/>
+            <a:ext cx="3519720" cy="255240"/>
           </a:xfrm>
           <a:prstGeom prst="rect">
             <a:avLst/>
@@ -6957,7 +7326,7 @@
         <p:spPr>
           <a:xfrm>
             <a:off x="777240" y="4526280"/>
-            <a:ext cx="3520080" cy="200880"/>
+            <a:ext cx="3519720" cy="200520"/>
           </a:xfrm>
           <a:prstGeom prst="rect">
             <a:avLst/>
@@ -7013,7 +7382,7 @@
         <p:spPr>
           <a:xfrm>
             <a:off x="4709160" y="914400"/>
-            <a:ext cx="4160160" cy="3913200"/>
+            <a:ext cx="4159800" cy="3912840"/>
           </a:xfrm>
           <a:prstGeom prst="rect">
             <a:avLst/>
@@ -7046,6 +7415,11 @@
             <a:noAutofit/>
           </a:bodyPr>
           <a:p>
+            <a:pPr>
+              <a:lnSpc>
+                <a:spcPct val="100000"/>
+              </a:lnSpc>
+            </a:pPr>
             <a:endParaRPr b="0" lang="en-US" sz="1800" spc="-1" strike="noStrike">
               <a:solidFill>
                 <a:srgbClr val="ffffff"/>
@@ -7064,7 +7438,7 @@
         <p:spPr>
           <a:xfrm>
             <a:off x="4709160" y="914400"/>
-            <a:ext cx="4160160" cy="502560"/>
+            <a:ext cx="4159800" cy="502200"/>
           </a:xfrm>
           <a:prstGeom prst="rect">
             <a:avLst/>
@@ -7090,6 +7464,11 @@
             <a:noAutofit/>
           </a:bodyPr>
           <a:p>
+            <a:pPr>
+              <a:lnSpc>
+                <a:spcPct val="100000"/>
+              </a:lnSpc>
+            </a:pPr>
             <a:endParaRPr b="0" lang="en-US" sz="1800" spc="-1" strike="noStrike">
               <a:solidFill>
                 <a:srgbClr val="000000"/>
@@ -7108,7 +7487,7 @@
         <p:spPr>
           <a:xfrm>
             <a:off x="4709160" y="914400"/>
-            <a:ext cx="4160160" cy="502560"/>
+            <a:ext cx="4159800" cy="502200"/>
           </a:xfrm>
           <a:prstGeom prst="rect">
             <a:avLst/>
@@ -7173,7 +7552,7 @@
         <p:spPr>
           <a:xfrm>
             <a:off x="4827960" y="1591200"/>
-            <a:ext cx="273960" cy="273960"/>
+            <a:ext cx="273600" cy="273600"/>
           </a:xfrm>
           <a:prstGeom prst="ellipse">
             <a:avLst/>
@@ -7199,6 +7578,11 @@
             <a:noAutofit/>
           </a:bodyPr>
           <a:p>
+            <a:pPr>
+              <a:lnSpc>
+                <a:spcPct val="100000"/>
+              </a:lnSpc>
+            </a:pPr>
             <a:endParaRPr b="0" lang="en-US" sz="1800" spc="-1" strike="noStrike">
               <a:solidFill>
                 <a:srgbClr val="ffffff"/>
@@ -7217,7 +7601,7 @@
         <p:spPr>
           <a:xfrm>
             <a:off x="5166360" y="1481400"/>
-            <a:ext cx="3565800" cy="502560"/>
+            <a:ext cx="3565440" cy="502200"/>
           </a:xfrm>
           <a:prstGeom prst="rect">
             <a:avLst/>
@@ -7273,7 +7657,7 @@
         <p:spPr>
           <a:xfrm>
             <a:off x="4827960" y="2139840"/>
-            <a:ext cx="273960" cy="273960"/>
+            <a:ext cx="273600" cy="273600"/>
           </a:xfrm>
           <a:prstGeom prst="ellipse">
             <a:avLst/>
@@ -7299,6 +7683,11 @@
             <a:noAutofit/>
           </a:bodyPr>
           <a:p>
+            <a:pPr>
+              <a:lnSpc>
+                <a:spcPct val="100000"/>
+              </a:lnSpc>
+            </a:pPr>
             <a:endParaRPr b="0" lang="en-US" sz="1800" spc="-1" strike="noStrike">
               <a:solidFill>
                 <a:srgbClr val="000000"/>
@@ -7317,7 +7706,7 @@
         <p:spPr>
           <a:xfrm>
             <a:off x="5166360" y="2030040"/>
-            <a:ext cx="3565800" cy="502560"/>
+            <a:ext cx="3565440" cy="502200"/>
           </a:xfrm>
           <a:prstGeom prst="rect">
             <a:avLst/>
@@ -7373,7 +7762,7 @@
         <p:spPr>
           <a:xfrm>
             <a:off x="4827960" y="2688480"/>
-            <a:ext cx="273960" cy="273960"/>
+            <a:ext cx="273600" cy="273600"/>
           </a:xfrm>
           <a:prstGeom prst="ellipse">
             <a:avLst/>
@@ -7399,6 +7788,11 @@
             <a:noAutofit/>
           </a:bodyPr>
           <a:p>
+            <a:pPr>
+              <a:lnSpc>
+                <a:spcPct val="100000"/>
+              </a:lnSpc>
+            </a:pPr>
             <a:endParaRPr b="0" lang="en-US" sz="1800" spc="-1" strike="noStrike">
               <a:solidFill>
                 <a:srgbClr val="ffffff"/>
@@ -7417,7 +7811,7 @@
         <p:spPr>
           <a:xfrm>
             <a:off x="5166360" y="2578680"/>
-            <a:ext cx="3565800" cy="502560"/>
+            <a:ext cx="3565440" cy="502200"/>
           </a:xfrm>
           <a:prstGeom prst="rect">
             <a:avLst/>
@@ -7473,7 +7867,7 @@
         <p:spPr>
           <a:xfrm>
             <a:off x="4827960" y="3237120"/>
-            <a:ext cx="273960" cy="273960"/>
+            <a:ext cx="273600" cy="273600"/>
           </a:xfrm>
           <a:prstGeom prst="ellipse">
             <a:avLst/>
@@ -7499,6 +7893,11 @@
             <a:noAutofit/>
           </a:bodyPr>
           <a:p>
+            <a:pPr>
+              <a:lnSpc>
+                <a:spcPct val="100000"/>
+              </a:lnSpc>
+            </a:pPr>
             <a:endParaRPr b="0" lang="en-US" sz="1800" spc="-1" strike="noStrike">
               <a:solidFill>
                 <a:srgbClr val="ffffff"/>
@@ -7517,7 +7916,7 @@
         <p:spPr>
           <a:xfrm>
             <a:off x="5166360" y="3127320"/>
-            <a:ext cx="3565800" cy="502560"/>
+            <a:ext cx="3565440" cy="502200"/>
           </a:xfrm>
           <a:prstGeom prst="rect">
             <a:avLst/>
@@ -7573,7 +7972,7 @@
         <p:spPr>
           <a:xfrm>
             <a:off x="4827960" y="3785760"/>
-            <a:ext cx="273960" cy="273960"/>
+            <a:ext cx="273600" cy="273600"/>
           </a:xfrm>
           <a:prstGeom prst="ellipse">
             <a:avLst/>
@@ -7599,6 +7998,11 @@
             <a:noAutofit/>
           </a:bodyPr>
           <a:p>
+            <a:pPr>
+              <a:lnSpc>
+                <a:spcPct val="100000"/>
+              </a:lnSpc>
+            </a:pPr>
             <a:endParaRPr b="0" lang="en-US" sz="1800" spc="-1" strike="noStrike">
               <a:solidFill>
                 <a:srgbClr val="ffffff"/>
@@ -7617,7 +8021,7 @@
         <p:spPr>
           <a:xfrm>
             <a:off x="5166360" y="3675960"/>
-            <a:ext cx="3565800" cy="502560"/>
+            <a:ext cx="3565440" cy="502200"/>
           </a:xfrm>
           <a:prstGeom prst="rect">
             <a:avLst/>
@@ -7673,7 +8077,7 @@
         <p:spPr>
           <a:xfrm>
             <a:off x="4827960" y="4334400"/>
-            <a:ext cx="273960" cy="273960"/>
+            <a:ext cx="273600" cy="273600"/>
           </a:xfrm>
           <a:prstGeom prst="ellipse">
             <a:avLst/>
@@ -7699,6 +8103,11 @@
             <a:noAutofit/>
           </a:bodyPr>
           <a:p>
+            <a:pPr>
+              <a:lnSpc>
+                <a:spcPct val="100000"/>
+              </a:lnSpc>
+            </a:pPr>
             <a:endParaRPr b="0" lang="en-US" sz="1800" spc="-1" strike="noStrike">
               <a:solidFill>
                 <a:srgbClr val="ffffff"/>
@@ -7717,7 +8126,7 @@
         <p:spPr>
           <a:xfrm>
             <a:off x="5166360" y="4224600"/>
-            <a:ext cx="3565800" cy="502560"/>
+            <a:ext cx="3565440" cy="502200"/>
           </a:xfrm>
           <a:prstGeom prst="rect">
             <a:avLst/>
@@ -7810,7 +8219,7 @@
         <p:spPr>
           <a:xfrm>
             <a:off x="-1371600" y="2286000"/>
-            <a:ext cx="4114440" cy="4114440"/>
+            <a:ext cx="4114080" cy="4114080"/>
           </a:xfrm>
           <a:prstGeom prst="ellipse">
             <a:avLst/>
@@ -7838,6 +8247,11 @@
             <a:noAutofit/>
           </a:bodyPr>
           <a:p>
+            <a:pPr>
+              <a:lnSpc>
+                <a:spcPct val="100000"/>
+              </a:lnSpc>
+            </a:pPr>
             <a:endParaRPr b="0" lang="en-US" sz="1800" spc="-1" strike="noStrike">
               <a:solidFill>
                 <a:srgbClr val="ffffff"/>
@@ -7856,7 +8270,7 @@
         <p:spPr>
           <a:xfrm>
             <a:off x="7132320" y="-914400"/>
-            <a:ext cx="3657240" cy="3657240"/>
+            <a:ext cx="3656880" cy="3656880"/>
           </a:xfrm>
           <a:prstGeom prst="ellipse">
             <a:avLst/>
@@ -7884,6 +8298,11 @@
             <a:noAutofit/>
           </a:bodyPr>
           <a:p>
+            <a:pPr>
+              <a:lnSpc>
+                <a:spcPct val="100000"/>
+              </a:lnSpc>
+            </a:pPr>
             <a:endParaRPr b="0" lang="en-US" sz="1800" spc="-1" strike="noStrike">
               <a:solidFill>
                 <a:srgbClr val="ffffff"/>
@@ -7902,7 +8321,7 @@
         <p:spPr>
           <a:xfrm>
             <a:off x="0" y="0"/>
-            <a:ext cx="200880" cy="5143320"/>
+            <a:ext cx="200520" cy="5142960"/>
           </a:xfrm>
           <a:prstGeom prst="rect">
             <a:avLst/>
@@ -7928,6 +8347,11 @@
             <a:noAutofit/>
           </a:bodyPr>
           <a:p>
+            <a:pPr>
+              <a:lnSpc>
+                <a:spcPct val="100000"/>
+              </a:lnSpc>
+            </a:pPr>
             <a:endParaRPr b="0" lang="en-US" sz="1800" spc="-1" strike="noStrike">
               <a:solidFill>
                 <a:srgbClr val="ffffff"/>
@@ -7946,7 +8370,7 @@
         <p:spPr>
           <a:xfrm>
             <a:off x="0" y="0"/>
-            <a:ext cx="9143640" cy="776880"/>
+            <a:ext cx="9143280" cy="776520"/>
           </a:xfrm>
           <a:prstGeom prst="rect">
             <a:avLst/>
@@ -7972,6 +8396,11 @@
             <a:noAutofit/>
           </a:bodyPr>
           <a:p>
+            <a:pPr>
+              <a:lnSpc>
+                <a:spcPct val="100000"/>
+              </a:lnSpc>
+            </a:pPr>
             <a:endParaRPr b="0" lang="en-US" sz="1800" spc="-1" strike="noStrike">
               <a:solidFill>
                 <a:srgbClr val="ffffff"/>
@@ -7990,7 +8419,7 @@
         <p:spPr>
           <a:xfrm>
             <a:off x="365760" y="0"/>
-            <a:ext cx="8412120" cy="776880"/>
+            <a:ext cx="8411760" cy="776520"/>
           </a:xfrm>
           <a:prstGeom prst="rect">
             <a:avLst/>
@@ -8020,7 +8449,7 @@
               </a:tabLst>
             </a:pPr>
             <a:r>
-              <a:rPr b="1" lang="en-US" sz="2000" spc="299" strike="noStrike">
+              <a:rPr b="1" lang="en-US" sz="2000" spc="296" strike="noStrike">
                 <a:solidFill>
                   <a:srgbClr val="ffffff"/>
                 </a:solidFill>
@@ -8046,7 +8475,7 @@
         <p:spPr>
           <a:xfrm>
             <a:off x="411480" y="960120"/>
-            <a:ext cx="8320680" cy="566640"/>
+            <a:ext cx="8320320" cy="566280"/>
           </a:xfrm>
           <a:prstGeom prst="rect">
             <a:avLst/>
@@ -8074,6 +8503,11 @@
             <a:noAutofit/>
           </a:bodyPr>
           <a:p>
+            <a:pPr>
+              <a:lnSpc>
+                <a:spcPct val="100000"/>
+              </a:lnSpc>
+            </a:pPr>
             <a:endParaRPr b="0" lang="en-US" sz="1800" spc="-1" strike="noStrike">
               <a:solidFill>
                 <a:srgbClr val="ffffff"/>
@@ -8092,7 +8526,7 @@
         <p:spPr>
           <a:xfrm>
             <a:off x="502920" y="1078920"/>
-            <a:ext cx="328680" cy="328680"/>
+            <a:ext cx="328320" cy="328320"/>
           </a:xfrm>
           <a:prstGeom prst="ellipse">
             <a:avLst/>
@@ -8118,6 +8552,11 @@
             <a:noAutofit/>
           </a:bodyPr>
           <a:p>
+            <a:pPr>
+              <a:lnSpc>
+                <a:spcPct val="100000"/>
+              </a:lnSpc>
+            </a:pPr>
             <a:endParaRPr b="0" lang="en-US" sz="1800" spc="-1" strike="noStrike">
               <a:solidFill>
                 <a:srgbClr val="ffffff"/>
@@ -8136,7 +8575,7 @@
         <p:spPr>
           <a:xfrm>
             <a:off x="502920" y="1078920"/>
-            <a:ext cx="328680" cy="328680"/>
+            <a:ext cx="328320" cy="328320"/>
           </a:xfrm>
           <a:prstGeom prst="rect">
             <a:avLst/>
@@ -8192,7 +8631,7 @@
         <p:spPr>
           <a:xfrm>
             <a:off x="960120" y="960120"/>
-            <a:ext cx="7607520" cy="566640"/>
+            <a:ext cx="7607160" cy="566280"/>
           </a:xfrm>
           <a:prstGeom prst="rect">
             <a:avLst/>
@@ -8248,7 +8687,7 @@
         <p:spPr>
           <a:xfrm>
             <a:off x="411480" y="1627560"/>
-            <a:ext cx="8320680" cy="566640"/>
+            <a:ext cx="8320320" cy="566280"/>
           </a:xfrm>
           <a:prstGeom prst="rect">
             <a:avLst/>
@@ -8276,6 +8715,11 @@
             <a:noAutofit/>
           </a:bodyPr>
           <a:p>
+            <a:pPr>
+              <a:lnSpc>
+                <a:spcPct val="100000"/>
+              </a:lnSpc>
+            </a:pPr>
             <a:endParaRPr b="0" lang="en-US" sz="1800" spc="-1" strike="noStrike">
               <a:solidFill>
                 <a:srgbClr val="ffffff"/>
@@ -8294,7 +8738,7 @@
         <p:spPr>
           <a:xfrm>
             <a:off x="502920" y="1746360"/>
-            <a:ext cx="328680" cy="328680"/>
+            <a:ext cx="328320" cy="328320"/>
           </a:xfrm>
           <a:prstGeom prst="ellipse">
             <a:avLst/>
@@ -8320,6 +8764,11 @@
             <a:noAutofit/>
           </a:bodyPr>
           <a:p>
+            <a:pPr>
+              <a:lnSpc>
+                <a:spcPct val="100000"/>
+              </a:lnSpc>
+            </a:pPr>
             <a:endParaRPr b="0" lang="en-US" sz="1800" spc="-1" strike="noStrike">
               <a:solidFill>
                 <a:srgbClr val="ffffff"/>
@@ -8338,7 +8787,7 @@
         <p:spPr>
           <a:xfrm>
             <a:off x="502920" y="1746360"/>
-            <a:ext cx="328680" cy="328680"/>
+            <a:ext cx="328320" cy="328320"/>
           </a:xfrm>
           <a:prstGeom prst="rect">
             <a:avLst/>
@@ -8394,7 +8843,7 @@
         <p:spPr>
           <a:xfrm>
             <a:off x="960120" y="1627560"/>
-            <a:ext cx="7607520" cy="566640"/>
+            <a:ext cx="7607160" cy="566280"/>
           </a:xfrm>
           <a:prstGeom prst="rect">
             <a:avLst/>
@@ -8450,7 +8899,7 @@
         <p:spPr>
           <a:xfrm>
             <a:off x="411480" y="2295000"/>
-            <a:ext cx="8320680" cy="566640"/>
+            <a:ext cx="8320320" cy="566280"/>
           </a:xfrm>
           <a:prstGeom prst="rect">
             <a:avLst/>
@@ -8478,6 +8927,11 @@
             <a:noAutofit/>
           </a:bodyPr>
           <a:p>
+            <a:pPr>
+              <a:lnSpc>
+                <a:spcPct val="100000"/>
+              </a:lnSpc>
+            </a:pPr>
             <a:endParaRPr b="0" lang="en-US" sz="1800" spc="-1" strike="noStrike">
               <a:solidFill>
                 <a:srgbClr val="ffffff"/>
@@ -8496,7 +8950,7 @@
         <p:spPr>
           <a:xfrm>
             <a:off x="502920" y="2414160"/>
-            <a:ext cx="328680" cy="328680"/>
+            <a:ext cx="328320" cy="328320"/>
           </a:xfrm>
           <a:prstGeom prst="ellipse">
             <a:avLst/>
@@ -8522,6 +8976,11 @@
             <a:noAutofit/>
           </a:bodyPr>
           <a:p>
+            <a:pPr>
+              <a:lnSpc>
+                <a:spcPct val="100000"/>
+              </a:lnSpc>
+            </a:pPr>
             <a:endParaRPr b="0" lang="en-US" sz="1800" spc="-1" strike="noStrike">
               <a:solidFill>
                 <a:srgbClr val="000000"/>
@@ -8540,7 +8999,7 @@
         <p:spPr>
           <a:xfrm>
             <a:off x="502920" y="2414160"/>
-            <a:ext cx="328680" cy="328680"/>
+            <a:ext cx="328320" cy="328320"/>
           </a:xfrm>
           <a:prstGeom prst="rect">
             <a:avLst/>
@@ -8596,7 +9055,7 @@
         <p:spPr>
           <a:xfrm>
             <a:off x="960120" y="2295000"/>
-            <a:ext cx="7607520" cy="566640"/>
+            <a:ext cx="7607160" cy="566280"/>
           </a:xfrm>
           <a:prstGeom prst="rect">
             <a:avLst/>
@@ -8652,7 +9111,7 @@
         <p:spPr>
           <a:xfrm>
             <a:off x="411480" y="2962800"/>
-            <a:ext cx="8320680" cy="566640"/>
+            <a:ext cx="8320320" cy="566280"/>
           </a:xfrm>
           <a:prstGeom prst="rect">
             <a:avLst/>
@@ -8680,6 +9139,11 @@
             <a:noAutofit/>
           </a:bodyPr>
           <a:p>
+            <a:pPr>
+              <a:lnSpc>
+                <a:spcPct val="100000"/>
+              </a:lnSpc>
+            </a:pPr>
             <a:endParaRPr b="0" lang="en-US" sz="1800" spc="-1" strike="noStrike">
               <a:solidFill>
                 <a:srgbClr val="ffffff"/>
@@ -8698,7 +9162,7 @@
         <p:spPr>
           <a:xfrm>
             <a:off x="502920" y="3081600"/>
-            <a:ext cx="328680" cy="328680"/>
+            <a:ext cx="328320" cy="328320"/>
           </a:xfrm>
           <a:prstGeom prst="ellipse">
             <a:avLst/>
@@ -8724,6 +9188,11 @@
             <a:noAutofit/>
           </a:bodyPr>
           <a:p>
+            <a:pPr>
+              <a:lnSpc>
+                <a:spcPct val="100000"/>
+              </a:lnSpc>
+            </a:pPr>
             <a:endParaRPr b="0" lang="en-US" sz="1800" spc="-1" strike="noStrike">
               <a:solidFill>
                 <a:srgbClr val="ffffff"/>
@@ -8742,7 +9211,7 @@
         <p:spPr>
           <a:xfrm>
             <a:off x="502920" y="3081600"/>
-            <a:ext cx="328680" cy="328680"/>
+            <a:ext cx="328320" cy="328320"/>
           </a:xfrm>
           <a:prstGeom prst="rect">
             <a:avLst/>
@@ -8798,7 +9267,7 @@
         <p:spPr>
           <a:xfrm>
             <a:off x="960120" y="2962800"/>
-            <a:ext cx="7607520" cy="566640"/>
+            <a:ext cx="7607160" cy="566280"/>
           </a:xfrm>
           <a:prstGeom prst="rect">
             <a:avLst/>
@@ -8854,7 +9323,7 @@
         <p:spPr>
           <a:xfrm>
             <a:off x="411480" y="3630240"/>
-            <a:ext cx="8320680" cy="566640"/>
+            <a:ext cx="8320320" cy="566280"/>
           </a:xfrm>
           <a:prstGeom prst="rect">
             <a:avLst/>
@@ -8882,6 +9351,11 @@
             <a:noAutofit/>
           </a:bodyPr>
           <a:p>
+            <a:pPr>
+              <a:lnSpc>
+                <a:spcPct val="100000"/>
+              </a:lnSpc>
+            </a:pPr>
             <a:endParaRPr b="0" lang="en-US" sz="1800" spc="-1" strike="noStrike">
               <a:solidFill>
                 <a:srgbClr val="ffffff"/>
@@ -8900,7 +9374,7 @@
         <p:spPr>
           <a:xfrm>
             <a:off x="502920" y="3749040"/>
-            <a:ext cx="328680" cy="328680"/>
+            <a:ext cx="328320" cy="328320"/>
           </a:xfrm>
           <a:prstGeom prst="ellipse">
             <a:avLst/>
@@ -8926,6 +9400,11 @@
             <a:noAutofit/>
           </a:bodyPr>
           <a:p>
+            <a:pPr>
+              <a:lnSpc>
+                <a:spcPct val="100000"/>
+              </a:lnSpc>
+            </a:pPr>
             <a:endParaRPr b="0" lang="en-US" sz="1800" spc="-1" strike="noStrike">
               <a:solidFill>
                 <a:srgbClr val="ffffff"/>
@@ -8944,7 +9423,7 @@
         <p:spPr>
           <a:xfrm>
             <a:off x="502920" y="3749040"/>
-            <a:ext cx="328680" cy="328680"/>
+            <a:ext cx="328320" cy="328320"/>
           </a:xfrm>
           <a:prstGeom prst="rect">
             <a:avLst/>
@@ -9000,7 +9479,7 @@
         <p:spPr>
           <a:xfrm>
             <a:off x="960120" y="3630240"/>
-            <a:ext cx="7607520" cy="566640"/>
+            <a:ext cx="7607160" cy="566280"/>
           </a:xfrm>
           <a:prstGeom prst="rect">
             <a:avLst/>
@@ -9056,7 +9535,7 @@
         <p:spPr>
           <a:xfrm>
             <a:off x="411480" y="4297680"/>
-            <a:ext cx="8320680" cy="566640"/>
+            <a:ext cx="8320320" cy="566280"/>
           </a:xfrm>
           <a:prstGeom prst="rect">
             <a:avLst/>
@@ -9084,6 +9563,11 @@
             <a:noAutofit/>
           </a:bodyPr>
           <a:p>
+            <a:pPr>
+              <a:lnSpc>
+                <a:spcPct val="100000"/>
+              </a:lnSpc>
+            </a:pPr>
             <a:endParaRPr b="0" lang="en-US" sz="1800" spc="-1" strike="noStrike">
               <a:solidFill>
                 <a:srgbClr val="ffffff"/>
@@ -9102,7 +9586,7 @@
         <p:spPr>
           <a:xfrm>
             <a:off x="502920" y="4416480"/>
-            <a:ext cx="328680" cy="328680"/>
+            <a:ext cx="328320" cy="328320"/>
           </a:xfrm>
           <a:prstGeom prst="ellipse">
             <a:avLst/>
@@ -9128,6 +9612,11 @@
             <a:noAutofit/>
           </a:bodyPr>
           <a:p>
+            <a:pPr>
+              <a:lnSpc>
+                <a:spcPct val="100000"/>
+              </a:lnSpc>
+            </a:pPr>
             <a:endParaRPr b="0" lang="en-US" sz="1800" spc="-1" strike="noStrike">
               <a:solidFill>
                 <a:srgbClr val="ffffff"/>
@@ -9146,7 +9635,7 @@
         <p:spPr>
           <a:xfrm>
             <a:off x="502920" y="4416480"/>
-            <a:ext cx="328680" cy="328680"/>
+            <a:ext cx="328320" cy="328320"/>
           </a:xfrm>
           <a:prstGeom prst="rect">
             <a:avLst/>
@@ -9202,7 +9691,7 @@
         <p:spPr>
           <a:xfrm>
             <a:off x="960120" y="4297680"/>
-            <a:ext cx="7607520" cy="566640"/>
+            <a:ext cx="7607160" cy="566280"/>
           </a:xfrm>
           <a:prstGeom prst="rect">
             <a:avLst/>
@@ -9258,7 +9747,7 @@
         <p:spPr>
           <a:xfrm>
             <a:off x="0" y="4873680"/>
-            <a:ext cx="9143640" cy="269280"/>
+            <a:ext cx="9143280" cy="268920"/>
           </a:xfrm>
           <a:prstGeom prst="rect">
             <a:avLst/>
@@ -9284,6 +9773,11 @@
             <a:noAutofit/>
           </a:bodyPr>
           <a:p>
+            <a:pPr>
+              <a:lnSpc>
+                <a:spcPct val="100000"/>
+              </a:lnSpc>
+            </a:pPr>
             <a:endParaRPr b="0" lang="en-US" sz="1800" spc="-1" strike="noStrike">
               <a:solidFill>
                 <a:srgbClr val="ffffff"/>
@@ -9302,7 +9796,7 @@
         <p:spPr>
           <a:xfrm>
             <a:off x="0" y="4873680"/>
-            <a:ext cx="9143640" cy="269280"/>
+            <a:ext cx="9143280" cy="268920"/>
           </a:xfrm>
           <a:prstGeom prst="rect">
             <a:avLst/>
@@ -9386,7 +9880,7 @@
         <p:spPr>
           <a:xfrm>
             <a:off x="0" y="0"/>
-            <a:ext cx="9143640" cy="776880"/>
+            <a:ext cx="9143280" cy="776520"/>
           </a:xfrm>
           <a:prstGeom prst="rect">
             <a:avLst/>
@@ -9412,6 +9906,11 @@
             <a:noAutofit/>
           </a:bodyPr>
           <a:p>
+            <a:pPr>
+              <a:lnSpc>
+                <a:spcPct val="100000"/>
+              </a:lnSpc>
+            </a:pPr>
             <a:endParaRPr b="0" lang="en-US" sz="1800" spc="-1" strike="noStrike">
               <a:solidFill>
                 <a:srgbClr val="ffffff"/>
@@ -9430,7 +9929,7 @@
         <p:spPr>
           <a:xfrm>
             <a:off x="365760" y="0"/>
-            <a:ext cx="8412120" cy="776880"/>
+            <a:ext cx="8411760" cy="776520"/>
           </a:xfrm>
           <a:prstGeom prst="rect">
             <a:avLst/>
@@ -9460,7 +9959,7 @@
               </a:tabLst>
             </a:pPr>
             <a:r>
-              <a:rPr b="1" lang="en-US" sz="1800" spc="199" strike="noStrike">
+              <a:rPr b="1" lang="en-US" sz="1800" spc="197" strike="noStrike">
                 <a:solidFill>
                   <a:srgbClr val="ffffff"/>
                 </a:solidFill>
@@ -9486,7 +9985,7 @@
         <p:spPr>
           <a:xfrm>
             <a:off x="365760" y="914400"/>
-            <a:ext cx="8412120" cy="1051200"/>
+            <a:ext cx="8411760" cy="1050840"/>
           </a:xfrm>
           <a:prstGeom prst="rect">
             <a:avLst/>
@@ -9519,6 +10018,11 @@
             <a:noAutofit/>
           </a:bodyPr>
           <a:p>
+            <a:pPr>
+              <a:lnSpc>
+                <a:spcPct val="100000"/>
+              </a:lnSpc>
+            </a:pPr>
             <a:endParaRPr b="0" lang="en-US" sz="1800" spc="-1" strike="noStrike">
               <a:solidFill>
                 <a:srgbClr val="ffffff"/>
@@ -9537,7 +10041,7 @@
         <p:spPr>
           <a:xfrm>
             <a:off x="365760" y="914400"/>
-            <a:ext cx="8412120" cy="1051200"/>
+            <a:ext cx="8411760" cy="1050840"/>
           </a:xfrm>
           <a:prstGeom prst="rect">
             <a:avLst/>
@@ -9593,7 +10097,7 @@
         <p:spPr>
           <a:xfrm>
             <a:off x="365760" y="2103120"/>
-            <a:ext cx="4205880" cy="1261440"/>
+            <a:ext cx="4205520" cy="1261080"/>
           </a:xfrm>
           <a:prstGeom prst="rect">
             <a:avLst/>
@@ -9626,6 +10130,11 @@
             <a:noAutofit/>
           </a:bodyPr>
           <a:p>
+            <a:pPr>
+              <a:lnSpc>
+                <a:spcPct val="100000"/>
+              </a:lnSpc>
+            </a:pPr>
             <a:endParaRPr b="0" lang="en-US" sz="1800" spc="-1" strike="noStrike">
               <a:solidFill>
                 <a:srgbClr val="000000"/>
@@ -9644,7 +10153,7 @@
         <p:spPr>
           <a:xfrm>
             <a:off x="365760" y="2103120"/>
-            <a:ext cx="164160" cy="1261440"/>
+            <a:ext cx="163800" cy="1261080"/>
           </a:xfrm>
           <a:prstGeom prst="rect">
             <a:avLst/>
@@ -9670,6 +10179,11 @@
             <a:noAutofit/>
           </a:bodyPr>
           <a:p>
+            <a:pPr>
+              <a:lnSpc>
+                <a:spcPct val="100000"/>
+              </a:lnSpc>
+            </a:pPr>
             <a:endParaRPr b="0" lang="en-US" sz="1800" spc="-1" strike="noStrike">
               <a:solidFill>
                 <a:srgbClr val="ffffff"/>
@@ -9688,7 +10202,7 @@
         <p:spPr>
           <a:xfrm>
             <a:off x="621720" y="2194560"/>
-            <a:ext cx="639720" cy="548280"/>
+            <a:ext cx="639360" cy="547920"/>
           </a:xfrm>
           <a:prstGeom prst="rect">
             <a:avLst/>
@@ -9744,7 +10258,7 @@
         <p:spPr>
           <a:xfrm>
             <a:off x="658440" y="2167200"/>
-            <a:ext cx="3748680" cy="383760"/>
+            <a:ext cx="3748320" cy="383400"/>
           </a:xfrm>
           <a:prstGeom prst="rect">
             <a:avLst/>
@@ -9800,7 +10314,7 @@
         <p:spPr>
           <a:xfrm>
             <a:off x="658440" y="2578680"/>
-            <a:ext cx="3748680" cy="694440"/>
+            <a:ext cx="3748320" cy="694080"/>
           </a:xfrm>
           <a:prstGeom prst="rect">
             <a:avLst/>
@@ -9856,7 +10370,7 @@
         <p:spPr>
           <a:xfrm>
             <a:off x="4800600" y="2103120"/>
-            <a:ext cx="4205880" cy="1261440"/>
+            <a:ext cx="4205520" cy="1261080"/>
           </a:xfrm>
           <a:prstGeom prst="rect">
             <a:avLst/>
@@ -9889,6 +10403,11 @@
             <a:noAutofit/>
           </a:bodyPr>
           <a:p>
+            <a:pPr>
+              <a:lnSpc>
+                <a:spcPct val="100000"/>
+              </a:lnSpc>
+            </a:pPr>
             <a:endParaRPr b="0" lang="en-US" sz="1800" spc="-1" strike="noStrike">
               <a:solidFill>
                 <a:srgbClr val="000000"/>
@@ -9907,7 +10426,7 @@
         <p:spPr>
           <a:xfrm>
             <a:off x="4800600" y="2103120"/>
-            <a:ext cx="164160" cy="1261440"/>
+            <a:ext cx="163800" cy="1261080"/>
           </a:xfrm>
           <a:prstGeom prst="rect">
             <a:avLst/>
@@ -9933,6 +10452,11 @@
             <a:noAutofit/>
           </a:bodyPr>
           <a:p>
+            <a:pPr>
+              <a:lnSpc>
+                <a:spcPct val="100000"/>
+              </a:lnSpc>
+            </a:pPr>
             <a:endParaRPr b="0" lang="en-US" sz="1800" spc="-1" strike="noStrike">
               <a:solidFill>
                 <a:srgbClr val="ffffff"/>
@@ -9951,7 +10475,7 @@
         <p:spPr>
           <a:xfrm>
             <a:off x="5056560" y="2194560"/>
-            <a:ext cx="639720" cy="548280"/>
+            <a:ext cx="639360" cy="547920"/>
           </a:xfrm>
           <a:prstGeom prst="rect">
             <a:avLst/>
@@ -10007,7 +10531,7 @@
         <p:spPr>
           <a:xfrm>
             <a:off x="5093280" y="2167200"/>
-            <a:ext cx="3748680" cy="383760"/>
+            <a:ext cx="3748320" cy="383400"/>
           </a:xfrm>
           <a:prstGeom prst="rect">
             <a:avLst/>
@@ -10063,7 +10587,7 @@
         <p:spPr>
           <a:xfrm>
             <a:off x="5093280" y="2578680"/>
-            <a:ext cx="3748680" cy="694440"/>
+            <a:ext cx="3748320" cy="694080"/>
           </a:xfrm>
           <a:prstGeom prst="rect">
             <a:avLst/>
@@ -10119,7 +10643,7 @@
         <p:spPr>
           <a:xfrm>
             <a:off x="365760" y="3493080"/>
-            <a:ext cx="4205880" cy="1261440"/>
+            <a:ext cx="4205520" cy="1261080"/>
           </a:xfrm>
           <a:prstGeom prst="rect">
             <a:avLst/>
@@ -10152,6 +10676,11 @@
             <a:noAutofit/>
           </a:bodyPr>
           <a:p>
+            <a:pPr>
+              <a:lnSpc>
+                <a:spcPct val="100000"/>
+              </a:lnSpc>
+            </a:pPr>
             <a:endParaRPr b="0" lang="en-US" sz="1800" spc="-1" strike="noStrike">
               <a:solidFill>
                 <a:srgbClr val="000000"/>
@@ -10170,7 +10699,7 @@
         <p:spPr>
           <a:xfrm>
             <a:off x="365760" y="3493080"/>
-            <a:ext cx="164160" cy="1261440"/>
+            <a:ext cx="163800" cy="1261080"/>
           </a:xfrm>
           <a:prstGeom prst="rect">
             <a:avLst/>
@@ -10196,6 +10725,11 @@
             <a:noAutofit/>
           </a:bodyPr>
           <a:p>
+            <a:pPr>
+              <a:lnSpc>
+                <a:spcPct val="100000"/>
+              </a:lnSpc>
+            </a:pPr>
             <a:endParaRPr b="0" lang="en-US" sz="1800" spc="-1" strike="noStrike">
               <a:solidFill>
                 <a:srgbClr val="ffffff"/>
@@ -10214,7 +10748,7 @@
         <p:spPr>
           <a:xfrm>
             <a:off x="621720" y="3584520"/>
-            <a:ext cx="639720" cy="548280"/>
+            <a:ext cx="639360" cy="547920"/>
           </a:xfrm>
           <a:prstGeom prst="rect">
             <a:avLst/>
@@ -10270,7 +10804,7 @@
         <p:spPr>
           <a:xfrm>
             <a:off x="658440" y="3557160"/>
-            <a:ext cx="3748680" cy="383760"/>
+            <a:ext cx="3748320" cy="383400"/>
           </a:xfrm>
           <a:prstGeom prst="rect">
             <a:avLst/>
@@ -10326,7 +10860,7 @@
         <p:spPr>
           <a:xfrm>
             <a:off x="658440" y="3968640"/>
-            <a:ext cx="3748680" cy="694440"/>
+            <a:ext cx="3748320" cy="694080"/>
           </a:xfrm>
           <a:prstGeom prst="rect">
             <a:avLst/>
@@ -10382,7 +10916,7 @@
         <p:spPr>
           <a:xfrm>
             <a:off x="4800600" y="3493080"/>
-            <a:ext cx="4205880" cy="1261440"/>
+            <a:ext cx="4205520" cy="1261080"/>
           </a:xfrm>
           <a:prstGeom prst="rect">
             <a:avLst/>
@@ -10415,6 +10949,11 @@
             <a:noAutofit/>
           </a:bodyPr>
           <a:p>
+            <a:pPr>
+              <a:lnSpc>
+                <a:spcPct val="100000"/>
+              </a:lnSpc>
+            </a:pPr>
             <a:endParaRPr b="0" lang="en-US" sz="1800" spc="-1" strike="noStrike">
               <a:solidFill>
                 <a:srgbClr val="000000"/>
@@ -10433,7 +10972,7 @@
         <p:spPr>
           <a:xfrm>
             <a:off x="4800600" y="3493080"/>
-            <a:ext cx="164160" cy="1261440"/>
+            <a:ext cx="163800" cy="1261080"/>
           </a:xfrm>
           <a:prstGeom prst="rect">
             <a:avLst/>
@@ -10459,6 +10998,11 @@
             <a:noAutofit/>
           </a:bodyPr>
           <a:p>
+            <a:pPr>
+              <a:lnSpc>
+                <a:spcPct val="100000"/>
+              </a:lnSpc>
+            </a:pPr>
             <a:endParaRPr b="0" lang="en-US" sz="1800" spc="-1" strike="noStrike">
               <a:solidFill>
                 <a:srgbClr val="ffffff"/>
@@ -10477,7 +11021,7 @@
         <p:spPr>
           <a:xfrm>
             <a:off x="5056560" y="3584520"/>
-            <a:ext cx="639720" cy="548280"/>
+            <a:ext cx="639360" cy="547920"/>
           </a:xfrm>
           <a:prstGeom prst="rect">
             <a:avLst/>
@@ -10533,7 +11077,7 @@
         <p:spPr>
           <a:xfrm>
             <a:off x="5093280" y="3557160"/>
-            <a:ext cx="3748680" cy="383760"/>
+            <a:ext cx="3748320" cy="383400"/>
           </a:xfrm>
           <a:prstGeom prst="rect">
             <a:avLst/>
@@ -10589,7 +11133,7 @@
         <p:spPr>
           <a:xfrm>
             <a:off x="5093280" y="3968640"/>
-            <a:ext cx="3748680" cy="694440"/>
+            <a:ext cx="3748320" cy="694080"/>
           </a:xfrm>
           <a:prstGeom prst="rect">
             <a:avLst/>
@@ -10682,7 +11226,7 @@
         <p:spPr>
           <a:xfrm>
             <a:off x="0" y="0"/>
-            <a:ext cx="9143640" cy="776880"/>
+            <a:ext cx="9143280" cy="776520"/>
           </a:xfrm>
           <a:prstGeom prst="rect">
             <a:avLst/>
@@ -10708,6 +11252,11 @@
             <a:noAutofit/>
           </a:bodyPr>
           <a:p>
+            <a:pPr>
+              <a:lnSpc>
+                <a:spcPct val="100000"/>
+              </a:lnSpc>
+            </a:pPr>
             <a:endParaRPr b="0" lang="en-US" sz="1800" spc="-1" strike="noStrike">
               <a:solidFill>
                 <a:srgbClr val="ffffff"/>
@@ -10726,7 +11275,7 @@
         <p:spPr>
           <a:xfrm>
             <a:off x="365760" y="0"/>
-            <a:ext cx="8412120" cy="776880"/>
+            <a:ext cx="8411760" cy="776520"/>
           </a:xfrm>
           <a:prstGeom prst="rect">
             <a:avLst/>
@@ -10756,7 +11305,7 @@
               </a:tabLst>
             </a:pPr>
             <a:r>
-              <a:rPr b="1" lang="en-US" sz="1700" spc="199" strike="noStrike">
+              <a:rPr b="1" lang="en-US" sz="1700" spc="197" strike="noStrike">
                 <a:solidFill>
                   <a:srgbClr val="ffffff"/>
                 </a:solidFill>
@@ -10782,7 +11331,7 @@
         <p:spPr>
           <a:xfrm>
             <a:off x="274320" y="960120"/>
-            <a:ext cx="2011320" cy="1828440"/>
+            <a:ext cx="2010960" cy="1828080"/>
           </a:xfrm>
           <a:prstGeom prst="rect">
             <a:avLst/>
@@ -10815,6 +11364,11 @@
             <a:noAutofit/>
           </a:bodyPr>
           <a:p>
+            <a:pPr>
+              <a:lnSpc>
+                <a:spcPct val="100000"/>
+              </a:lnSpc>
+            </a:pPr>
             <a:endParaRPr b="0" lang="en-US" sz="1800" spc="-1" strike="noStrike">
               <a:solidFill>
                 <a:srgbClr val="ffffff"/>
@@ -10833,7 +11387,7 @@
         <p:spPr>
           <a:xfrm>
             <a:off x="274320" y="960120"/>
-            <a:ext cx="2011320" cy="658080"/>
+            <a:ext cx="2010960" cy="657720"/>
           </a:xfrm>
           <a:prstGeom prst="rect">
             <a:avLst/>
@@ -10859,6 +11413,11 @@
             <a:noAutofit/>
           </a:bodyPr>
           <a:p>
+            <a:pPr>
+              <a:lnSpc>
+                <a:spcPct val="100000"/>
+              </a:lnSpc>
+            </a:pPr>
             <a:endParaRPr b="0" lang="en-US" sz="1800" spc="-1" strike="noStrike">
               <a:solidFill>
                 <a:srgbClr val="ffffff"/>
@@ -10877,7 +11436,7 @@
         <p:spPr>
           <a:xfrm>
             <a:off x="274320" y="960120"/>
-            <a:ext cx="2011320" cy="658080"/>
+            <a:ext cx="2010960" cy="657720"/>
           </a:xfrm>
           <a:prstGeom prst="rect">
             <a:avLst/>
@@ -10933,7 +11492,7 @@
         <p:spPr>
           <a:xfrm>
             <a:off x="384120" y="1673280"/>
-            <a:ext cx="502560" cy="383760"/>
+            <a:ext cx="502200" cy="383400"/>
           </a:xfrm>
           <a:prstGeom prst="rect">
             <a:avLst/>
@@ -10989,7 +11548,7 @@
         <p:spPr>
           <a:xfrm>
             <a:off x="384120" y="1710000"/>
-            <a:ext cx="1791720" cy="959760"/>
+            <a:ext cx="1791360" cy="959400"/>
           </a:xfrm>
           <a:prstGeom prst="rect">
             <a:avLst/>
@@ -11070,7 +11629,7 @@
         <p:spPr>
           <a:xfrm>
             <a:off x="2450520" y="960120"/>
-            <a:ext cx="2011320" cy="1828440"/>
+            <a:ext cx="2010960" cy="1828080"/>
           </a:xfrm>
           <a:prstGeom prst="rect">
             <a:avLst/>
@@ -11103,6 +11662,11 @@
             <a:noAutofit/>
           </a:bodyPr>
           <a:p>
+            <a:pPr>
+              <a:lnSpc>
+                <a:spcPct val="100000"/>
+              </a:lnSpc>
+            </a:pPr>
             <a:endParaRPr b="0" lang="en-US" sz="1800" spc="-1" strike="noStrike">
               <a:solidFill>
                 <a:srgbClr val="ffffff"/>
@@ -11121,7 +11685,7 @@
         <p:spPr>
           <a:xfrm>
             <a:off x="2450520" y="960120"/>
-            <a:ext cx="2011320" cy="658080"/>
+            <a:ext cx="2010960" cy="657720"/>
           </a:xfrm>
           <a:prstGeom prst="rect">
             <a:avLst/>
@@ -11147,6 +11711,11 @@
             <a:noAutofit/>
           </a:bodyPr>
           <a:p>
+            <a:pPr>
+              <a:lnSpc>
+                <a:spcPct val="100000"/>
+              </a:lnSpc>
+            </a:pPr>
             <a:endParaRPr b="0" lang="en-US" sz="1800" spc="-1" strike="noStrike">
               <a:solidFill>
                 <a:srgbClr val="ffffff"/>
@@ -11165,7 +11734,7 @@
         <p:spPr>
           <a:xfrm>
             <a:off x="2450520" y="960120"/>
-            <a:ext cx="2011320" cy="658080"/>
+            <a:ext cx="2010960" cy="657720"/>
           </a:xfrm>
           <a:prstGeom prst="rect">
             <a:avLst/>
@@ -11221,7 +11790,7 @@
         <p:spPr>
           <a:xfrm>
             <a:off x="2560320" y="1673280"/>
-            <a:ext cx="502560" cy="383760"/>
+            <a:ext cx="502200" cy="383400"/>
           </a:xfrm>
           <a:prstGeom prst="rect">
             <a:avLst/>
@@ -11277,7 +11846,7 @@
         <p:spPr>
           <a:xfrm>
             <a:off x="2560320" y="1710000"/>
-            <a:ext cx="1791720" cy="959760"/>
+            <a:ext cx="1791360" cy="959400"/>
           </a:xfrm>
           <a:prstGeom prst="rect">
             <a:avLst/>
@@ -11358,7 +11927,7 @@
         <p:spPr>
           <a:xfrm>
             <a:off x="4626720" y="960120"/>
-            <a:ext cx="2011320" cy="1828440"/>
+            <a:ext cx="2010960" cy="1828080"/>
           </a:xfrm>
           <a:prstGeom prst="rect">
             <a:avLst/>
@@ -11391,6 +11960,11 @@
             <a:noAutofit/>
           </a:bodyPr>
           <a:p>
+            <a:pPr>
+              <a:lnSpc>
+                <a:spcPct val="100000"/>
+              </a:lnSpc>
+            </a:pPr>
             <a:endParaRPr b="0" lang="en-US" sz="1800" spc="-1" strike="noStrike">
               <a:solidFill>
                 <a:srgbClr val="ffffff"/>
@@ -11409,7 +11983,7 @@
         <p:spPr>
           <a:xfrm>
             <a:off x="4626720" y="960120"/>
-            <a:ext cx="2011320" cy="658080"/>
+            <a:ext cx="2010960" cy="657720"/>
           </a:xfrm>
           <a:prstGeom prst="rect">
             <a:avLst/>
@@ -11435,6 +12009,11 @@
             <a:noAutofit/>
           </a:bodyPr>
           <a:p>
+            <a:pPr>
+              <a:lnSpc>
+                <a:spcPct val="100000"/>
+              </a:lnSpc>
+            </a:pPr>
             <a:endParaRPr b="0" lang="en-US" sz="1800" spc="-1" strike="noStrike">
               <a:solidFill>
                 <a:srgbClr val="000000"/>
@@ -11453,7 +12032,7 @@
         <p:spPr>
           <a:xfrm>
             <a:off x="4626720" y="960120"/>
-            <a:ext cx="2011320" cy="658080"/>
+            <a:ext cx="2010960" cy="657720"/>
           </a:xfrm>
           <a:prstGeom prst="rect">
             <a:avLst/>
@@ -11509,7 +12088,7 @@
         <p:spPr>
           <a:xfrm>
             <a:off x="4736520" y="1673280"/>
-            <a:ext cx="502560" cy="383760"/>
+            <a:ext cx="502200" cy="383400"/>
           </a:xfrm>
           <a:prstGeom prst="rect">
             <a:avLst/>
@@ -11565,7 +12144,7 @@
         <p:spPr>
           <a:xfrm>
             <a:off x="4736520" y="1710000"/>
-            <a:ext cx="1791720" cy="959760"/>
+            <a:ext cx="1791360" cy="959400"/>
           </a:xfrm>
           <a:prstGeom prst="rect">
             <a:avLst/>
@@ -11646,7 +12225,7 @@
         <p:spPr>
           <a:xfrm>
             <a:off x="6803280" y="960120"/>
-            <a:ext cx="2011320" cy="1828440"/>
+            <a:ext cx="2010960" cy="1828080"/>
           </a:xfrm>
           <a:prstGeom prst="rect">
             <a:avLst/>
@@ -11679,6 +12258,11 @@
             <a:noAutofit/>
           </a:bodyPr>
           <a:p>
+            <a:pPr>
+              <a:lnSpc>
+                <a:spcPct val="100000"/>
+              </a:lnSpc>
+            </a:pPr>
             <a:endParaRPr b="0" lang="en-US" sz="1800" spc="-1" strike="noStrike">
               <a:solidFill>
                 <a:srgbClr val="ffffff"/>
@@ -11697,7 +12281,7 @@
         <p:spPr>
           <a:xfrm>
             <a:off x="6803280" y="960120"/>
-            <a:ext cx="2011320" cy="658080"/>
+            <a:ext cx="2010960" cy="657720"/>
           </a:xfrm>
           <a:prstGeom prst="rect">
             <a:avLst/>
@@ -11723,6 +12307,11 @@
             <a:noAutofit/>
           </a:bodyPr>
           <a:p>
+            <a:pPr>
+              <a:lnSpc>
+                <a:spcPct val="100000"/>
+              </a:lnSpc>
+            </a:pPr>
             <a:endParaRPr b="0" lang="en-US" sz="1800" spc="-1" strike="noStrike">
               <a:solidFill>
                 <a:srgbClr val="ffffff"/>
@@ -11741,7 +12330,7 @@
         <p:spPr>
           <a:xfrm>
             <a:off x="6803280" y="960120"/>
-            <a:ext cx="2011320" cy="658080"/>
+            <a:ext cx="2010960" cy="657720"/>
           </a:xfrm>
           <a:prstGeom prst="rect">
             <a:avLst/>
@@ -11797,7 +12386,7 @@
         <p:spPr>
           <a:xfrm>
             <a:off x="6912720" y="1673280"/>
-            <a:ext cx="502560" cy="383760"/>
+            <a:ext cx="502200" cy="383400"/>
           </a:xfrm>
           <a:prstGeom prst="rect">
             <a:avLst/>
@@ -11853,7 +12442,7 @@
         <p:spPr>
           <a:xfrm>
             <a:off x="6912720" y="1710000"/>
-            <a:ext cx="1791720" cy="959760"/>
+            <a:ext cx="1791360" cy="959400"/>
           </a:xfrm>
           <a:prstGeom prst="rect">
             <a:avLst/>
@@ -11934,7 +12523,7 @@
         <p:spPr>
           <a:xfrm>
             <a:off x="274320" y="2953440"/>
-            <a:ext cx="2011320" cy="1828440"/>
+            <a:ext cx="2010960" cy="1828080"/>
           </a:xfrm>
           <a:prstGeom prst="rect">
             <a:avLst/>
@@ -11967,6 +12556,11 @@
             <a:noAutofit/>
           </a:bodyPr>
           <a:p>
+            <a:pPr>
+              <a:lnSpc>
+                <a:spcPct val="100000"/>
+              </a:lnSpc>
+            </a:pPr>
             <a:endParaRPr b="0" lang="en-US" sz="1800" spc="-1" strike="noStrike">
               <a:solidFill>
                 <a:srgbClr val="ffffff"/>
@@ -11985,7 +12579,7 @@
         <p:spPr>
           <a:xfrm>
             <a:off x="274320" y="2953440"/>
-            <a:ext cx="2011320" cy="658080"/>
+            <a:ext cx="2010960" cy="657720"/>
           </a:xfrm>
           <a:prstGeom prst="rect">
             <a:avLst/>
@@ -12011,6 +12605,11 @@
             <a:noAutofit/>
           </a:bodyPr>
           <a:p>
+            <a:pPr>
+              <a:lnSpc>
+                <a:spcPct val="100000"/>
+              </a:lnSpc>
+            </a:pPr>
             <a:endParaRPr b="0" lang="en-US" sz="1800" spc="-1" strike="noStrike">
               <a:solidFill>
                 <a:srgbClr val="ffffff"/>
@@ -12029,7 +12628,7 @@
         <p:spPr>
           <a:xfrm>
             <a:off x="274320" y="2953440"/>
-            <a:ext cx="2011320" cy="658080"/>
+            <a:ext cx="2010960" cy="657720"/>
           </a:xfrm>
           <a:prstGeom prst="rect">
             <a:avLst/>
@@ -12085,7 +12684,7 @@
         <p:spPr>
           <a:xfrm>
             <a:off x="384120" y="3666600"/>
-            <a:ext cx="502560" cy="383760"/>
+            <a:ext cx="502200" cy="383400"/>
           </a:xfrm>
           <a:prstGeom prst="rect">
             <a:avLst/>
@@ -12141,7 +12740,7 @@
         <p:spPr>
           <a:xfrm>
             <a:off x="384120" y="3703320"/>
-            <a:ext cx="1791720" cy="959760"/>
+            <a:ext cx="1791360" cy="959400"/>
           </a:xfrm>
           <a:prstGeom prst="rect">
             <a:avLst/>
@@ -12222,7 +12821,7 @@
         <p:spPr>
           <a:xfrm>
             <a:off x="2450520" y="2953440"/>
-            <a:ext cx="2011320" cy="1828440"/>
+            <a:ext cx="2010960" cy="1828080"/>
           </a:xfrm>
           <a:prstGeom prst="rect">
             <a:avLst/>
@@ -12255,6 +12854,11 @@
             <a:noAutofit/>
           </a:bodyPr>
           <a:p>
+            <a:pPr>
+              <a:lnSpc>
+                <a:spcPct val="100000"/>
+              </a:lnSpc>
+            </a:pPr>
             <a:endParaRPr b="0" lang="en-US" sz="1800" spc="-1" strike="noStrike">
               <a:solidFill>
                 <a:srgbClr val="ffffff"/>
@@ -12273,7 +12877,7 @@
         <p:spPr>
           <a:xfrm>
             <a:off x="2450520" y="2953440"/>
-            <a:ext cx="2011320" cy="658080"/>
+            <a:ext cx="2010960" cy="657720"/>
           </a:xfrm>
           <a:prstGeom prst="rect">
             <a:avLst/>
@@ -12299,6 +12903,11 @@
             <a:noAutofit/>
           </a:bodyPr>
           <a:p>
+            <a:pPr>
+              <a:lnSpc>
+                <a:spcPct val="100000"/>
+              </a:lnSpc>
+            </a:pPr>
             <a:endParaRPr b="0" lang="en-US" sz="1800" spc="-1" strike="noStrike">
               <a:solidFill>
                 <a:srgbClr val="ffffff"/>
@@ -12317,7 +12926,7 @@
         <p:spPr>
           <a:xfrm>
             <a:off x="2450520" y="2953440"/>
-            <a:ext cx="2011320" cy="658080"/>
+            <a:ext cx="2010960" cy="657720"/>
           </a:xfrm>
           <a:prstGeom prst="rect">
             <a:avLst/>
@@ -12373,7 +12982,7 @@
         <p:spPr>
           <a:xfrm>
             <a:off x="2560320" y="3666600"/>
-            <a:ext cx="502560" cy="383760"/>
+            <a:ext cx="502200" cy="383400"/>
           </a:xfrm>
           <a:prstGeom prst="rect">
             <a:avLst/>
@@ -12429,7 +13038,7 @@
         <p:spPr>
           <a:xfrm>
             <a:off x="2560320" y="3703320"/>
-            <a:ext cx="1791720" cy="959760"/>
+            <a:ext cx="1791360" cy="959400"/>
           </a:xfrm>
           <a:prstGeom prst="rect">
             <a:avLst/>
@@ -12510,7 +13119,7 @@
         <p:spPr>
           <a:xfrm>
             <a:off x="4626720" y="2953440"/>
-            <a:ext cx="2011320" cy="1828440"/>
+            <a:ext cx="2010960" cy="1828080"/>
           </a:xfrm>
           <a:prstGeom prst="rect">
             <a:avLst/>
@@ -12543,6 +13152,11 @@
             <a:noAutofit/>
           </a:bodyPr>
           <a:p>
+            <a:pPr>
+              <a:lnSpc>
+                <a:spcPct val="100000"/>
+              </a:lnSpc>
+            </a:pPr>
             <a:endParaRPr b="0" lang="en-US" sz="1800" spc="-1" strike="noStrike">
               <a:solidFill>
                 <a:srgbClr val="ffffff"/>
@@ -12561,7 +13175,7 @@
         <p:spPr>
           <a:xfrm>
             <a:off x="4626720" y="2953440"/>
-            <a:ext cx="2011320" cy="658080"/>
+            <a:ext cx="2010960" cy="657720"/>
           </a:xfrm>
           <a:prstGeom prst="rect">
             <a:avLst/>
@@ -12587,6 +13201,11 @@
             <a:noAutofit/>
           </a:bodyPr>
           <a:p>
+            <a:pPr>
+              <a:lnSpc>
+                <a:spcPct val="100000"/>
+              </a:lnSpc>
+            </a:pPr>
             <a:endParaRPr b="0" lang="en-US" sz="1800" spc="-1" strike="noStrike">
               <a:solidFill>
                 <a:srgbClr val="ffffff"/>
@@ -12605,7 +13224,7 @@
         <p:spPr>
           <a:xfrm>
             <a:off x="4626720" y="2953440"/>
-            <a:ext cx="2011320" cy="658080"/>
+            <a:ext cx="2010960" cy="657720"/>
           </a:xfrm>
           <a:prstGeom prst="rect">
             <a:avLst/>
@@ -12661,7 +13280,7 @@
         <p:spPr>
           <a:xfrm>
             <a:off x="4736520" y="3666600"/>
-            <a:ext cx="502560" cy="383760"/>
+            <a:ext cx="502200" cy="383400"/>
           </a:xfrm>
           <a:prstGeom prst="rect">
             <a:avLst/>
@@ -12717,7 +13336,7 @@
         <p:spPr>
           <a:xfrm>
             <a:off x="4736520" y="3703320"/>
-            <a:ext cx="1791720" cy="959760"/>
+            <a:ext cx="1791360" cy="959400"/>
           </a:xfrm>
           <a:prstGeom prst="rect">
             <a:avLst/>
@@ -12798,7 +13417,7 @@
         <p:spPr>
           <a:xfrm>
             <a:off x="6803280" y="2953440"/>
-            <a:ext cx="2011320" cy="1828440"/>
+            <a:ext cx="2010960" cy="1828080"/>
           </a:xfrm>
           <a:prstGeom prst="rect">
             <a:avLst/>
@@ -12831,6 +13450,11 @@
             <a:noAutofit/>
           </a:bodyPr>
           <a:p>
+            <a:pPr>
+              <a:lnSpc>
+                <a:spcPct val="100000"/>
+              </a:lnSpc>
+            </a:pPr>
             <a:endParaRPr b="0" lang="en-US" sz="1800" spc="-1" strike="noStrike">
               <a:solidFill>
                 <a:srgbClr val="ffffff"/>
@@ -12849,7 +13473,7 @@
         <p:spPr>
           <a:xfrm>
             <a:off x="6803280" y="2953440"/>
-            <a:ext cx="2011320" cy="658080"/>
+            <a:ext cx="2010960" cy="657720"/>
           </a:xfrm>
           <a:prstGeom prst="rect">
             <a:avLst/>
@@ -12875,6 +13499,11 @@
             <a:noAutofit/>
           </a:bodyPr>
           <a:p>
+            <a:pPr>
+              <a:lnSpc>
+                <a:spcPct val="100000"/>
+              </a:lnSpc>
+            </a:pPr>
             <a:endParaRPr b="0" lang="en-US" sz="1800" spc="-1" strike="noStrike">
               <a:solidFill>
                 <a:srgbClr val="ffffff"/>
@@ -12893,7 +13522,7 @@
         <p:spPr>
           <a:xfrm>
             <a:off x="6803280" y="2953440"/>
-            <a:ext cx="2011320" cy="658080"/>
+            <a:ext cx="2010960" cy="657720"/>
           </a:xfrm>
           <a:prstGeom prst="rect">
             <a:avLst/>
@@ -12949,7 +13578,7 @@
         <p:spPr>
           <a:xfrm>
             <a:off x="6912720" y="3666600"/>
-            <a:ext cx="502560" cy="383760"/>
+            <a:ext cx="502200" cy="383400"/>
           </a:xfrm>
           <a:prstGeom prst="rect">
             <a:avLst/>
@@ -13005,7 +13634,7 @@
         <p:spPr>
           <a:xfrm>
             <a:off x="6912720" y="3703320"/>
-            <a:ext cx="1791720" cy="959760"/>
+            <a:ext cx="1791360" cy="959400"/>
           </a:xfrm>
           <a:prstGeom prst="rect">
             <a:avLst/>
@@ -13123,7 +13752,7 @@
         <p:spPr>
           <a:xfrm>
             <a:off x="0" y="0"/>
-            <a:ext cx="9143640" cy="776880"/>
+            <a:ext cx="9143280" cy="776520"/>
           </a:xfrm>
           <a:prstGeom prst="rect">
             <a:avLst/>
@@ -13149,6 +13778,11 @@
             <a:noAutofit/>
           </a:bodyPr>
           <a:p>
+            <a:pPr>
+              <a:lnSpc>
+                <a:spcPct val="100000"/>
+              </a:lnSpc>
+            </a:pPr>
             <a:endParaRPr b="0" lang="en-US" sz="1800" spc="-1" strike="noStrike">
               <a:solidFill>
                 <a:srgbClr val="ffffff"/>
@@ -13167,7 +13801,7 @@
         <p:spPr>
           <a:xfrm>
             <a:off x="320040" y="137160"/>
-            <a:ext cx="502560" cy="502560"/>
+            <a:ext cx="502200" cy="502200"/>
           </a:xfrm>
           <a:prstGeom prst="ellipse">
             <a:avLst/>
@@ -13193,6 +13827,11 @@
             <a:noAutofit/>
           </a:bodyPr>
           <a:p>
+            <a:pPr>
+              <a:lnSpc>
+                <a:spcPct val="100000"/>
+              </a:lnSpc>
+            </a:pPr>
             <a:endParaRPr b="0" lang="en-US" sz="1800" spc="-1" strike="noStrike">
               <a:solidFill>
                 <a:srgbClr val="ffffff"/>
@@ -13211,7 +13850,7 @@
         <p:spPr>
           <a:xfrm>
             <a:off x="320040" y="137160"/>
-            <a:ext cx="502560" cy="502560"/>
+            <a:ext cx="502200" cy="502200"/>
           </a:xfrm>
           <a:prstGeom prst="rect">
             <a:avLst/>
@@ -13267,7 +13906,7 @@
         <p:spPr>
           <a:xfrm>
             <a:off x="960120" y="0"/>
-            <a:ext cx="7817760" cy="776880"/>
+            <a:ext cx="7817400" cy="776520"/>
           </a:xfrm>
           <a:prstGeom prst="rect">
             <a:avLst/>
@@ -13297,7 +13936,7 @@
               </a:tabLst>
             </a:pPr>
             <a:r>
-              <a:rPr b="1" lang="en-US" sz="1800" spc="199" strike="noStrike">
+              <a:rPr b="1" lang="en-US" sz="1800" spc="197" strike="noStrike">
                 <a:solidFill>
                   <a:srgbClr val="ffffff"/>
                 </a:solidFill>
@@ -13323,7 +13962,7 @@
         <p:spPr>
           <a:xfrm>
             <a:off x="320040" y="914400"/>
-            <a:ext cx="4068720" cy="3931560"/>
+            <a:ext cx="4068360" cy="3931200"/>
           </a:xfrm>
           <a:prstGeom prst="rect">
             <a:avLst/>
@@ -13356,6 +13995,11 @@
             <a:noAutofit/>
           </a:bodyPr>
           <a:p>
+            <a:pPr>
+              <a:lnSpc>
+                <a:spcPct val="100000"/>
+              </a:lnSpc>
+            </a:pPr>
             <a:endParaRPr b="0" lang="en-US" sz="1800" spc="-1" strike="noStrike">
               <a:solidFill>
                 <a:srgbClr val="000000"/>
@@ -13374,7 +14018,7 @@
         <p:spPr>
           <a:xfrm>
             <a:off x="320040" y="914400"/>
-            <a:ext cx="4068720" cy="502560"/>
+            <a:ext cx="4068360" cy="502200"/>
           </a:xfrm>
           <a:prstGeom prst="rect">
             <a:avLst/>
@@ -13400,6 +14044,11 @@
             <a:noAutofit/>
           </a:bodyPr>
           <a:p>
+            <a:pPr>
+              <a:lnSpc>
+                <a:spcPct val="100000"/>
+              </a:lnSpc>
+            </a:pPr>
             <a:endParaRPr b="0" lang="en-US" sz="1800" spc="-1" strike="noStrike">
               <a:solidFill>
                 <a:srgbClr val="ffffff"/>
@@ -13418,7 +14067,7 @@
         <p:spPr>
           <a:xfrm>
             <a:off x="320040" y="914400"/>
-            <a:ext cx="4068720" cy="502560"/>
+            <a:ext cx="4068360" cy="502200"/>
           </a:xfrm>
           <a:prstGeom prst="rect">
             <a:avLst/>
@@ -13483,7 +14132,7 @@
         <p:spPr>
           <a:xfrm>
             <a:off x="457200" y="1481400"/>
-            <a:ext cx="3794400" cy="3273120"/>
+            <a:ext cx="3794040" cy="3272760"/>
           </a:xfrm>
           <a:prstGeom prst="rect">
             <a:avLst/>
@@ -13680,7 +14329,7 @@
         <p:spPr>
           <a:xfrm>
             <a:off x="4663440" y="914400"/>
-            <a:ext cx="4160160" cy="1352880"/>
+            <a:ext cx="4159800" cy="1352520"/>
           </a:xfrm>
           <a:prstGeom prst="rect">
             <a:avLst/>
@@ -13713,6 +14362,11 @@
             <a:noAutofit/>
           </a:bodyPr>
           <a:p>
+            <a:pPr>
+              <a:lnSpc>
+                <a:spcPct val="100000"/>
+              </a:lnSpc>
+            </a:pPr>
             <a:endParaRPr b="0" lang="en-US" sz="1800" spc="-1" strike="noStrike">
               <a:solidFill>
                 <a:srgbClr val="000000"/>
@@ -13731,7 +14385,7 @@
         <p:spPr>
           <a:xfrm>
             <a:off x="4663440" y="914400"/>
-            <a:ext cx="4160160" cy="475200"/>
+            <a:ext cx="4159800" cy="474840"/>
           </a:xfrm>
           <a:prstGeom prst="rect">
             <a:avLst/>
@@ -13757,6 +14411,11 @@
             <a:noAutofit/>
           </a:bodyPr>
           <a:p>
+            <a:pPr>
+              <a:lnSpc>
+                <a:spcPct val="100000"/>
+              </a:lnSpc>
+            </a:pPr>
             <a:endParaRPr b="0" lang="en-US" sz="1800" spc="-1" strike="noStrike">
               <a:solidFill>
                 <a:srgbClr val="ffffff"/>
@@ -13775,7 +14434,7 @@
         <p:spPr>
           <a:xfrm>
             <a:off x="4663440" y="914400"/>
-            <a:ext cx="4160160" cy="475200"/>
+            <a:ext cx="4159800" cy="474840"/>
           </a:xfrm>
           <a:prstGeom prst="rect">
             <a:avLst/>
@@ -13840,7 +14499,7 @@
         <p:spPr>
           <a:xfrm>
             <a:off x="4800600" y="1444680"/>
-            <a:ext cx="3885840" cy="749520"/>
+            <a:ext cx="3885480" cy="749160"/>
           </a:xfrm>
           <a:prstGeom prst="rect">
             <a:avLst/>
@@ -13896,7 +14555,7 @@
         <p:spPr>
           <a:xfrm>
             <a:off x="4663440" y="2395800"/>
-            <a:ext cx="4160160" cy="1352880"/>
+            <a:ext cx="4159800" cy="1352520"/>
           </a:xfrm>
           <a:prstGeom prst="rect">
             <a:avLst/>
@@ -13929,6 +14588,11 @@
             <a:noAutofit/>
           </a:bodyPr>
           <a:p>
+            <a:pPr>
+              <a:lnSpc>
+                <a:spcPct val="100000"/>
+              </a:lnSpc>
+            </a:pPr>
             <a:endParaRPr b="0" lang="en-US" sz="1800" spc="-1" strike="noStrike">
               <a:solidFill>
                 <a:srgbClr val="000000"/>
@@ -13947,7 +14611,7 @@
         <p:spPr>
           <a:xfrm>
             <a:off x="4663440" y="2395800"/>
-            <a:ext cx="4160160" cy="475200"/>
+            <a:ext cx="4159800" cy="474840"/>
           </a:xfrm>
           <a:prstGeom prst="rect">
             <a:avLst/>
@@ -13973,6 +14637,11 @@
             <a:noAutofit/>
           </a:bodyPr>
           <a:p>
+            <a:pPr>
+              <a:lnSpc>
+                <a:spcPct val="100000"/>
+              </a:lnSpc>
+            </a:pPr>
             <a:endParaRPr b="0" lang="en-US" sz="1800" spc="-1" strike="noStrike">
               <a:solidFill>
                 <a:srgbClr val="ffffff"/>
@@ -13991,7 +14660,7 @@
         <p:spPr>
           <a:xfrm>
             <a:off x="4663440" y="2395800"/>
-            <a:ext cx="4160160" cy="475200"/>
+            <a:ext cx="4159800" cy="474840"/>
           </a:xfrm>
           <a:prstGeom prst="rect">
             <a:avLst/>
@@ -14056,7 +14725,7 @@
         <p:spPr>
           <a:xfrm>
             <a:off x="4800600" y="2926080"/>
-            <a:ext cx="3885840" cy="749520"/>
+            <a:ext cx="3885480" cy="749160"/>
           </a:xfrm>
           <a:prstGeom prst="rect">
             <a:avLst/>
@@ -14112,7 +14781,7 @@
         <p:spPr>
           <a:xfrm>
             <a:off x="4663440" y="3017520"/>
-            <a:ext cx="4160160" cy="1828440"/>
+            <a:ext cx="4159800" cy="1828080"/>
           </a:xfrm>
           <a:prstGeom prst="rect">
             <a:avLst/>
@@ -14145,6 +14814,11 @@
             <a:noAutofit/>
           </a:bodyPr>
           <a:p>
+            <a:pPr>
+              <a:lnSpc>
+                <a:spcPct val="100000"/>
+              </a:lnSpc>
+            </a:pPr>
             <a:endParaRPr b="0" lang="en-US" sz="1800" spc="-1" strike="noStrike">
               <a:solidFill>
                 <a:srgbClr val="000000"/>
@@ -14163,7 +14837,7 @@
         <p:spPr>
           <a:xfrm>
             <a:off x="4663440" y="3017520"/>
-            <a:ext cx="4160160" cy="411120"/>
+            <a:ext cx="4159800" cy="410760"/>
           </a:xfrm>
           <a:prstGeom prst="rect">
             <a:avLst/>
@@ -14189,6 +14863,11 @@
             <a:noAutofit/>
           </a:bodyPr>
           <a:p>
+            <a:pPr>
+              <a:lnSpc>
+                <a:spcPct val="100000"/>
+              </a:lnSpc>
+            </a:pPr>
             <a:endParaRPr b="0" lang="en-US" sz="1800" spc="-1" strike="noStrike">
               <a:solidFill>
                 <a:srgbClr val="000000"/>
@@ -14207,7 +14886,7 @@
         <p:spPr>
           <a:xfrm>
             <a:off x="4663440" y="3017520"/>
-            <a:ext cx="4160160" cy="411120"/>
+            <a:ext cx="4159800" cy="410760"/>
           </a:xfrm>
           <a:prstGeom prst="rect">
             <a:avLst/>
@@ -14272,7 +14951,7 @@
         <p:spPr>
           <a:xfrm>
             <a:off x="4773240" y="3557160"/>
-            <a:ext cx="200880" cy="200880"/>
+            <a:ext cx="200520" cy="200520"/>
           </a:xfrm>
           <a:prstGeom prst="ellipse">
             <a:avLst/>
@@ -14298,6 +14977,11 @@
             <a:noAutofit/>
           </a:bodyPr>
           <a:p>
+            <a:pPr>
+              <a:lnSpc>
+                <a:spcPct val="100000"/>
+              </a:lnSpc>
+            </a:pPr>
             <a:endParaRPr b="0" lang="en-US" sz="1800" spc="-1" strike="noStrike">
               <a:solidFill>
                 <a:srgbClr val="000000"/>
@@ -14316,7 +15000,7 @@
         <p:spPr>
           <a:xfrm>
             <a:off x="5047560" y="3493080"/>
-            <a:ext cx="3611520" cy="292320"/>
+            <a:ext cx="3611160" cy="291960"/>
           </a:xfrm>
           <a:prstGeom prst="rect">
             <a:avLst/>
@@ -14372,7 +15056,7 @@
         <p:spPr>
           <a:xfrm>
             <a:off x="4773240" y="3877200"/>
-            <a:ext cx="200880" cy="200880"/>
+            <a:ext cx="200520" cy="200520"/>
           </a:xfrm>
           <a:prstGeom prst="ellipse">
             <a:avLst/>
@@ -14398,6 +15082,11 @@
             <a:noAutofit/>
           </a:bodyPr>
           <a:p>
+            <a:pPr>
+              <a:lnSpc>
+                <a:spcPct val="100000"/>
+              </a:lnSpc>
+            </a:pPr>
             <a:endParaRPr b="0" lang="en-US" sz="1800" spc="-1" strike="noStrike">
               <a:solidFill>
                 <a:srgbClr val="000000"/>
@@ -14416,7 +15105,7 @@
         <p:spPr>
           <a:xfrm>
             <a:off x="5047560" y="3813120"/>
-            <a:ext cx="3611520" cy="292320"/>
+            <a:ext cx="3611160" cy="291960"/>
           </a:xfrm>
           <a:prstGeom prst="rect">
             <a:avLst/>
@@ -14472,7 +15161,7 @@
         <p:spPr>
           <a:xfrm>
             <a:off x="4773240" y="4197240"/>
-            <a:ext cx="200880" cy="200880"/>
+            <a:ext cx="200520" cy="200520"/>
           </a:xfrm>
           <a:prstGeom prst="ellipse">
             <a:avLst/>
@@ -14498,6 +15187,11 @@
             <a:noAutofit/>
           </a:bodyPr>
           <a:p>
+            <a:pPr>
+              <a:lnSpc>
+                <a:spcPct val="100000"/>
+              </a:lnSpc>
+            </a:pPr>
             <a:endParaRPr b="0" lang="en-US" sz="1800" spc="-1" strike="noStrike">
               <a:solidFill>
                 <a:srgbClr val="000000"/>
@@ -14516,7 +15210,7 @@
         <p:spPr>
           <a:xfrm>
             <a:off x="5047560" y="4133160"/>
-            <a:ext cx="3611520" cy="292320"/>
+            <a:ext cx="3611160" cy="291960"/>
           </a:xfrm>
           <a:prstGeom prst="rect">
             <a:avLst/>
@@ -14572,7 +15266,7 @@
         <p:spPr>
           <a:xfrm>
             <a:off x="4773240" y="4517280"/>
-            <a:ext cx="200880" cy="200880"/>
+            <a:ext cx="200520" cy="200520"/>
           </a:xfrm>
           <a:prstGeom prst="ellipse">
             <a:avLst/>
@@ -14598,6 +15292,11 @@
             <a:noAutofit/>
           </a:bodyPr>
           <a:p>
+            <a:pPr>
+              <a:lnSpc>
+                <a:spcPct val="100000"/>
+              </a:lnSpc>
+            </a:pPr>
             <a:endParaRPr b="0" lang="en-US" sz="1800" spc="-1" strike="noStrike">
               <a:solidFill>
                 <a:srgbClr val="000000"/>
@@ -14616,7 +15315,7 @@
         <p:spPr>
           <a:xfrm>
             <a:off x="5047560" y="4453200"/>
-            <a:ext cx="3611520" cy="292320"/>
+            <a:ext cx="3611160" cy="291960"/>
           </a:xfrm>
           <a:prstGeom prst="rect">
             <a:avLst/>
@@ -14709,7 +15408,7 @@
         <p:spPr>
           <a:xfrm>
             <a:off x="0" y="0"/>
-            <a:ext cx="9143640" cy="776880"/>
+            <a:ext cx="9143280" cy="776520"/>
           </a:xfrm>
           <a:prstGeom prst="rect">
             <a:avLst/>
@@ -14735,6 +15434,11 @@
             <a:noAutofit/>
           </a:bodyPr>
           <a:p>
+            <a:pPr>
+              <a:lnSpc>
+                <a:spcPct val="100000"/>
+              </a:lnSpc>
+            </a:pPr>
             <a:endParaRPr b="0" lang="en-US" sz="1800" spc="-1" strike="noStrike">
               <a:solidFill>
                 <a:srgbClr val="ffffff"/>
@@ -14753,7 +15457,7 @@
         <p:spPr>
           <a:xfrm>
             <a:off x="365760" y="0"/>
-            <a:ext cx="8412120" cy="776880"/>
+            <a:ext cx="8411760" cy="776520"/>
           </a:xfrm>
           <a:prstGeom prst="rect">
             <a:avLst/>
@@ -14783,7 +15487,7 @@
               </a:tabLst>
             </a:pPr>
             <a:r>
-              <a:rPr b="1" lang="en-US" sz="1700" spc="199" strike="noStrike">
+              <a:rPr b="1" lang="en-US" sz="1700" spc="197" strike="noStrike">
                 <a:solidFill>
                   <a:srgbClr val="ffffff"/>
                 </a:solidFill>
@@ -14809,7 +15513,7 @@
         <p:spPr>
           <a:xfrm>
             <a:off x="274320" y="914400"/>
-            <a:ext cx="4160160" cy="3913200"/>
+            <a:ext cx="4159800" cy="3912840"/>
           </a:xfrm>
           <a:prstGeom prst="rect">
             <a:avLst/>
@@ -14842,6 +15546,11 @@
             <a:noAutofit/>
           </a:bodyPr>
           <a:p>
+            <a:pPr>
+              <a:lnSpc>
+                <a:spcPct val="100000"/>
+              </a:lnSpc>
+            </a:pPr>
             <a:endParaRPr b="0" lang="en-US" sz="1800" spc="-1" strike="noStrike">
               <a:solidFill>
                 <a:srgbClr val="ffffff"/>
@@ -14860,7 +15569,7 @@
         <p:spPr>
           <a:xfrm>
             <a:off x="274320" y="914400"/>
-            <a:ext cx="4160160" cy="594000"/>
+            <a:ext cx="4159800" cy="593640"/>
           </a:xfrm>
           <a:prstGeom prst="rect">
             <a:avLst/>
@@ -14886,6 +15595,11 @@
             <a:noAutofit/>
           </a:bodyPr>
           <a:p>
+            <a:pPr>
+              <a:lnSpc>
+                <a:spcPct val="100000"/>
+              </a:lnSpc>
+            </a:pPr>
             <a:endParaRPr b="0" lang="en-US" sz="1800" spc="-1" strike="noStrike">
               <a:solidFill>
                 <a:srgbClr val="ffffff"/>
@@ -14904,7 +15618,7 @@
         <p:spPr>
           <a:xfrm>
             <a:off x="384120" y="978480"/>
-            <a:ext cx="456840" cy="456840"/>
+            <a:ext cx="456480" cy="456480"/>
           </a:xfrm>
           <a:prstGeom prst="ellipse">
             <a:avLst/>
@@ -14930,6 +15644,11 @@
             <a:noAutofit/>
           </a:bodyPr>
           <a:p>
+            <a:pPr>
+              <a:lnSpc>
+                <a:spcPct val="100000"/>
+              </a:lnSpc>
+            </a:pPr>
             <a:endParaRPr b="0" lang="en-US" sz="1800" spc="-1" strike="noStrike">
               <a:solidFill>
                 <a:srgbClr val="ffffff"/>
@@ -14948,7 +15667,7 @@
         <p:spPr>
           <a:xfrm>
             <a:off x="384120" y="978480"/>
-            <a:ext cx="456840" cy="456840"/>
+            <a:ext cx="456480" cy="456480"/>
           </a:xfrm>
           <a:prstGeom prst="rect">
             <a:avLst/>
@@ -15004,7 +15723,7 @@
         <p:spPr>
           <a:xfrm>
             <a:off x="960120" y="914400"/>
-            <a:ext cx="3337200" cy="594000"/>
+            <a:ext cx="3336840" cy="593640"/>
           </a:xfrm>
           <a:prstGeom prst="rect">
             <a:avLst/>
@@ -15069,7 +15788,7 @@
         <p:spPr>
           <a:xfrm>
             <a:off x="411480" y="1572840"/>
-            <a:ext cx="3885840" cy="502560"/>
+            <a:ext cx="3885480" cy="502200"/>
           </a:xfrm>
           <a:prstGeom prst="rect">
             <a:avLst/>
@@ -15125,7 +15844,7 @@
         <p:spPr>
           <a:xfrm>
             <a:off x="411480" y="2148840"/>
-            <a:ext cx="3885840" cy="1206720"/>
+            <a:ext cx="3885480" cy="1206360"/>
           </a:xfrm>
           <a:prstGeom prst="rect">
             <a:avLst/>
@@ -15151,6 +15870,11 @@
             <a:noAutofit/>
           </a:bodyPr>
           <a:p>
+            <a:pPr>
+              <a:lnSpc>
+                <a:spcPct val="100000"/>
+              </a:lnSpc>
+            </a:pPr>
             <a:endParaRPr b="0" lang="en-US" sz="1800" spc="-1" strike="noStrike">
               <a:solidFill>
                 <a:srgbClr val="ffffff"/>
@@ -15169,7 +15893,7 @@
         <p:spPr>
           <a:xfrm>
             <a:off x="411480" y="2148840"/>
-            <a:ext cx="456840" cy="1206720"/>
+            <a:ext cx="456480" cy="1206360"/>
           </a:xfrm>
           <a:prstGeom prst="rect">
             <a:avLst/>
@@ -15195,6 +15919,11 @@
             <a:noAutofit/>
           </a:bodyPr>
           <a:p>
+            <a:pPr>
+              <a:lnSpc>
+                <a:spcPct val="100000"/>
+              </a:lnSpc>
+            </a:pPr>
             <a:endParaRPr b="0" lang="en-US" sz="1800" spc="-1" strike="noStrike">
               <a:solidFill>
                 <a:srgbClr val="ffffff"/>
@@ -15213,7 +15942,7 @@
         <p:spPr>
           <a:xfrm>
             <a:off x="411480" y="2148840"/>
-            <a:ext cx="456840" cy="1206720"/>
+            <a:ext cx="456480" cy="1206360"/>
           </a:xfrm>
           <a:prstGeom prst="rect">
             <a:avLst/>
@@ -15269,7 +15998,7 @@
         <p:spPr>
           <a:xfrm>
             <a:off x="932760" y="2221920"/>
-            <a:ext cx="3245760" cy="328680"/>
+            <a:ext cx="3245400" cy="328320"/>
           </a:xfrm>
           <a:prstGeom prst="rect">
             <a:avLst/>
@@ -15325,7 +16054,7 @@
         <p:spPr>
           <a:xfrm>
             <a:off x="932760" y="2569320"/>
-            <a:ext cx="3245760" cy="712800"/>
+            <a:ext cx="3245400" cy="712440"/>
           </a:xfrm>
           <a:prstGeom prst="rect">
             <a:avLst/>
@@ -15381,7 +16110,7 @@
         <p:spPr>
           <a:xfrm>
             <a:off x="411480" y="3502080"/>
-            <a:ext cx="3885840" cy="1206720"/>
+            <a:ext cx="3885480" cy="1206360"/>
           </a:xfrm>
           <a:prstGeom prst="rect">
             <a:avLst/>
@@ -15407,6 +16136,11 @@
             <a:noAutofit/>
           </a:bodyPr>
           <a:p>
+            <a:pPr>
+              <a:lnSpc>
+                <a:spcPct val="100000"/>
+              </a:lnSpc>
+            </a:pPr>
             <a:endParaRPr b="0" lang="en-US" sz="1800" spc="-1" strike="noStrike">
               <a:solidFill>
                 <a:srgbClr val="ffffff"/>
@@ -15425,7 +16159,7 @@
         <p:spPr>
           <a:xfrm>
             <a:off x="411480" y="3502080"/>
-            <a:ext cx="456840" cy="1206720"/>
+            <a:ext cx="456480" cy="1206360"/>
           </a:xfrm>
           <a:prstGeom prst="rect">
             <a:avLst/>
@@ -15451,6 +16185,11 @@
             <a:noAutofit/>
           </a:bodyPr>
           <a:p>
+            <a:pPr>
+              <a:lnSpc>
+                <a:spcPct val="100000"/>
+              </a:lnSpc>
+            </a:pPr>
             <a:endParaRPr b="0" lang="en-US" sz="1800" spc="-1" strike="noStrike">
               <a:solidFill>
                 <a:srgbClr val="000000"/>
@@ -15469,7 +16208,7 @@
         <p:spPr>
           <a:xfrm>
             <a:off x="411480" y="3502080"/>
-            <a:ext cx="456840" cy="1206720"/>
+            <a:ext cx="456480" cy="1206360"/>
           </a:xfrm>
           <a:prstGeom prst="rect">
             <a:avLst/>
@@ -15525,7 +16264,7 @@
         <p:spPr>
           <a:xfrm>
             <a:off x="932760" y="3575160"/>
-            <a:ext cx="3245760" cy="328680"/>
+            <a:ext cx="3245400" cy="328320"/>
           </a:xfrm>
           <a:prstGeom prst="rect">
             <a:avLst/>
@@ -15581,7 +16320,7 @@
         <p:spPr>
           <a:xfrm>
             <a:off x="932760" y="3922920"/>
-            <a:ext cx="3245760" cy="712800"/>
+            <a:ext cx="3245400" cy="712440"/>
           </a:xfrm>
           <a:prstGeom prst="rect">
             <a:avLst/>
@@ -15637,7 +16376,7 @@
         <p:spPr>
           <a:xfrm>
             <a:off x="411480" y="4480560"/>
-            <a:ext cx="3885840" cy="255600"/>
+            <a:ext cx="3885480" cy="255240"/>
           </a:xfrm>
           <a:prstGeom prst="rect">
             <a:avLst/>
@@ -15702,7 +16441,7 @@
         <p:spPr>
           <a:xfrm>
             <a:off x="4709160" y="914400"/>
-            <a:ext cx="4160160" cy="3913200"/>
+            <a:ext cx="4159800" cy="3912840"/>
           </a:xfrm>
           <a:prstGeom prst="rect">
             <a:avLst/>
@@ -15735,6 +16474,11 @@
             <a:noAutofit/>
           </a:bodyPr>
           <a:p>
+            <a:pPr>
+              <a:lnSpc>
+                <a:spcPct val="100000"/>
+              </a:lnSpc>
+            </a:pPr>
             <a:endParaRPr b="0" lang="en-US" sz="1800" spc="-1" strike="noStrike">
               <a:solidFill>
                 <a:srgbClr val="ffffff"/>
@@ -15753,7 +16497,7 @@
         <p:spPr>
           <a:xfrm>
             <a:off x="4709160" y="914400"/>
-            <a:ext cx="4160160" cy="594000"/>
+            <a:ext cx="4159800" cy="593640"/>
           </a:xfrm>
           <a:prstGeom prst="rect">
             <a:avLst/>
@@ -15779,6 +16523,11 @@
             <a:noAutofit/>
           </a:bodyPr>
           <a:p>
+            <a:pPr>
+              <a:lnSpc>
+                <a:spcPct val="100000"/>
+              </a:lnSpc>
+            </a:pPr>
             <a:endParaRPr b="0" lang="en-US" sz="1800" spc="-1" strike="noStrike">
               <a:solidFill>
                 <a:srgbClr val="000000"/>
@@ -15797,7 +16546,7 @@
         <p:spPr>
           <a:xfrm>
             <a:off x="4818960" y="978480"/>
-            <a:ext cx="456840" cy="456840"/>
+            <a:ext cx="456480" cy="456480"/>
           </a:xfrm>
           <a:prstGeom prst="ellipse">
             <a:avLst/>
@@ -15823,6 +16572,11 @@
             <a:noAutofit/>
           </a:bodyPr>
           <a:p>
+            <a:pPr>
+              <a:lnSpc>
+                <a:spcPct val="100000"/>
+              </a:lnSpc>
+            </a:pPr>
             <a:endParaRPr b="0" lang="en-US" sz="1800" spc="-1" strike="noStrike">
               <a:solidFill>
                 <a:srgbClr val="ffffff"/>
@@ -15841,7 +16595,7 @@
         <p:spPr>
           <a:xfrm>
             <a:off x="4818960" y="978480"/>
-            <a:ext cx="456840" cy="456840"/>
+            <a:ext cx="456480" cy="456480"/>
           </a:xfrm>
           <a:prstGeom prst="rect">
             <a:avLst/>
@@ -15897,7 +16651,7 @@
         <p:spPr>
           <a:xfrm>
             <a:off x="5394960" y="914400"/>
-            <a:ext cx="3337200" cy="594000"/>
+            <a:ext cx="3336840" cy="593640"/>
           </a:xfrm>
           <a:prstGeom prst="rect">
             <a:avLst/>
@@ -15962,7 +16716,7 @@
         <p:spPr>
           <a:xfrm>
             <a:off x="4846320" y="1572840"/>
-            <a:ext cx="3885840" cy="502560"/>
+            <a:ext cx="3885480" cy="502200"/>
           </a:xfrm>
           <a:prstGeom prst="rect">
             <a:avLst/>
@@ -16018,7 +16772,7 @@
         <p:spPr>
           <a:xfrm>
             <a:off x="4846320" y="2148840"/>
-            <a:ext cx="3885840" cy="566640"/>
+            <a:ext cx="3885480" cy="566280"/>
           </a:xfrm>
           <a:prstGeom prst="rect">
             <a:avLst/>
@@ -16044,6 +16798,11 @@
             <a:noAutofit/>
           </a:bodyPr>
           <a:p>
+            <a:pPr>
+              <a:lnSpc>
+                <a:spcPct val="100000"/>
+              </a:lnSpc>
+            </a:pPr>
             <a:endParaRPr b="0" lang="en-US" sz="1800" spc="-1" strike="noStrike">
               <a:solidFill>
                 <a:srgbClr val="ffffff"/>
@@ -16062,7 +16821,7 @@
         <p:spPr>
           <a:xfrm>
             <a:off x="4846320" y="2148840"/>
-            <a:ext cx="164160" cy="566640"/>
+            <a:ext cx="163800" cy="566280"/>
           </a:xfrm>
           <a:prstGeom prst="rect">
             <a:avLst/>
@@ -16088,6 +16847,11 @@
             <a:noAutofit/>
           </a:bodyPr>
           <a:p>
+            <a:pPr>
+              <a:lnSpc>
+                <a:spcPct val="100000"/>
+              </a:lnSpc>
+            </a:pPr>
             <a:endParaRPr b="0" lang="en-US" sz="1800" spc="-1" strike="noStrike">
               <a:solidFill>
                 <a:srgbClr val="ffffff"/>
@@ -16106,7 +16870,7 @@
         <p:spPr>
           <a:xfrm>
             <a:off x="5074920" y="2185560"/>
-            <a:ext cx="3657240" cy="255600"/>
+            <a:ext cx="3656880" cy="255240"/>
           </a:xfrm>
           <a:prstGeom prst="rect">
             <a:avLst/>
@@ -16162,7 +16926,7 @@
         <p:spPr>
           <a:xfrm>
             <a:off x="5074920" y="2450520"/>
-            <a:ext cx="3657240" cy="200880"/>
+            <a:ext cx="3656880" cy="200520"/>
           </a:xfrm>
           <a:prstGeom prst="rect">
             <a:avLst/>
@@ -16218,7 +16982,7 @@
         <p:spPr>
           <a:xfrm>
             <a:off x="4846320" y="2807280"/>
-            <a:ext cx="3885840" cy="566640"/>
+            <a:ext cx="3885480" cy="566280"/>
           </a:xfrm>
           <a:prstGeom prst="rect">
             <a:avLst/>
@@ -16244,6 +17008,11 @@
             <a:noAutofit/>
           </a:bodyPr>
           <a:p>
+            <a:pPr>
+              <a:lnSpc>
+                <a:spcPct val="100000"/>
+              </a:lnSpc>
+            </a:pPr>
             <a:endParaRPr b="0" lang="en-US" sz="1800" spc="-1" strike="noStrike">
               <a:solidFill>
                 <a:srgbClr val="ffffff"/>
@@ -16262,7 +17031,7 @@
         <p:spPr>
           <a:xfrm>
             <a:off x="4846320" y="2807280"/>
-            <a:ext cx="164160" cy="566640"/>
+            <a:ext cx="163800" cy="566280"/>
           </a:xfrm>
           <a:prstGeom prst="rect">
             <a:avLst/>
@@ -16288,6 +17057,11 @@
             <a:noAutofit/>
           </a:bodyPr>
           <a:p>
+            <a:pPr>
+              <a:lnSpc>
+                <a:spcPct val="100000"/>
+              </a:lnSpc>
+            </a:pPr>
             <a:endParaRPr b="0" lang="en-US" sz="1800" spc="-1" strike="noStrike">
               <a:solidFill>
                 <a:srgbClr val="ffffff"/>
@@ -16306,7 +17080,7 @@
         <p:spPr>
           <a:xfrm>
             <a:off x="5074920" y="2843640"/>
-            <a:ext cx="3657240" cy="255600"/>
+            <a:ext cx="3656880" cy="255240"/>
           </a:xfrm>
           <a:prstGeom prst="rect">
             <a:avLst/>
@@ -16362,7 +17136,7 @@
         <p:spPr>
           <a:xfrm>
             <a:off x="5074920" y="3108960"/>
-            <a:ext cx="3657240" cy="200880"/>
+            <a:ext cx="3656880" cy="200520"/>
           </a:xfrm>
           <a:prstGeom prst="rect">
             <a:avLst/>
@@ -16418,7 +17192,7 @@
         <p:spPr>
           <a:xfrm>
             <a:off x="4846320" y="3465720"/>
-            <a:ext cx="3885840" cy="566640"/>
+            <a:ext cx="3885480" cy="566280"/>
           </a:xfrm>
           <a:prstGeom prst="rect">
             <a:avLst/>
@@ -16444,6 +17218,11 @@
             <a:noAutofit/>
           </a:bodyPr>
           <a:p>
+            <a:pPr>
+              <a:lnSpc>
+                <a:spcPct val="100000"/>
+              </a:lnSpc>
+            </a:pPr>
             <a:endParaRPr b="0" lang="en-US" sz="1800" spc="-1" strike="noStrike">
               <a:solidFill>
                 <a:srgbClr val="ffffff"/>
@@ -16462,7 +17241,7 @@
         <p:spPr>
           <a:xfrm>
             <a:off x="4846320" y="3465720"/>
-            <a:ext cx="164160" cy="566640"/>
+            <a:ext cx="163800" cy="566280"/>
           </a:xfrm>
           <a:prstGeom prst="rect">
             <a:avLst/>
@@ -16488,6 +17267,11 @@
             <a:noAutofit/>
           </a:bodyPr>
           <a:p>
+            <a:pPr>
+              <a:lnSpc>
+                <a:spcPct val="100000"/>
+              </a:lnSpc>
+            </a:pPr>
             <a:endParaRPr b="0" lang="en-US" sz="1800" spc="-1" strike="noStrike">
               <a:solidFill>
                 <a:srgbClr val="ffffff"/>
@@ -16506,7 +17290,7 @@
         <p:spPr>
           <a:xfrm>
             <a:off x="5074920" y="3502080"/>
-            <a:ext cx="3657240" cy="255600"/>
+            <a:ext cx="3656880" cy="255240"/>
           </a:xfrm>
           <a:prstGeom prst="rect">
             <a:avLst/>
@@ -16562,7 +17346,7 @@
         <p:spPr>
           <a:xfrm>
             <a:off x="5074920" y="3767400"/>
-            <a:ext cx="3657240" cy="200880"/>
+            <a:ext cx="3656880" cy="200520"/>
           </a:xfrm>
           <a:prstGeom prst="rect">
             <a:avLst/>
@@ -16618,7 +17402,7 @@
         <p:spPr>
           <a:xfrm>
             <a:off x="4846320" y="4123800"/>
-            <a:ext cx="3885840" cy="566640"/>
+            <a:ext cx="3885480" cy="566280"/>
           </a:xfrm>
           <a:prstGeom prst="rect">
             <a:avLst/>
@@ -16644,6 +17428,11 @@
             <a:noAutofit/>
           </a:bodyPr>
           <a:p>
+            <a:pPr>
+              <a:lnSpc>
+                <a:spcPct val="100000"/>
+              </a:lnSpc>
+            </a:pPr>
             <a:endParaRPr b="0" lang="en-US" sz="1800" spc="-1" strike="noStrike">
               <a:solidFill>
                 <a:srgbClr val="ffffff"/>
@@ -16662,7 +17451,7 @@
         <p:spPr>
           <a:xfrm>
             <a:off x="4846320" y="4123800"/>
-            <a:ext cx="164160" cy="566640"/>
+            <a:ext cx="163800" cy="566280"/>
           </a:xfrm>
           <a:prstGeom prst="rect">
             <a:avLst/>
@@ -16688,6 +17477,11 @@
             <a:noAutofit/>
           </a:bodyPr>
           <a:p>
+            <a:pPr>
+              <a:lnSpc>
+                <a:spcPct val="100000"/>
+              </a:lnSpc>
+            </a:pPr>
             <a:endParaRPr b="0" lang="en-US" sz="1800" spc="-1" strike="noStrike">
               <a:solidFill>
                 <a:srgbClr val="ffffff"/>
@@ -16706,7 +17500,7 @@
         <p:spPr>
           <a:xfrm>
             <a:off x="5074920" y="4160520"/>
-            <a:ext cx="3657240" cy="255600"/>
+            <a:ext cx="3656880" cy="255240"/>
           </a:xfrm>
           <a:prstGeom prst="rect">
             <a:avLst/>
@@ -16762,7 +17556,7 @@
         <p:spPr>
           <a:xfrm>
             <a:off x="5074920" y="4425840"/>
-            <a:ext cx="3657240" cy="200880"/>
+            <a:ext cx="3656880" cy="200520"/>
           </a:xfrm>
           <a:prstGeom prst="rect">
             <a:avLst/>
@@ -16855,7 +17649,7 @@
         <p:spPr>
           <a:xfrm>
             <a:off x="0" y="0"/>
-            <a:ext cx="9143640" cy="776880"/>
+            <a:ext cx="9143280" cy="776520"/>
           </a:xfrm>
           <a:prstGeom prst="rect">
             <a:avLst/>
@@ -16881,6 +17675,11 @@
             <a:noAutofit/>
           </a:bodyPr>
           <a:p>
+            <a:pPr>
+              <a:lnSpc>
+                <a:spcPct val="100000"/>
+              </a:lnSpc>
+            </a:pPr>
             <a:endParaRPr b="0" lang="en-US" sz="1800" spc="-1" strike="noStrike">
               <a:solidFill>
                 <a:srgbClr val="ffffff"/>
@@ -16899,7 +17698,7 @@
         <p:spPr>
           <a:xfrm>
             <a:off x="320040" y="137160"/>
-            <a:ext cx="502560" cy="502560"/>
+            <a:ext cx="502200" cy="502200"/>
           </a:xfrm>
           <a:prstGeom prst="ellipse">
             <a:avLst/>
@@ -16925,6 +17724,11 @@
             <a:noAutofit/>
           </a:bodyPr>
           <a:p>
+            <a:pPr>
+              <a:lnSpc>
+                <a:spcPct val="100000"/>
+              </a:lnSpc>
+            </a:pPr>
             <a:endParaRPr b="0" lang="en-US" sz="1800" spc="-1" strike="noStrike">
               <a:solidFill>
                 <a:srgbClr val="ffffff"/>
@@ -16943,7 +17747,7 @@
         <p:spPr>
           <a:xfrm>
             <a:off x="320040" y="137160"/>
-            <a:ext cx="502560" cy="502560"/>
+            <a:ext cx="502200" cy="502200"/>
           </a:xfrm>
           <a:prstGeom prst="rect">
             <a:avLst/>
@@ -16999,7 +17803,7 @@
         <p:spPr>
           <a:xfrm>
             <a:off x="960120" y="0"/>
-            <a:ext cx="7817760" cy="776880"/>
+            <a:ext cx="7817400" cy="776520"/>
           </a:xfrm>
           <a:prstGeom prst="rect">
             <a:avLst/>
@@ -17029,7 +17833,7 @@
               </a:tabLst>
             </a:pPr>
             <a:r>
-              <a:rPr b="1" lang="en-US" sz="1800" spc="199" strike="noStrike">
+              <a:rPr b="1" lang="en-US" sz="1800" spc="197" strike="noStrike">
                 <a:solidFill>
                   <a:srgbClr val="ffffff"/>
                 </a:solidFill>
@@ -17055,7 +17859,7 @@
         <p:spPr>
           <a:xfrm>
             <a:off x="365760" y="914400"/>
-            <a:ext cx="8412120" cy="868320"/>
+            <a:ext cx="8411760" cy="867960"/>
           </a:xfrm>
           <a:prstGeom prst="rect">
             <a:avLst/>
@@ -17088,6 +17892,11 @@
             <a:noAutofit/>
           </a:bodyPr>
           <a:p>
+            <a:pPr>
+              <a:lnSpc>
+                <a:spcPct val="100000"/>
+              </a:lnSpc>
+            </a:pPr>
             <a:endParaRPr b="0" lang="en-US" sz="1800" spc="-1" strike="noStrike">
               <a:solidFill>
                 <a:srgbClr val="ffffff"/>
@@ -17106,7 +17915,7 @@
         <p:spPr>
           <a:xfrm>
             <a:off x="365760" y="914400"/>
-            <a:ext cx="8412120" cy="868320"/>
+            <a:ext cx="8411760" cy="867960"/>
           </a:xfrm>
           <a:prstGeom prst="rect">
             <a:avLst/>
@@ -17162,7 +17971,7 @@
         <p:spPr>
           <a:xfrm>
             <a:off x="365760" y="1920240"/>
-            <a:ext cx="2742840" cy="2925720"/>
+            <a:ext cx="2742480" cy="2925360"/>
           </a:xfrm>
           <a:prstGeom prst="rect">
             <a:avLst/>
@@ -17195,6 +18004,11 @@
             <a:noAutofit/>
           </a:bodyPr>
           <a:p>
+            <a:pPr>
+              <a:lnSpc>
+                <a:spcPct val="100000"/>
+              </a:lnSpc>
+            </a:pPr>
             <a:endParaRPr b="0" lang="en-US" sz="1800" spc="-1" strike="noStrike">
               <a:solidFill>
                 <a:srgbClr val="000000"/>
@@ -17213,7 +18027,7 @@
         <p:spPr>
           <a:xfrm>
             <a:off x="365760" y="1920240"/>
-            <a:ext cx="2742840" cy="658080"/>
+            <a:ext cx="2742480" cy="657720"/>
           </a:xfrm>
           <a:prstGeom prst="rect">
             <a:avLst/>
@@ -17239,6 +18053,11 @@
             <a:noAutofit/>
           </a:bodyPr>
           <a:p>
+            <a:pPr>
+              <a:lnSpc>
+                <a:spcPct val="100000"/>
+              </a:lnSpc>
+            </a:pPr>
             <a:endParaRPr b="0" lang="en-US" sz="1800" spc="-1" strike="noStrike">
               <a:solidFill>
                 <a:srgbClr val="ffffff"/>
@@ -17257,7 +18076,7 @@
         <p:spPr>
           <a:xfrm>
             <a:off x="365760" y="1920240"/>
-            <a:ext cx="2742840" cy="658080"/>
+            <a:ext cx="2742480" cy="657720"/>
           </a:xfrm>
           <a:prstGeom prst="rect">
             <a:avLst/>
@@ -17322,7 +18141,7 @@
         <p:spPr>
           <a:xfrm>
             <a:off x="475560" y="2633400"/>
-            <a:ext cx="2523240" cy="987120"/>
+            <a:ext cx="2522880" cy="986760"/>
           </a:xfrm>
           <a:prstGeom prst="rect">
             <a:avLst/>
@@ -17378,7 +18197,7 @@
         <p:spPr>
           <a:xfrm>
             <a:off x="502920" y="3758040"/>
-            <a:ext cx="219240" cy="219240"/>
+            <a:ext cx="218880" cy="218880"/>
           </a:xfrm>
           <a:prstGeom prst="ellipse">
             <a:avLst/>
@@ -17404,6 +18223,11 @@
             <a:noAutofit/>
           </a:bodyPr>
           <a:p>
+            <a:pPr>
+              <a:lnSpc>
+                <a:spcPct val="100000"/>
+              </a:lnSpc>
+            </a:pPr>
             <a:endParaRPr b="0" lang="en-US" sz="1800" spc="-1" strike="noStrike">
               <a:solidFill>
                 <a:srgbClr val="ffffff"/>
@@ -17422,7 +18246,7 @@
         <p:spPr>
           <a:xfrm>
             <a:off x="795600" y="3675960"/>
-            <a:ext cx="2239920" cy="347040"/>
+            <a:ext cx="2239560" cy="346680"/>
           </a:xfrm>
           <a:prstGeom prst="rect">
             <a:avLst/>
@@ -17478,7 +18302,7 @@
         <p:spPr>
           <a:xfrm>
             <a:off x="502920" y="4142160"/>
-            <a:ext cx="219240" cy="219240"/>
+            <a:ext cx="218880" cy="218880"/>
           </a:xfrm>
           <a:prstGeom prst="ellipse">
             <a:avLst/>
@@ -17504,6 +18328,11 @@
             <a:noAutofit/>
           </a:bodyPr>
           <a:p>
+            <a:pPr>
+              <a:lnSpc>
+                <a:spcPct val="100000"/>
+              </a:lnSpc>
+            </a:pPr>
             <a:endParaRPr b="0" lang="en-US" sz="1800" spc="-1" strike="noStrike">
               <a:solidFill>
                 <a:srgbClr val="ffffff"/>
@@ -17522,7 +18351,7 @@
         <p:spPr>
           <a:xfrm>
             <a:off x="795600" y="4060080"/>
-            <a:ext cx="2239920" cy="347040"/>
+            <a:ext cx="2239560" cy="346680"/>
           </a:xfrm>
           <a:prstGeom prst="rect">
             <a:avLst/>
@@ -17578,7 +18407,7 @@
         <p:spPr>
           <a:xfrm>
             <a:off x="502920" y="4526280"/>
-            <a:ext cx="219240" cy="219240"/>
+            <a:ext cx="218880" cy="218880"/>
           </a:xfrm>
           <a:prstGeom prst="ellipse">
             <a:avLst/>
@@ -17604,6 +18433,11 @@
             <a:noAutofit/>
           </a:bodyPr>
           <a:p>
+            <a:pPr>
+              <a:lnSpc>
+                <a:spcPct val="100000"/>
+              </a:lnSpc>
+            </a:pPr>
             <a:endParaRPr b="0" lang="en-US" sz="1800" spc="-1" strike="noStrike">
               <a:solidFill>
                 <a:srgbClr val="ffffff"/>
@@ -17622,7 +18456,7 @@
         <p:spPr>
           <a:xfrm>
             <a:off x="795600" y="4443840"/>
-            <a:ext cx="2239920" cy="347040"/>
+            <a:ext cx="2239560" cy="346680"/>
           </a:xfrm>
           <a:prstGeom prst="rect">
             <a:avLst/>
@@ -17678,7 +18512,7 @@
         <p:spPr>
           <a:xfrm>
             <a:off x="3246120" y="1920240"/>
-            <a:ext cx="2742840" cy="2925720"/>
+            <a:ext cx="2742480" cy="2925360"/>
           </a:xfrm>
           <a:prstGeom prst="rect">
             <a:avLst/>
@@ -17711,6 +18545,11 @@
             <a:noAutofit/>
           </a:bodyPr>
           <a:p>
+            <a:pPr>
+              <a:lnSpc>
+                <a:spcPct val="100000"/>
+              </a:lnSpc>
+            </a:pPr>
             <a:endParaRPr b="0" lang="en-US" sz="1800" spc="-1" strike="noStrike">
               <a:solidFill>
                 <a:srgbClr val="000000"/>
@@ -17729,7 +18568,7 @@
         <p:spPr>
           <a:xfrm>
             <a:off x="3246120" y="1920240"/>
-            <a:ext cx="2742840" cy="658080"/>
+            <a:ext cx="2742480" cy="657720"/>
           </a:xfrm>
           <a:prstGeom prst="rect">
             <a:avLst/>
@@ -17755,6 +18594,11 @@
             <a:noAutofit/>
           </a:bodyPr>
           <a:p>
+            <a:pPr>
+              <a:lnSpc>
+                <a:spcPct val="100000"/>
+              </a:lnSpc>
+            </a:pPr>
             <a:endParaRPr b="0" lang="en-US" sz="1800" spc="-1" strike="noStrike">
               <a:solidFill>
                 <a:srgbClr val="ffffff"/>
@@ -17773,7 +18617,7 @@
         <p:spPr>
           <a:xfrm>
             <a:off x="3246120" y="1920240"/>
-            <a:ext cx="2742840" cy="658080"/>
+            <a:ext cx="2742480" cy="657720"/>
           </a:xfrm>
           <a:prstGeom prst="rect">
             <a:avLst/>
@@ -17838,7 +18682,7 @@
         <p:spPr>
           <a:xfrm>
             <a:off x="3355920" y="2633400"/>
-            <a:ext cx="2523240" cy="987120"/>
+            <a:ext cx="2522880" cy="986760"/>
           </a:xfrm>
           <a:prstGeom prst="rect">
             <a:avLst/>
@@ -17894,7 +18738,7 @@
         <p:spPr>
           <a:xfrm>
             <a:off x="3383280" y="3758040"/>
-            <a:ext cx="219240" cy="219240"/>
+            <a:ext cx="218880" cy="218880"/>
           </a:xfrm>
           <a:prstGeom prst="ellipse">
             <a:avLst/>
@@ -17920,6 +18764,11 @@
             <a:noAutofit/>
           </a:bodyPr>
           <a:p>
+            <a:pPr>
+              <a:lnSpc>
+                <a:spcPct val="100000"/>
+              </a:lnSpc>
+            </a:pPr>
             <a:endParaRPr b="0" lang="en-US" sz="1800" spc="-1" strike="noStrike">
               <a:solidFill>
                 <a:srgbClr val="ffffff"/>
@@ -17938,7 +18787,7 @@
         <p:spPr>
           <a:xfrm>
             <a:off x="3675960" y="3675960"/>
-            <a:ext cx="2239920" cy="347040"/>
+            <a:ext cx="2239560" cy="346680"/>
           </a:xfrm>
           <a:prstGeom prst="rect">
             <a:avLst/>
@@ -17994,7 +18843,7 @@
         <p:spPr>
           <a:xfrm>
             <a:off x="3383280" y="4142160"/>
-            <a:ext cx="219240" cy="219240"/>
+            <a:ext cx="218880" cy="218880"/>
           </a:xfrm>
           <a:prstGeom prst="ellipse">
             <a:avLst/>
@@ -18020,6 +18869,11 @@
             <a:noAutofit/>
           </a:bodyPr>
           <a:p>
+            <a:pPr>
+              <a:lnSpc>
+                <a:spcPct val="100000"/>
+              </a:lnSpc>
+            </a:pPr>
             <a:endParaRPr b="0" lang="en-US" sz="1800" spc="-1" strike="noStrike">
               <a:solidFill>
                 <a:srgbClr val="ffffff"/>
@@ -18038,7 +18892,7 @@
         <p:spPr>
           <a:xfrm>
             <a:off x="3675960" y="4060080"/>
-            <a:ext cx="2239920" cy="347040"/>
+            <a:ext cx="2239560" cy="346680"/>
           </a:xfrm>
           <a:prstGeom prst="rect">
             <a:avLst/>
@@ -18094,7 +18948,7 @@
         <p:spPr>
           <a:xfrm>
             <a:off x="3383280" y="4526280"/>
-            <a:ext cx="219240" cy="219240"/>
+            <a:ext cx="218880" cy="218880"/>
           </a:xfrm>
           <a:prstGeom prst="ellipse">
             <a:avLst/>
@@ -18120,6 +18974,11 @@
             <a:noAutofit/>
           </a:bodyPr>
           <a:p>
+            <a:pPr>
+              <a:lnSpc>
+                <a:spcPct val="100000"/>
+              </a:lnSpc>
+            </a:pPr>
             <a:endParaRPr b="0" lang="en-US" sz="1800" spc="-1" strike="noStrike">
               <a:solidFill>
                 <a:srgbClr val="ffffff"/>
@@ -18138,7 +18997,7 @@
         <p:spPr>
           <a:xfrm>
             <a:off x="3675960" y="4443840"/>
-            <a:ext cx="2239920" cy="347040"/>
+            <a:ext cx="2239560" cy="346680"/>
           </a:xfrm>
           <a:prstGeom prst="rect">
             <a:avLst/>
@@ -18194,7 +19053,7 @@
         <p:spPr>
           <a:xfrm>
             <a:off x="6126480" y="1920240"/>
-            <a:ext cx="2742840" cy="2925720"/>
+            <a:ext cx="2742480" cy="2925360"/>
           </a:xfrm>
           <a:prstGeom prst="rect">
             <a:avLst/>
@@ -18227,6 +19086,11 @@
             <a:noAutofit/>
           </a:bodyPr>
           <a:p>
+            <a:pPr>
+              <a:lnSpc>
+                <a:spcPct val="100000"/>
+              </a:lnSpc>
+            </a:pPr>
             <a:endParaRPr b="0" lang="en-US" sz="1800" spc="-1" strike="noStrike">
               <a:solidFill>
                 <a:srgbClr val="000000"/>
@@ -18245,7 +19109,7 @@
         <p:spPr>
           <a:xfrm>
             <a:off x="6126480" y="1920240"/>
-            <a:ext cx="2742840" cy="658080"/>
+            <a:ext cx="2742480" cy="657720"/>
           </a:xfrm>
           <a:prstGeom prst="rect">
             <a:avLst/>
@@ -18271,6 +19135,11 @@
             <a:noAutofit/>
           </a:bodyPr>
           <a:p>
+            <a:pPr>
+              <a:lnSpc>
+                <a:spcPct val="100000"/>
+              </a:lnSpc>
+            </a:pPr>
             <a:endParaRPr b="0" lang="en-US" sz="1800" spc="-1" strike="noStrike">
               <a:solidFill>
                 <a:srgbClr val="ffffff"/>
@@ -18289,7 +19158,7 @@
         <p:spPr>
           <a:xfrm>
             <a:off x="6126480" y="1920240"/>
-            <a:ext cx="2742840" cy="658080"/>
+            <a:ext cx="2742480" cy="657720"/>
           </a:xfrm>
           <a:prstGeom prst="rect">
             <a:avLst/>
@@ -18354,7 +19223,7 @@
         <p:spPr>
           <a:xfrm>
             <a:off x="6236280" y="2633400"/>
-            <a:ext cx="2523240" cy="987120"/>
+            <a:ext cx="2522880" cy="986760"/>
           </a:xfrm>
           <a:prstGeom prst="rect">
             <a:avLst/>
@@ -18410,7 +19279,7 @@
         <p:spPr>
           <a:xfrm>
             <a:off x="6263640" y="3758040"/>
-            <a:ext cx="219240" cy="219240"/>
+            <a:ext cx="218880" cy="218880"/>
           </a:xfrm>
           <a:prstGeom prst="ellipse">
             <a:avLst/>
@@ -18436,6 +19305,11 @@
             <a:noAutofit/>
           </a:bodyPr>
           <a:p>
+            <a:pPr>
+              <a:lnSpc>
+                <a:spcPct val="100000"/>
+              </a:lnSpc>
+            </a:pPr>
             <a:endParaRPr b="0" lang="en-US" sz="1800" spc="-1" strike="noStrike">
               <a:solidFill>
                 <a:srgbClr val="ffffff"/>
@@ -18454,7 +19328,7 @@
         <p:spPr>
           <a:xfrm>
             <a:off x="6556320" y="3675960"/>
-            <a:ext cx="2239920" cy="347040"/>
+            <a:ext cx="2239560" cy="346680"/>
           </a:xfrm>
           <a:prstGeom prst="rect">
             <a:avLst/>
@@ -18510,7 +19384,7 @@
         <p:spPr>
           <a:xfrm>
             <a:off x="6263640" y="4142160"/>
-            <a:ext cx="219240" cy="219240"/>
+            <a:ext cx="218880" cy="218880"/>
           </a:xfrm>
           <a:prstGeom prst="ellipse">
             <a:avLst/>
@@ -18536,6 +19410,11 @@
             <a:noAutofit/>
           </a:bodyPr>
           <a:p>
+            <a:pPr>
+              <a:lnSpc>
+                <a:spcPct val="100000"/>
+              </a:lnSpc>
+            </a:pPr>
             <a:endParaRPr b="0" lang="en-US" sz="1800" spc="-1" strike="noStrike">
               <a:solidFill>
                 <a:srgbClr val="ffffff"/>
@@ -18554,7 +19433,7 @@
         <p:spPr>
           <a:xfrm>
             <a:off x="6556320" y="4060080"/>
-            <a:ext cx="2239920" cy="347040"/>
+            <a:ext cx="2239560" cy="346680"/>
           </a:xfrm>
           <a:prstGeom prst="rect">
             <a:avLst/>
@@ -18610,7 +19489,7 @@
         <p:spPr>
           <a:xfrm>
             <a:off x="6263640" y="4526280"/>
-            <a:ext cx="219240" cy="219240"/>
+            <a:ext cx="218880" cy="218880"/>
           </a:xfrm>
           <a:prstGeom prst="ellipse">
             <a:avLst/>
@@ -18636,6 +19515,11 @@
             <a:noAutofit/>
           </a:bodyPr>
           <a:p>
+            <a:pPr>
+              <a:lnSpc>
+                <a:spcPct val="100000"/>
+              </a:lnSpc>
+            </a:pPr>
             <a:endParaRPr b="0" lang="en-US" sz="1800" spc="-1" strike="noStrike">
               <a:solidFill>
                 <a:srgbClr val="ffffff"/>
@@ -18654,7 +19538,7 @@
         <p:spPr>
           <a:xfrm>
             <a:off x="6556320" y="4443840"/>
-            <a:ext cx="2239920" cy="347040"/>
+            <a:ext cx="2239560" cy="346680"/>
           </a:xfrm>
           <a:prstGeom prst="rect">
             <a:avLst/>
@@ -18747,7 +19631,7 @@
         <p:spPr>
           <a:xfrm>
             <a:off x="0" y="0"/>
-            <a:ext cx="9143640" cy="776880"/>
+            <a:ext cx="9143280" cy="776520"/>
           </a:xfrm>
           <a:prstGeom prst="rect">
             <a:avLst/>
@@ -18773,6 +19657,11 @@
             <a:noAutofit/>
           </a:bodyPr>
           <a:p>
+            <a:pPr>
+              <a:lnSpc>
+                <a:spcPct val="100000"/>
+              </a:lnSpc>
+            </a:pPr>
             <a:endParaRPr b="0" lang="en-US" sz="1800" spc="-1" strike="noStrike">
               <a:solidFill>
                 <a:srgbClr val="ffffff"/>
@@ -18791,7 +19680,7 @@
         <p:spPr>
           <a:xfrm>
             <a:off x="320040" y="137160"/>
-            <a:ext cx="502560" cy="502560"/>
+            <a:ext cx="502200" cy="502200"/>
           </a:xfrm>
           <a:prstGeom prst="ellipse">
             <a:avLst/>
@@ -18817,6 +19706,11 @@
             <a:noAutofit/>
           </a:bodyPr>
           <a:p>
+            <a:pPr>
+              <a:lnSpc>
+                <a:spcPct val="100000"/>
+              </a:lnSpc>
+            </a:pPr>
             <a:endParaRPr b="0" lang="en-US" sz="1800" spc="-1" strike="noStrike">
               <a:solidFill>
                 <a:srgbClr val="ffffff"/>
@@ -18835,7 +19729,7 @@
         <p:spPr>
           <a:xfrm>
             <a:off x="320040" y="137160"/>
-            <a:ext cx="502560" cy="502560"/>
+            <a:ext cx="502200" cy="502200"/>
           </a:xfrm>
           <a:prstGeom prst="rect">
             <a:avLst/>
@@ -18891,7 +19785,7 @@
         <p:spPr>
           <a:xfrm>
             <a:off x="960120" y="0"/>
-            <a:ext cx="7817760" cy="776880"/>
+            <a:ext cx="7817400" cy="776520"/>
           </a:xfrm>
           <a:prstGeom prst="rect">
             <a:avLst/>
@@ -18921,7 +19815,7 @@
               </a:tabLst>
             </a:pPr>
             <a:r>
-              <a:rPr b="1" lang="en-US" sz="1800" spc="199" strike="noStrike">
+              <a:rPr b="1" lang="en-US" sz="1800" spc="197" strike="noStrike">
                 <a:solidFill>
                   <a:srgbClr val="ffffff"/>
                 </a:solidFill>
@@ -18947,7 +19841,7 @@
         <p:spPr>
           <a:xfrm>
             <a:off x="365760" y="868680"/>
-            <a:ext cx="8412120" cy="456840"/>
+            <a:ext cx="8411760" cy="456480"/>
           </a:xfrm>
           <a:prstGeom prst="rect">
             <a:avLst/>
@@ -19003,7 +19897,7 @@
         <p:spPr>
           <a:xfrm>
             <a:off x="274320" y="1444680"/>
-            <a:ext cx="2742840" cy="1508400"/>
+            <a:ext cx="2742480" cy="1508040"/>
           </a:xfrm>
           <a:prstGeom prst="rect">
             <a:avLst/>
@@ -19036,6 +19930,11 @@
             <a:noAutofit/>
           </a:bodyPr>
           <a:p>
+            <a:pPr>
+              <a:lnSpc>
+                <a:spcPct val="100000"/>
+              </a:lnSpc>
+            </a:pPr>
             <a:endParaRPr b="0" lang="en-US" sz="1800" spc="-1" strike="noStrike">
               <a:solidFill>
                 <a:srgbClr val="ffffff"/>
@@ -19054,7 +19953,7 @@
         <p:spPr>
           <a:xfrm>
             <a:off x="274320" y="1444680"/>
-            <a:ext cx="2742840" cy="529920"/>
+            <a:ext cx="2742480" cy="529560"/>
           </a:xfrm>
           <a:prstGeom prst="rect">
             <a:avLst/>
@@ -19080,6 +19979,11 @@
             <a:noAutofit/>
           </a:bodyPr>
           <a:p>
+            <a:pPr>
+              <a:lnSpc>
+                <a:spcPct val="100000"/>
+              </a:lnSpc>
+            </a:pPr>
             <a:endParaRPr b="0" lang="en-US" sz="1800" spc="-1" strike="noStrike">
               <a:solidFill>
                 <a:srgbClr val="ffffff"/>
@@ -19098,7 +20002,7 @@
         <p:spPr>
           <a:xfrm>
             <a:off x="274320" y="1444680"/>
-            <a:ext cx="2742840" cy="529920"/>
+            <a:ext cx="2742480" cy="529560"/>
           </a:xfrm>
           <a:prstGeom prst="rect">
             <a:avLst/>
@@ -19163,7 +20067,7 @@
         <p:spPr>
           <a:xfrm>
             <a:off x="384120" y="2030040"/>
-            <a:ext cx="2523240" cy="840960"/>
+            <a:ext cx="2522880" cy="840600"/>
           </a:xfrm>
           <a:prstGeom prst="rect">
             <a:avLst/>
@@ -19219,7 +20123,7 @@
         <p:spPr>
           <a:xfrm>
             <a:off x="3154680" y="1444680"/>
-            <a:ext cx="2742840" cy="1508400"/>
+            <a:ext cx="2742480" cy="1508040"/>
           </a:xfrm>
           <a:prstGeom prst="rect">
             <a:avLst/>
@@ -19252,6 +20156,11 @@
             <a:noAutofit/>
           </a:bodyPr>
           <a:p>
+            <a:pPr>
+              <a:lnSpc>
+                <a:spcPct val="100000"/>
+              </a:lnSpc>
+            </a:pPr>
             <a:endParaRPr b="0" lang="en-US" sz="1800" spc="-1" strike="noStrike">
               <a:solidFill>
                 <a:srgbClr val="ffffff"/>
@@ -19270,7 +20179,7 @@
         <p:spPr>
           <a:xfrm>
             <a:off x="3154680" y="1444680"/>
-            <a:ext cx="2742840" cy="529920"/>
+            <a:ext cx="2742480" cy="529560"/>
           </a:xfrm>
           <a:prstGeom prst="rect">
             <a:avLst/>
@@ -19296,6 +20205,11 @@
             <a:noAutofit/>
           </a:bodyPr>
           <a:p>
+            <a:pPr>
+              <a:lnSpc>
+                <a:spcPct val="100000"/>
+              </a:lnSpc>
+            </a:pPr>
             <a:endParaRPr b="0" lang="en-US" sz="1800" spc="-1" strike="noStrike">
               <a:solidFill>
                 <a:srgbClr val="ffffff"/>
@@ -19314,7 +20228,7 @@
         <p:spPr>
           <a:xfrm>
             <a:off x="3154680" y="1444680"/>
-            <a:ext cx="2742840" cy="529920"/>
+            <a:ext cx="2742480" cy="529560"/>
           </a:xfrm>
           <a:prstGeom prst="rect">
             <a:avLst/>
@@ -19379,7 +20293,7 @@
         <p:spPr>
           <a:xfrm>
             <a:off x="3264480" y="2030040"/>
-            <a:ext cx="2523240" cy="840960"/>
+            <a:ext cx="2522880" cy="840600"/>
           </a:xfrm>
           <a:prstGeom prst="rect">
             <a:avLst/>
@@ -19435,7 +20349,7 @@
         <p:spPr>
           <a:xfrm>
             <a:off x="6035040" y="1444680"/>
-            <a:ext cx="2742840" cy="1508400"/>
+            <a:ext cx="2742480" cy="1508040"/>
           </a:xfrm>
           <a:prstGeom prst="rect">
             <a:avLst/>
@@ -19468,6 +20382,11 @@
             <a:noAutofit/>
           </a:bodyPr>
           <a:p>
+            <a:pPr>
+              <a:lnSpc>
+                <a:spcPct val="100000"/>
+              </a:lnSpc>
+            </a:pPr>
             <a:endParaRPr b="0" lang="en-US" sz="1800" spc="-1" strike="noStrike">
               <a:solidFill>
                 <a:srgbClr val="ffffff"/>
@@ -19486,7 +20405,7 @@
         <p:spPr>
           <a:xfrm>
             <a:off x="6035040" y="1444680"/>
-            <a:ext cx="2742840" cy="529920"/>
+            <a:ext cx="2742480" cy="529560"/>
           </a:xfrm>
           <a:prstGeom prst="rect">
             <a:avLst/>
@@ -19512,6 +20431,11 @@
             <a:noAutofit/>
           </a:bodyPr>
           <a:p>
+            <a:pPr>
+              <a:lnSpc>
+                <a:spcPct val="100000"/>
+              </a:lnSpc>
+            </a:pPr>
             <a:endParaRPr b="0" lang="en-US" sz="1800" spc="-1" strike="noStrike">
               <a:solidFill>
                 <a:srgbClr val="ffffff"/>
@@ -19530,7 +20454,7 @@
         <p:spPr>
           <a:xfrm>
             <a:off x="6035040" y="1444680"/>
-            <a:ext cx="2742840" cy="529920"/>
+            <a:ext cx="2742480" cy="529560"/>
           </a:xfrm>
           <a:prstGeom prst="rect">
             <a:avLst/>
@@ -19595,7 +20519,7 @@
         <p:spPr>
           <a:xfrm>
             <a:off x="6144840" y="2030040"/>
-            <a:ext cx="2523240" cy="840960"/>
+            <a:ext cx="2522880" cy="840600"/>
           </a:xfrm>
           <a:prstGeom prst="rect">
             <a:avLst/>
@@ -19651,7 +20575,7 @@
         <p:spPr>
           <a:xfrm>
             <a:off x="365760" y="3063240"/>
-            <a:ext cx="8412120" cy="347040"/>
+            <a:ext cx="8411760" cy="346680"/>
           </a:xfrm>
           <a:prstGeom prst="rect">
             <a:avLst/>
@@ -19681,7 +20605,7 @@
               </a:tabLst>
             </a:pPr>
             <a:r>
-              <a:rPr b="1" lang="en-US" sz="1300" spc="148" strike="noStrike">
+              <a:rPr b="1" lang="en-US" sz="1300" spc="145" strike="noStrike">
                 <a:solidFill>
                   <a:srgbClr val="e05c44"/>
                 </a:solidFill>
@@ -19707,7 +20631,7 @@
         <p:spPr>
           <a:xfrm>
             <a:off x="274320" y="3493080"/>
-            <a:ext cx="4205880" cy="658080"/>
+            <a:ext cx="4205520" cy="657720"/>
           </a:xfrm>
           <a:prstGeom prst="rect">
             <a:avLst/>
@@ -19733,6 +20657,11 @@
             <a:noAutofit/>
           </a:bodyPr>
           <a:p>
+            <a:pPr>
+              <a:lnSpc>
+                <a:spcPct val="100000"/>
+              </a:lnSpc>
+            </a:pPr>
             <a:endParaRPr b="0" lang="en-US" sz="1800" spc="-1" strike="noStrike">
               <a:solidFill>
                 <a:srgbClr val="ffffff"/>
@@ -19751,7 +20680,7 @@
         <p:spPr>
           <a:xfrm>
             <a:off x="384120" y="3493080"/>
-            <a:ext cx="456840" cy="658080"/>
+            <a:ext cx="456480" cy="657720"/>
           </a:xfrm>
           <a:prstGeom prst="rect">
             <a:avLst/>
@@ -19807,7 +20736,7 @@
         <p:spPr>
           <a:xfrm>
             <a:off x="896040" y="3538800"/>
-            <a:ext cx="3474360" cy="273960"/>
+            <a:ext cx="3474000" cy="273600"/>
           </a:xfrm>
           <a:prstGeom prst="rect">
             <a:avLst/>
@@ -19863,7 +20792,7 @@
         <p:spPr>
           <a:xfrm>
             <a:off x="896040" y="3822120"/>
-            <a:ext cx="3474360" cy="255600"/>
+            <a:ext cx="3474000" cy="255240"/>
           </a:xfrm>
           <a:prstGeom prst="rect">
             <a:avLst/>
@@ -19919,7 +20848,7 @@
         <p:spPr>
           <a:xfrm>
             <a:off x="4709160" y="3493080"/>
-            <a:ext cx="4205880" cy="658080"/>
+            <a:ext cx="4205520" cy="657720"/>
           </a:xfrm>
           <a:prstGeom prst="rect">
             <a:avLst/>
@@ -19945,6 +20874,11 @@
             <a:noAutofit/>
           </a:bodyPr>
           <a:p>
+            <a:pPr>
+              <a:lnSpc>
+                <a:spcPct val="100000"/>
+              </a:lnSpc>
+            </a:pPr>
             <a:endParaRPr b="0" lang="en-US" sz="1800" spc="-1" strike="noStrike">
               <a:solidFill>
                 <a:srgbClr val="ffffff"/>
@@ -19963,7 +20897,7 @@
         <p:spPr>
           <a:xfrm>
             <a:off x="4818960" y="3493080"/>
-            <a:ext cx="456840" cy="658080"/>
+            <a:ext cx="456480" cy="657720"/>
           </a:xfrm>
           <a:prstGeom prst="rect">
             <a:avLst/>
@@ -20019,7 +20953,7 @@
         <p:spPr>
           <a:xfrm>
             <a:off x="5330880" y="3538800"/>
-            <a:ext cx="3474360" cy="273960"/>
+            <a:ext cx="3474000" cy="273600"/>
           </a:xfrm>
           <a:prstGeom prst="rect">
             <a:avLst/>
@@ -20075,7 +21009,7 @@
         <p:spPr>
           <a:xfrm>
             <a:off x="5330880" y="3822120"/>
-            <a:ext cx="3474360" cy="255600"/>
+            <a:ext cx="3474000" cy="255240"/>
           </a:xfrm>
           <a:prstGeom prst="rect">
             <a:avLst/>
@@ -20131,7 +21065,7 @@
         <p:spPr>
           <a:xfrm>
             <a:off x="274320" y="4242960"/>
-            <a:ext cx="4205880" cy="658080"/>
+            <a:ext cx="4205520" cy="657720"/>
           </a:xfrm>
           <a:prstGeom prst="rect">
             <a:avLst/>
@@ -20157,6 +21091,11 @@
             <a:noAutofit/>
           </a:bodyPr>
           <a:p>
+            <a:pPr>
+              <a:lnSpc>
+                <a:spcPct val="100000"/>
+              </a:lnSpc>
+            </a:pPr>
             <a:endParaRPr b="0" lang="en-US" sz="1800" spc="-1" strike="noStrike">
               <a:solidFill>
                 <a:srgbClr val="ffffff"/>
@@ -20175,7 +21114,7 @@
         <p:spPr>
           <a:xfrm>
             <a:off x="384120" y="4242960"/>
-            <a:ext cx="456840" cy="658080"/>
+            <a:ext cx="456480" cy="657720"/>
           </a:xfrm>
           <a:prstGeom prst="rect">
             <a:avLst/>
@@ -20231,7 +21170,7 @@
         <p:spPr>
           <a:xfrm>
             <a:off x="896040" y="4288680"/>
-            <a:ext cx="3474360" cy="273960"/>
+            <a:ext cx="3474000" cy="273600"/>
           </a:xfrm>
           <a:prstGeom prst="rect">
             <a:avLst/>
@@ -20287,7 +21226,7 @@
         <p:spPr>
           <a:xfrm>
             <a:off x="896040" y="4572000"/>
-            <a:ext cx="3474360" cy="255600"/>
+            <a:ext cx="3474000" cy="255240"/>
           </a:xfrm>
           <a:prstGeom prst="rect">
             <a:avLst/>
@@ -20343,7 +21282,7 @@
         <p:spPr>
           <a:xfrm>
             <a:off x="4709160" y="4242960"/>
-            <a:ext cx="4205880" cy="658080"/>
+            <a:ext cx="4205520" cy="657720"/>
           </a:xfrm>
           <a:prstGeom prst="rect">
             <a:avLst/>
@@ -20369,6 +21308,11 @@
             <a:noAutofit/>
           </a:bodyPr>
           <a:p>
+            <a:pPr>
+              <a:lnSpc>
+                <a:spcPct val="100000"/>
+              </a:lnSpc>
+            </a:pPr>
             <a:endParaRPr b="0" lang="en-US" sz="1800" spc="-1" strike="noStrike">
               <a:solidFill>
                 <a:srgbClr val="ffffff"/>
@@ -20387,7 +21331,7 @@
         <p:spPr>
           <a:xfrm>
             <a:off x="4818960" y="4242960"/>
-            <a:ext cx="456840" cy="658080"/>
+            <a:ext cx="456480" cy="657720"/>
           </a:xfrm>
           <a:prstGeom prst="rect">
             <a:avLst/>
@@ -20443,7 +21387,7 @@
         <p:spPr>
           <a:xfrm>
             <a:off x="5330880" y="4288680"/>
-            <a:ext cx="3474360" cy="273960"/>
+            <a:ext cx="3474000" cy="273600"/>
           </a:xfrm>
           <a:prstGeom prst="rect">
             <a:avLst/>
@@ -20499,7 +21443,7 @@
         <p:spPr>
           <a:xfrm>
             <a:off x="5330880" y="4572000"/>
-            <a:ext cx="3474360" cy="255600"/>
+            <a:ext cx="3474000" cy="255240"/>
           </a:xfrm>
           <a:prstGeom prst="rect">
             <a:avLst/>
@@ -20592,7 +21536,7 @@
         <p:spPr>
           <a:xfrm>
             <a:off x="0" y="0"/>
-            <a:ext cx="9143640" cy="776880"/>
+            <a:ext cx="9143280" cy="776520"/>
           </a:xfrm>
           <a:prstGeom prst="rect">
             <a:avLst/>
@@ -20618,6 +21562,11 @@
             <a:noAutofit/>
           </a:bodyPr>
           <a:p>
+            <a:pPr>
+              <a:lnSpc>
+                <a:spcPct val="100000"/>
+              </a:lnSpc>
+            </a:pPr>
             <a:endParaRPr b="0" lang="en-US" sz="1800" spc="-1" strike="noStrike">
               <a:solidFill>
                 <a:srgbClr val="ffffff"/>
@@ -20636,7 +21585,7 @@
         <p:spPr>
           <a:xfrm>
             <a:off x="365760" y="0"/>
-            <a:ext cx="8412120" cy="776880"/>
+            <a:ext cx="8411760" cy="776520"/>
           </a:xfrm>
           <a:prstGeom prst="rect">
             <a:avLst/>
@@ -20666,7 +21615,7 @@
               </a:tabLst>
             </a:pPr>
             <a:r>
-              <a:rPr b="1" lang="en-US" sz="1550" spc="148" strike="noStrike">
+              <a:rPr b="1" lang="en-US" sz="1550" spc="145" strike="noStrike">
                 <a:solidFill>
                   <a:srgbClr val="ffffff"/>
                 </a:solidFill>
@@ -20692,7 +21641,7 @@
         <p:spPr>
           <a:xfrm>
             <a:off x="274320" y="914400"/>
-            <a:ext cx="4160160" cy="3913200"/>
+            <a:ext cx="4159800" cy="3912840"/>
           </a:xfrm>
           <a:prstGeom prst="rect">
             <a:avLst/>
@@ -20725,6 +21674,11 @@
             <a:noAutofit/>
           </a:bodyPr>
           <a:p>
+            <a:pPr>
+              <a:lnSpc>
+                <a:spcPct val="100000"/>
+              </a:lnSpc>
+            </a:pPr>
             <a:endParaRPr b="0" lang="en-US" sz="1800" spc="-1" strike="noStrike">
               <a:solidFill>
                 <a:srgbClr val="000000"/>
@@ -20743,7 +21697,7 @@
         <p:spPr>
           <a:xfrm>
             <a:off x="274320" y="914400"/>
-            <a:ext cx="4160160" cy="566640"/>
+            <a:ext cx="4159800" cy="566280"/>
           </a:xfrm>
           <a:prstGeom prst="rect">
             <a:avLst/>
@@ -20769,6 +21723,11 @@
             <a:noAutofit/>
           </a:bodyPr>
           <a:p>
+            <a:pPr>
+              <a:lnSpc>
+                <a:spcPct val="100000"/>
+              </a:lnSpc>
+            </a:pPr>
             <a:endParaRPr b="0" lang="en-US" sz="1800" spc="-1" strike="noStrike">
               <a:solidFill>
                 <a:srgbClr val="ffffff"/>
@@ -20787,7 +21746,7 @@
         <p:spPr>
           <a:xfrm>
             <a:off x="384120" y="969120"/>
-            <a:ext cx="456840" cy="456840"/>
+            <a:ext cx="456480" cy="456480"/>
           </a:xfrm>
           <a:prstGeom prst="ellipse">
             <a:avLst/>
@@ -20813,6 +21772,11 @@
             <a:noAutofit/>
           </a:bodyPr>
           <a:p>
+            <a:pPr>
+              <a:lnSpc>
+                <a:spcPct val="100000"/>
+              </a:lnSpc>
+            </a:pPr>
             <a:endParaRPr b="0" lang="en-US" sz="1800" spc="-1" strike="noStrike">
               <a:solidFill>
                 <a:srgbClr val="ffffff"/>
@@ -20831,7 +21795,7 @@
         <p:spPr>
           <a:xfrm>
             <a:off x="384120" y="969120"/>
-            <a:ext cx="456840" cy="456840"/>
+            <a:ext cx="456480" cy="456480"/>
           </a:xfrm>
           <a:prstGeom prst="rect">
             <a:avLst/>
@@ -20887,7 +21851,7 @@
         <p:spPr>
           <a:xfrm>
             <a:off x="960120" y="914400"/>
-            <a:ext cx="3337200" cy="566640"/>
+            <a:ext cx="3336840" cy="566280"/>
           </a:xfrm>
           <a:prstGeom prst="rect">
             <a:avLst/>
@@ -20952,7 +21916,7 @@
         <p:spPr>
           <a:xfrm>
             <a:off x="411480" y="1554480"/>
-            <a:ext cx="3885840" cy="566640"/>
+            <a:ext cx="3885480" cy="566280"/>
           </a:xfrm>
           <a:prstGeom prst="rect">
             <a:avLst/>
@@ -21008,7 +21972,7 @@
         <p:spPr>
           <a:xfrm>
             <a:off x="411480" y="2194560"/>
-            <a:ext cx="3885840" cy="438480"/>
+            <a:ext cx="3885480" cy="438120"/>
           </a:xfrm>
           <a:prstGeom prst="rect">
             <a:avLst/>
@@ -21034,6 +21998,11 @@
             <a:noAutofit/>
           </a:bodyPr>
           <a:p>
+            <a:pPr>
+              <a:lnSpc>
+                <a:spcPct val="100000"/>
+              </a:lnSpc>
+            </a:pPr>
             <a:endParaRPr b="0" lang="en-US" sz="1800" spc="-1" strike="noStrike">
               <a:solidFill>
                 <a:srgbClr val="000000"/>
@@ -21052,7 +22021,7 @@
         <p:spPr>
           <a:xfrm>
             <a:off x="411480" y="2194560"/>
-            <a:ext cx="164160" cy="438480"/>
+            <a:ext cx="163800" cy="438120"/>
           </a:xfrm>
           <a:prstGeom prst="rect">
             <a:avLst/>
@@ -21078,6 +22047,11 @@
             <a:noAutofit/>
           </a:bodyPr>
           <a:p>
+            <a:pPr>
+              <a:lnSpc>
+                <a:spcPct val="100000"/>
+              </a:lnSpc>
+            </a:pPr>
             <a:endParaRPr b="0" lang="en-US" sz="1800" spc="-1" strike="noStrike">
               <a:solidFill>
                 <a:srgbClr val="ffffff"/>
@@ -21096,7 +22070,7 @@
         <p:spPr>
           <a:xfrm>
             <a:off x="640080" y="2212920"/>
-            <a:ext cx="1691280" cy="237240"/>
+            <a:ext cx="1690920" cy="236880"/>
           </a:xfrm>
           <a:prstGeom prst="rect">
             <a:avLst/>
@@ -21152,7 +22126,7 @@
         <p:spPr>
           <a:xfrm>
             <a:off x="640080" y="2432160"/>
-            <a:ext cx="3565800" cy="164160"/>
+            <a:ext cx="3565440" cy="163800"/>
           </a:xfrm>
           <a:prstGeom prst="rect">
             <a:avLst/>
@@ -21208,7 +22182,7 @@
         <p:spPr>
           <a:xfrm>
             <a:off x="411480" y="2706480"/>
-            <a:ext cx="3885840" cy="438480"/>
+            <a:ext cx="3885480" cy="438120"/>
           </a:xfrm>
           <a:prstGeom prst="rect">
             <a:avLst/>
@@ -21234,6 +22208,11 @@
             <a:noAutofit/>
           </a:bodyPr>
           <a:p>
+            <a:pPr>
+              <a:lnSpc>
+                <a:spcPct val="100000"/>
+              </a:lnSpc>
+            </a:pPr>
             <a:endParaRPr b="0" lang="en-US" sz="1800" spc="-1" strike="noStrike">
               <a:solidFill>
                 <a:srgbClr val="000000"/>
@@ -21252,7 +22231,7 @@
         <p:spPr>
           <a:xfrm>
             <a:off x="411480" y="2706480"/>
-            <a:ext cx="164160" cy="438480"/>
+            <a:ext cx="163800" cy="438120"/>
           </a:xfrm>
           <a:prstGeom prst="rect">
             <a:avLst/>
@@ -21278,6 +22257,11 @@
             <a:noAutofit/>
           </a:bodyPr>
           <a:p>
+            <a:pPr>
+              <a:lnSpc>
+                <a:spcPct val="100000"/>
+              </a:lnSpc>
+            </a:pPr>
             <a:endParaRPr b="0" lang="en-US" sz="1800" spc="-1" strike="noStrike">
               <a:solidFill>
                 <a:srgbClr val="ffffff"/>
@@ -21296,7 +22280,7 @@
         <p:spPr>
           <a:xfrm>
             <a:off x="640080" y="2724840"/>
-            <a:ext cx="1691280" cy="237240"/>
+            <a:ext cx="1690920" cy="236880"/>
           </a:xfrm>
           <a:prstGeom prst="rect">
             <a:avLst/>
@@ -21352,7 +22336,7 @@
         <p:spPr>
           <a:xfrm>
             <a:off x="640080" y="2944440"/>
-            <a:ext cx="3565800" cy="164160"/>
+            <a:ext cx="3565440" cy="163800"/>
           </a:xfrm>
           <a:prstGeom prst="rect">
             <a:avLst/>
@@ -21408,7 +22392,7 @@
         <p:spPr>
           <a:xfrm>
             <a:off x="411480" y="3218760"/>
-            <a:ext cx="3885840" cy="438480"/>
+            <a:ext cx="3885480" cy="438120"/>
           </a:xfrm>
           <a:prstGeom prst="rect">
             <a:avLst/>
@@ -21434,6 +22418,11 @@
             <a:noAutofit/>
           </a:bodyPr>
           <a:p>
+            <a:pPr>
+              <a:lnSpc>
+                <a:spcPct val="100000"/>
+              </a:lnSpc>
+            </a:pPr>
             <a:endParaRPr b="0" lang="en-US" sz="1800" spc="-1" strike="noStrike">
               <a:solidFill>
                 <a:srgbClr val="000000"/>
@@ -21452,7 +22441,7 @@
         <p:spPr>
           <a:xfrm>
             <a:off x="411480" y="3218760"/>
-            <a:ext cx="164160" cy="438480"/>
+            <a:ext cx="163800" cy="438120"/>
           </a:xfrm>
           <a:prstGeom prst="rect">
             <a:avLst/>
@@ -21478,6 +22467,11 @@
             <a:noAutofit/>
           </a:bodyPr>
           <a:p>
+            <a:pPr>
+              <a:lnSpc>
+                <a:spcPct val="100000"/>
+              </a:lnSpc>
+            </a:pPr>
             <a:endParaRPr b="0" lang="en-US" sz="1800" spc="-1" strike="noStrike">
               <a:solidFill>
                 <a:srgbClr val="ffffff"/>
@@ -21496,7 +22490,7 @@
         <p:spPr>
           <a:xfrm>
             <a:off x="640080" y="3237120"/>
-            <a:ext cx="1691280" cy="237240"/>
+            <a:ext cx="1690920" cy="236880"/>
           </a:xfrm>
           <a:prstGeom prst="rect">
             <a:avLst/>
@@ -21552,7 +22546,7 @@
         <p:spPr>
           <a:xfrm>
             <a:off x="640080" y="3456360"/>
-            <a:ext cx="3565800" cy="164160"/>
+            <a:ext cx="3565440" cy="163800"/>
           </a:xfrm>
           <a:prstGeom prst="rect">
             <a:avLst/>
@@ -21608,7 +22602,7 @@
         <p:spPr>
           <a:xfrm>
             <a:off x="411480" y="3730680"/>
-            <a:ext cx="3885840" cy="438480"/>
+            <a:ext cx="3885480" cy="438120"/>
           </a:xfrm>
           <a:prstGeom prst="rect">
             <a:avLst/>
@@ -21634,6 +22628,11 @@
             <a:noAutofit/>
           </a:bodyPr>
           <a:p>
+            <a:pPr>
+              <a:lnSpc>
+                <a:spcPct val="100000"/>
+              </a:lnSpc>
+            </a:pPr>
             <a:endParaRPr b="0" lang="en-US" sz="1800" spc="-1" strike="noStrike">
               <a:solidFill>
                 <a:srgbClr val="000000"/>
@@ -21652,7 +22651,7 @@
         <p:spPr>
           <a:xfrm>
             <a:off x="411480" y="3730680"/>
-            <a:ext cx="164160" cy="438480"/>
+            <a:ext cx="163800" cy="438120"/>
           </a:xfrm>
           <a:prstGeom prst="rect">
             <a:avLst/>
@@ -21678,6 +22677,11 @@
             <a:noAutofit/>
           </a:bodyPr>
           <a:p>
+            <a:pPr>
+              <a:lnSpc>
+                <a:spcPct val="100000"/>
+              </a:lnSpc>
+            </a:pPr>
             <a:endParaRPr b="0" lang="en-US" sz="1800" spc="-1" strike="noStrike">
               <a:solidFill>
                 <a:srgbClr val="ffffff"/>
@@ -21696,7 +22700,7 @@
         <p:spPr>
           <a:xfrm>
             <a:off x="640080" y="3749040"/>
-            <a:ext cx="1691280" cy="237240"/>
+            <a:ext cx="1690920" cy="236880"/>
           </a:xfrm>
           <a:prstGeom prst="rect">
             <a:avLst/>
@@ -21752,7 +22756,7 @@
         <p:spPr>
           <a:xfrm>
             <a:off x="640080" y="3968640"/>
-            <a:ext cx="3565800" cy="164160"/>
+            <a:ext cx="3565440" cy="163800"/>
           </a:xfrm>
           <a:prstGeom prst="rect">
             <a:avLst/>
@@ -21808,7 +22812,7 @@
         <p:spPr>
           <a:xfrm>
             <a:off x="411480" y="4242960"/>
-            <a:ext cx="3885840" cy="438480"/>
+            <a:ext cx="3885480" cy="438120"/>
           </a:xfrm>
           <a:prstGeom prst="rect">
             <a:avLst/>
@@ -21834,6 +22838,11 @@
             <a:noAutofit/>
           </a:bodyPr>
           <a:p>
+            <a:pPr>
+              <a:lnSpc>
+                <a:spcPct val="100000"/>
+              </a:lnSpc>
+            </a:pPr>
             <a:endParaRPr b="0" lang="en-US" sz="1800" spc="-1" strike="noStrike">
               <a:solidFill>
                 <a:srgbClr val="000000"/>
@@ -21852,7 +22861,7 @@
         <p:spPr>
           <a:xfrm>
             <a:off x="411480" y="4242960"/>
-            <a:ext cx="164160" cy="438480"/>
+            <a:ext cx="163800" cy="438120"/>
           </a:xfrm>
           <a:prstGeom prst="rect">
             <a:avLst/>
@@ -21878,6 +22887,11 @@
             <a:noAutofit/>
           </a:bodyPr>
           <a:p>
+            <a:pPr>
+              <a:lnSpc>
+                <a:spcPct val="100000"/>
+              </a:lnSpc>
+            </a:pPr>
             <a:endParaRPr b="0" lang="en-US" sz="1800" spc="-1" strike="noStrike">
               <a:solidFill>
                 <a:srgbClr val="000000"/>
@@ -21896,7 +22910,7 @@
         <p:spPr>
           <a:xfrm>
             <a:off x="640080" y="4260960"/>
-            <a:ext cx="1691280" cy="237240"/>
+            <a:ext cx="1690920" cy="236880"/>
           </a:xfrm>
           <a:prstGeom prst="rect">
             <a:avLst/>
@@ -21952,7 +22966,7 @@
         <p:spPr>
           <a:xfrm>
             <a:off x="640080" y="4480560"/>
-            <a:ext cx="3565800" cy="164160"/>
+            <a:ext cx="3565440" cy="163800"/>
           </a:xfrm>
           <a:prstGeom prst="rect">
             <a:avLst/>
@@ -22008,7 +23022,7 @@
         <p:spPr>
           <a:xfrm>
             <a:off x="4709160" y="914400"/>
-            <a:ext cx="4160160" cy="3913200"/>
+            <a:ext cx="4159800" cy="3912840"/>
           </a:xfrm>
           <a:prstGeom prst="rect">
             <a:avLst/>
@@ -22041,6 +23055,11 @@
             <a:noAutofit/>
           </a:bodyPr>
           <a:p>
+            <a:pPr>
+              <a:lnSpc>
+                <a:spcPct val="100000"/>
+              </a:lnSpc>
+            </a:pPr>
             <a:endParaRPr b="0" lang="en-US" sz="1800" spc="-1" strike="noStrike">
               <a:solidFill>
                 <a:srgbClr val="000000"/>
@@ -22059,7 +23078,7 @@
         <p:spPr>
           <a:xfrm>
             <a:off x="4709160" y="914400"/>
-            <a:ext cx="4160160" cy="566640"/>
+            <a:ext cx="4159800" cy="566280"/>
           </a:xfrm>
           <a:prstGeom prst="rect">
             <a:avLst/>
@@ -22085,6 +23104,11 @@
             <a:noAutofit/>
           </a:bodyPr>
           <a:p>
+            <a:pPr>
+              <a:lnSpc>
+                <a:spcPct val="100000"/>
+              </a:lnSpc>
+            </a:pPr>
             <a:endParaRPr b="0" lang="en-US" sz="1800" spc="-1" strike="noStrike">
               <a:solidFill>
                 <a:srgbClr val="ffffff"/>
@@ -22103,7 +23127,7 @@
         <p:spPr>
           <a:xfrm>
             <a:off x="4818960" y="969120"/>
-            <a:ext cx="456840" cy="456840"/>
+            <a:ext cx="456480" cy="456480"/>
           </a:xfrm>
           <a:prstGeom prst="ellipse">
             <a:avLst/>
@@ -22129,6 +23153,11 @@
             <a:noAutofit/>
           </a:bodyPr>
           <a:p>
+            <a:pPr>
+              <a:lnSpc>
+                <a:spcPct val="100000"/>
+              </a:lnSpc>
+            </a:pPr>
             <a:endParaRPr b="0" lang="en-US" sz="1800" spc="-1" strike="noStrike">
               <a:solidFill>
                 <a:srgbClr val="ffffff"/>
@@ -22147,7 +23176,7 @@
         <p:spPr>
           <a:xfrm>
             <a:off x="4818960" y="969120"/>
-            <a:ext cx="456840" cy="456840"/>
+            <a:ext cx="456480" cy="456480"/>
           </a:xfrm>
           <a:prstGeom prst="rect">
             <a:avLst/>
@@ -22203,7 +23232,7 @@
         <p:spPr>
           <a:xfrm>
             <a:off x="5394960" y="914400"/>
-            <a:ext cx="3337200" cy="566640"/>
+            <a:ext cx="3336840" cy="566280"/>
           </a:xfrm>
           <a:prstGeom prst="rect">
             <a:avLst/>
@@ -22268,7 +23297,7 @@
         <p:spPr>
           <a:xfrm>
             <a:off x="4846320" y="1554480"/>
-            <a:ext cx="3885840" cy="566640"/>
+            <a:ext cx="3885480" cy="566280"/>
           </a:xfrm>
           <a:prstGeom prst="rect">
             <a:avLst/>
@@ -22324,7 +23353,7 @@
         <p:spPr>
           <a:xfrm>
             <a:off x="4846320" y="2194560"/>
-            <a:ext cx="3885840" cy="438480"/>
+            <a:ext cx="3885480" cy="438120"/>
           </a:xfrm>
           <a:prstGeom prst="rect">
             <a:avLst/>
@@ -22350,6 +23379,11 @@
             <a:noAutofit/>
           </a:bodyPr>
           <a:p>
+            <a:pPr>
+              <a:lnSpc>
+                <a:spcPct val="100000"/>
+              </a:lnSpc>
+            </a:pPr>
             <a:endParaRPr b="0" lang="en-US" sz="1800" spc="-1" strike="noStrike">
               <a:solidFill>
                 <a:srgbClr val="000000"/>
@@ -22368,7 +23402,7 @@
         <p:spPr>
           <a:xfrm>
             <a:off x="4846320" y="2194560"/>
-            <a:ext cx="164160" cy="438480"/>
+            <a:ext cx="163800" cy="438120"/>
           </a:xfrm>
           <a:prstGeom prst="rect">
             <a:avLst/>
@@ -22394,6 +23428,11 @@
             <a:noAutofit/>
           </a:bodyPr>
           <a:p>
+            <a:pPr>
+              <a:lnSpc>
+                <a:spcPct val="100000"/>
+              </a:lnSpc>
+            </a:pPr>
             <a:endParaRPr b="0" lang="en-US" sz="1800" spc="-1" strike="noStrike">
               <a:solidFill>
                 <a:srgbClr val="ffffff"/>
@@ -22412,7 +23451,7 @@
         <p:spPr>
           <a:xfrm>
             <a:off x="5074920" y="2212920"/>
-            <a:ext cx="1691280" cy="237240"/>
+            <a:ext cx="1690920" cy="236880"/>
           </a:xfrm>
           <a:prstGeom prst="rect">
             <a:avLst/>
@@ -22468,7 +23507,7 @@
         <p:spPr>
           <a:xfrm>
             <a:off x="5074920" y="2432160"/>
-            <a:ext cx="3565800" cy="164160"/>
+            <a:ext cx="3565440" cy="163800"/>
           </a:xfrm>
           <a:prstGeom prst="rect">
             <a:avLst/>
@@ -22524,7 +23563,7 @@
         <p:spPr>
           <a:xfrm>
             <a:off x="4846320" y="2706480"/>
-            <a:ext cx="3885840" cy="438480"/>
+            <a:ext cx="3885480" cy="438120"/>
           </a:xfrm>
           <a:prstGeom prst="rect">
             <a:avLst/>
@@ -22550,6 +23589,11 @@
             <a:noAutofit/>
           </a:bodyPr>
           <a:p>
+            <a:pPr>
+              <a:lnSpc>
+                <a:spcPct val="100000"/>
+              </a:lnSpc>
+            </a:pPr>
             <a:endParaRPr b="0" lang="en-US" sz="1800" spc="-1" strike="noStrike">
               <a:solidFill>
                 <a:srgbClr val="000000"/>
@@ -22568,7 +23612,7 @@
         <p:spPr>
           <a:xfrm>
             <a:off x="4846320" y="2706480"/>
-            <a:ext cx="164160" cy="438480"/>
+            <a:ext cx="163800" cy="438120"/>
           </a:xfrm>
           <a:prstGeom prst="rect">
             <a:avLst/>
@@ -22594,6 +23638,11 @@
             <a:noAutofit/>
           </a:bodyPr>
           <a:p>
+            <a:pPr>
+              <a:lnSpc>
+                <a:spcPct val="100000"/>
+              </a:lnSpc>
+            </a:pPr>
             <a:endParaRPr b="0" lang="en-US" sz="1800" spc="-1" strike="noStrike">
               <a:solidFill>
                 <a:srgbClr val="ffffff"/>
@@ -22612,7 +23661,7 @@
         <p:spPr>
           <a:xfrm>
             <a:off x="5074920" y="2724840"/>
-            <a:ext cx="1691280" cy="237240"/>
+            <a:ext cx="1690920" cy="236880"/>
           </a:xfrm>
           <a:prstGeom prst="rect">
             <a:avLst/>
@@ -22668,7 +23717,7 @@
         <p:spPr>
           <a:xfrm>
             <a:off x="5074920" y="2944440"/>
-            <a:ext cx="3565800" cy="164160"/>
+            <a:ext cx="3565440" cy="163800"/>
           </a:xfrm>
           <a:prstGeom prst="rect">
             <a:avLst/>
@@ -22724,7 +23773,7 @@
         <p:spPr>
           <a:xfrm>
             <a:off x="4846320" y="3218760"/>
-            <a:ext cx="3885840" cy="438480"/>
+            <a:ext cx="3885480" cy="438120"/>
           </a:xfrm>
           <a:prstGeom prst="rect">
             <a:avLst/>
@@ -22750,6 +23799,11 @@
             <a:noAutofit/>
           </a:bodyPr>
           <a:p>
+            <a:pPr>
+              <a:lnSpc>
+                <a:spcPct val="100000"/>
+              </a:lnSpc>
+            </a:pPr>
             <a:endParaRPr b="0" lang="en-US" sz="1800" spc="-1" strike="noStrike">
               <a:solidFill>
                 <a:srgbClr val="000000"/>
@@ -22768,7 +23822,7 @@
         <p:spPr>
           <a:xfrm>
             <a:off x="4846320" y="3218760"/>
-            <a:ext cx="164160" cy="438480"/>
+            <a:ext cx="163800" cy="438120"/>
           </a:xfrm>
           <a:prstGeom prst="rect">
             <a:avLst/>
@@ -22794,6 +23848,11 @@
             <a:noAutofit/>
           </a:bodyPr>
           <a:p>
+            <a:pPr>
+              <a:lnSpc>
+                <a:spcPct val="100000"/>
+              </a:lnSpc>
+            </a:pPr>
             <a:endParaRPr b="0" lang="en-US" sz="1800" spc="-1" strike="noStrike">
               <a:solidFill>
                 <a:srgbClr val="ffffff"/>
@@ -22812,7 +23871,7 @@
         <p:spPr>
           <a:xfrm>
             <a:off x="5074920" y="3237120"/>
-            <a:ext cx="1691280" cy="237240"/>
+            <a:ext cx="1690920" cy="236880"/>
           </a:xfrm>
           <a:prstGeom prst="rect">
             <a:avLst/>
@@ -22868,7 +23927,7 @@
         <p:spPr>
           <a:xfrm>
             <a:off x="5074920" y="3456360"/>
-            <a:ext cx="3565800" cy="164160"/>
+            <a:ext cx="3565440" cy="163800"/>
           </a:xfrm>
           <a:prstGeom prst="rect">
             <a:avLst/>
@@ -22924,7 +23983,7 @@
         <p:spPr>
           <a:xfrm>
             <a:off x="4846320" y="3730680"/>
-            <a:ext cx="3885840" cy="438480"/>
+            <a:ext cx="3885480" cy="438120"/>
           </a:xfrm>
           <a:prstGeom prst="rect">
             <a:avLst/>
@@ -22950,6 +24009,11 @@
             <a:noAutofit/>
           </a:bodyPr>
           <a:p>
+            <a:pPr>
+              <a:lnSpc>
+                <a:spcPct val="100000"/>
+              </a:lnSpc>
+            </a:pPr>
             <a:endParaRPr b="0" lang="en-US" sz="1800" spc="-1" strike="noStrike">
               <a:solidFill>
                 <a:srgbClr val="000000"/>
@@ -22968,7 +24032,7 @@
         <p:spPr>
           <a:xfrm>
             <a:off x="4846320" y="3730680"/>
-            <a:ext cx="164160" cy="438480"/>
+            <a:ext cx="163800" cy="438120"/>
           </a:xfrm>
           <a:prstGeom prst="rect">
             <a:avLst/>
@@ -22994,6 +24058,11 @@
             <a:noAutofit/>
           </a:bodyPr>
           <a:p>
+            <a:pPr>
+              <a:lnSpc>
+                <a:spcPct val="100000"/>
+              </a:lnSpc>
+            </a:pPr>
             <a:endParaRPr b="0" lang="en-US" sz="1800" spc="-1" strike="noStrike">
               <a:solidFill>
                 <a:srgbClr val="ffffff"/>
@@ -23012,7 +24081,7 @@
         <p:spPr>
           <a:xfrm>
             <a:off x="5074920" y="3749040"/>
-            <a:ext cx="1691280" cy="237240"/>
+            <a:ext cx="1690920" cy="236880"/>
           </a:xfrm>
           <a:prstGeom prst="rect">
             <a:avLst/>
@@ -23068,7 +24137,7 @@
         <p:spPr>
           <a:xfrm>
             <a:off x="5074920" y="3968640"/>
-            <a:ext cx="3565800" cy="164160"/>
+            <a:ext cx="3565440" cy="163800"/>
           </a:xfrm>
           <a:prstGeom prst="rect">
             <a:avLst/>
@@ -23124,7 +24193,7 @@
         <p:spPr>
           <a:xfrm>
             <a:off x="4846320" y="4242960"/>
-            <a:ext cx="3885840" cy="438480"/>
+            <a:ext cx="3885480" cy="438120"/>
           </a:xfrm>
           <a:prstGeom prst="rect">
             <a:avLst/>
@@ -23150,6 +24219,11 @@
             <a:noAutofit/>
           </a:bodyPr>
           <a:p>
+            <a:pPr>
+              <a:lnSpc>
+                <a:spcPct val="100000"/>
+              </a:lnSpc>
+            </a:pPr>
             <a:endParaRPr b="0" lang="en-US" sz="1800" spc="-1" strike="noStrike">
               <a:solidFill>
                 <a:srgbClr val="000000"/>
@@ -23168,7 +24242,7 @@
         <p:spPr>
           <a:xfrm>
             <a:off x="4846320" y="4242960"/>
-            <a:ext cx="164160" cy="438480"/>
+            <a:ext cx="163800" cy="438120"/>
           </a:xfrm>
           <a:prstGeom prst="rect">
             <a:avLst/>
@@ -23194,6 +24268,11 @@
             <a:noAutofit/>
           </a:bodyPr>
           <a:p>
+            <a:pPr>
+              <a:lnSpc>
+                <a:spcPct val="100000"/>
+              </a:lnSpc>
+            </a:pPr>
             <a:endParaRPr b="0" lang="en-US" sz="1800" spc="-1" strike="noStrike">
               <a:solidFill>
                 <a:srgbClr val="000000"/>
@@ -23212,7 +24291,7 @@
         <p:spPr>
           <a:xfrm>
             <a:off x="5074920" y="4260960"/>
-            <a:ext cx="1691280" cy="237240"/>
+            <a:ext cx="1690920" cy="236880"/>
           </a:xfrm>
           <a:prstGeom prst="rect">
             <a:avLst/>
@@ -23268,7 +24347,7 @@
         <p:spPr>
           <a:xfrm>
             <a:off x="5074920" y="4480560"/>
-            <a:ext cx="3565800" cy="164160"/>
+            <a:ext cx="3565440" cy="163800"/>
           </a:xfrm>
           <a:prstGeom prst="rect">
             <a:avLst/>
@@ -23361,7 +24440,7 @@
         <p:spPr>
           <a:xfrm>
             <a:off x="0" y="0"/>
-            <a:ext cx="9143640" cy="776880"/>
+            <a:ext cx="9143280" cy="776520"/>
           </a:xfrm>
           <a:prstGeom prst="rect">
             <a:avLst/>
@@ -23387,6 +24466,11 @@
             <a:noAutofit/>
           </a:bodyPr>
           <a:p>
+            <a:pPr>
+              <a:lnSpc>
+                <a:spcPct val="100000"/>
+              </a:lnSpc>
+            </a:pPr>
             <a:endParaRPr b="0" lang="en-US" sz="1800" spc="-1" strike="noStrike">
               <a:solidFill>
                 <a:srgbClr val="ffffff"/>
@@ -23405,7 +24489,7 @@
         <p:spPr>
           <a:xfrm>
             <a:off x="320040" y="137160"/>
-            <a:ext cx="502560" cy="502560"/>
+            <a:ext cx="502200" cy="502200"/>
           </a:xfrm>
           <a:prstGeom prst="ellipse">
             <a:avLst/>
@@ -23431,6 +24515,11 @@
             <a:noAutofit/>
           </a:bodyPr>
           <a:p>
+            <a:pPr>
+              <a:lnSpc>
+                <a:spcPct val="100000"/>
+              </a:lnSpc>
+            </a:pPr>
             <a:endParaRPr b="0" lang="en-US" sz="1800" spc="-1" strike="noStrike">
               <a:solidFill>
                 <a:srgbClr val="ffffff"/>
@@ -23449,7 +24538,7 @@
         <p:spPr>
           <a:xfrm>
             <a:off x="320040" y="137160"/>
-            <a:ext cx="502560" cy="502560"/>
+            <a:ext cx="502200" cy="502200"/>
           </a:xfrm>
           <a:prstGeom prst="rect">
             <a:avLst/>
@@ -23505,7 +24594,7 @@
         <p:spPr>
           <a:xfrm>
             <a:off x="960120" y="0"/>
-            <a:ext cx="7817760" cy="776880"/>
+            <a:ext cx="7817400" cy="776520"/>
           </a:xfrm>
           <a:prstGeom prst="rect">
             <a:avLst/>
@@ -23535,7 +24624,7 @@
               </a:tabLst>
             </a:pPr>
             <a:r>
-              <a:rPr b="1" lang="en-US" sz="1800" spc="199" strike="noStrike">
+              <a:rPr b="1" lang="en-US" sz="1800" spc="197" strike="noStrike">
                 <a:solidFill>
                   <a:srgbClr val="ffffff"/>
                 </a:solidFill>
@@ -23561,7 +24650,7 @@
         <p:spPr>
           <a:xfrm>
             <a:off x="365760" y="914400"/>
-            <a:ext cx="8412120" cy="914040"/>
+            <a:ext cx="8411760" cy="913680"/>
           </a:xfrm>
           <a:prstGeom prst="rect">
             <a:avLst/>
@@ -23587,6 +24676,11 @@
             <a:noAutofit/>
           </a:bodyPr>
           <a:p>
+            <a:pPr>
+              <a:lnSpc>
+                <a:spcPct val="100000"/>
+              </a:lnSpc>
+            </a:pPr>
             <a:endParaRPr b="0" lang="en-US" sz="1800" spc="-1" strike="noStrike">
               <a:solidFill>
                 <a:srgbClr val="ffffff"/>
@@ -23605,7 +24699,7 @@
         <p:spPr>
           <a:xfrm>
             <a:off x="502920" y="914400"/>
-            <a:ext cx="8229240" cy="914040"/>
+            <a:ext cx="8228880" cy="913680"/>
           </a:xfrm>
           <a:prstGeom prst="rect">
             <a:avLst/>
@@ -23661,7 +24755,7 @@
         <p:spPr>
           <a:xfrm>
             <a:off x="365760" y="1920240"/>
-            <a:ext cx="8412120" cy="347040"/>
+            <a:ext cx="8411760" cy="346680"/>
           </a:xfrm>
           <a:prstGeom prst="rect">
             <a:avLst/>
@@ -23691,7 +24785,7 @@
               </a:tabLst>
             </a:pPr>
             <a:r>
-              <a:rPr b="1" lang="en-US" sz="1200" spc="148" strike="noStrike">
+              <a:rPr b="1" lang="en-US" sz="1200" spc="145" strike="noStrike">
                 <a:solidFill>
                   <a:srgbClr val="e67e22"/>
                 </a:solidFill>
@@ -23717,7 +24811,7 @@
         <p:spPr>
           <a:xfrm>
             <a:off x="274320" y="2331720"/>
-            <a:ext cx="2742840" cy="1416960"/>
+            <a:ext cx="2742480" cy="1416600"/>
           </a:xfrm>
           <a:prstGeom prst="rect">
             <a:avLst/>
@@ -23750,6 +24844,11 @@
             <a:noAutofit/>
           </a:bodyPr>
           <a:p>
+            <a:pPr>
+              <a:lnSpc>
+                <a:spcPct val="100000"/>
+              </a:lnSpc>
+            </a:pPr>
             <a:endParaRPr b="0" lang="en-US" sz="1800" spc="-1" strike="noStrike">
               <a:solidFill>
                 <a:srgbClr val="ffffff"/>
@@ -23768,7 +24867,7 @@
         <p:spPr>
           <a:xfrm>
             <a:off x="274320" y="2331720"/>
-            <a:ext cx="2742840" cy="529920"/>
+            <a:ext cx="2742480" cy="529560"/>
           </a:xfrm>
           <a:prstGeom prst="rect">
             <a:avLst/>
@@ -23794,6 +24893,11 @@
             <a:noAutofit/>
           </a:bodyPr>
           <a:p>
+            <a:pPr>
+              <a:lnSpc>
+                <a:spcPct val="100000"/>
+              </a:lnSpc>
+            </a:pPr>
             <a:endParaRPr b="0" lang="en-US" sz="1800" spc="-1" strike="noStrike">
               <a:solidFill>
                 <a:srgbClr val="ffffff"/>
@@ -23812,7 +24916,7 @@
         <p:spPr>
           <a:xfrm>
             <a:off x="274320" y="2331720"/>
-            <a:ext cx="2742840" cy="529920"/>
+            <a:ext cx="2742480" cy="529560"/>
           </a:xfrm>
           <a:prstGeom prst="rect">
             <a:avLst/>
@@ -23877,7 +24981,7 @@
         <p:spPr>
           <a:xfrm>
             <a:off x="384120" y="2907720"/>
-            <a:ext cx="2523240" cy="749520"/>
+            <a:ext cx="2522880" cy="749160"/>
           </a:xfrm>
           <a:prstGeom prst="rect">
             <a:avLst/>
@@ -23933,7 +25037,7 @@
         <p:spPr>
           <a:xfrm>
             <a:off x="3154680" y="2331720"/>
-            <a:ext cx="2742840" cy="1416960"/>
+            <a:ext cx="2742480" cy="1416600"/>
           </a:xfrm>
           <a:prstGeom prst="rect">
             <a:avLst/>
@@ -23966,6 +25070,11 @@
             <a:noAutofit/>
           </a:bodyPr>
           <a:p>
+            <a:pPr>
+              <a:lnSpc>
+                <a:spcPct val="100000"/>
+              </a:lnSpc>
+            </a:pPr>
             <a:endParaRPr b="0" lang="en-US" sz="1800" spc="-1" strike="noStrike">
               <a:solidFill>
                 <a:srgbClr val="ffffff"/>
@@ -23984,7 +25093,7 @@
         <p:spPr>
           <a:xfrm>
             <a:off x="3154680" y="2331720"/>
-            <a:ext cx="2742840" cy="529920"/>
+            <a:ext cx="2742480" cy="529560"/>
           </a:xfrm>
           <a:prstGeom prst="rect">
             <a:avLst/>
@@ -24010,6 +25119,11 @@
             <a:noAutofit/>
           </a:bodyPr>
           <a:p>
+            <a:pPr>
+              <a:lnSpc>
+                <a:spcPct val="100000"/>
+              </a:lnSpc>
+            </a:pPr>
             <a:endParaRPr b="0" lang="en-US" sz="1800" spc="-1" strike="noStrike">
               <a:solidFill>
                 <a:srgbClr val="ffffff"/>
@@ -24028,7 +25142,7 @@
         <p:spPr>
           <a:xfrm>
             <a:off x="3154680" y="2331720"/>
-            <a:ext cx="2742840" cy="529920"/>
+            <a:ext cx="2742480" cy="529560"/>
           </a:xfrm>
           <a:prstGeom prst="rect">
             <a:avLst/>
@@ -24093,7 +25207,7 @@
         <p:spPr>
           <a:xfrm>
             <a:off x="3264480" y="2907720"/>
-            <a:ext cx="2523240" cy="749520"/>
+            <a:ext cx="2522880" cy="749160"/>
           </a:xfrm>
           <a:prstGeom prst="rect">
             <a:avLst/>
@@ -24149,7 +25263,7 @@
         <p:spPr>
           <a:xfrm>
             <a:off x="6035040" y="2331720"/>
-            <a:ext cx="2742840" cy="1416960"/>
+            <a:ext cx="2742480" cy="1416600"/>
           </a:xfrm>
           <a:prstGeom prst="rect">
             <a:avLst/>
@@ -24182,6 +25296,11 @@
             <a:noAutofit/>
           </a:bodyPr>
           <a:p>
+            <a:pPr>
+              <a:lnSpc>
+                <a:spcPct val="100000"/>
+              </a:lnSpc>
+            </a:pPr>
             <a:endParaRPr b="0" lang="en-US" sz="1800" spc="-1" strike="noStrike">
               <a:solidFill>
                 <a:srgbClr val="ffffff"/>
@@ -24200,7 +25319,7 @@
         <p:spPr>
           <a:xfrm>
             <a:off x="6035040" y="2331720"/>
-            <a:ext cx="2742840" cy="529920"/>
+            <a:ext cx="2742480" cy="529560"/>
           </a:xfrm>
           <a:prstGeom prst="rect">
             <a:avLst/>
@@ -24226,6 +25345,11 @@
             <a:noAutofit/>
           </a:bodyPr>
           <a:p>
+            <a:pPr>
+              <a:lnSpc>
+                <a:spcPct val="100000"/>
+              </a:lnSpc>
+            </a:pPr>
             <a:endParaRPr b="0" lang="en-US" sz="1800" spc="-1" strike="noStrike">
               <a:solidFill>
                 <a:srgbClr val="ffffff"/>
@@ -24244,7 +25368,7 @@
         <p:spPr>
           <a:xfrm>
             <a:off x="6035040" y="2331720"/>
-            <a:ext cx="2742840" cy="529920"/>
+            <a:ext cx="2742480" cy="529560"/>
           </a:xfrm>
           <a:prstGeom prst="rect">
             <a:avLst/>
@@ -24309,7 +25433,7 @@
         <p:spPr>
           <a:xfrm>
             <a:off x="6144840" y="2907720"/>
-            <a:ext cx="2523240" cy="749520"/>
+            <a:ext cx="2522880" cy="749160"/>
           </a:xfrm>
           <a:prstGeom prst="rect">
             <a:avLst/>
@@ -24365,7 +25489,7 @@
         <p:spPr>
           <a:xfrm>
             <a:off x="365760" y="3840480"/>
-            <a:ext cx="8412120" cy="319680"/>
+            <a:ext cx="8411760" cy="319320"/>
           </a:xfrm>
           <a:prstGeom prst="rect">
             <a:avLst/>
@@ -24395,7 +25519,7 @@
               </a:tabLst>
             </a:pPr>
             <a:r>
-              <a:rPr b="1" lang="en-US" sz="1200" spc="148" strike="noStrike">
+              <a:rPr b="1" lang="en-US" sz="1200" spc="145" strike="noStrike">
                 <a:solidFill>
                   <a:srgbClr val="e67e22"/>
                 </a:solidFill>
@@ -24421,7 +25545,7 @@
         <p:spPr>
           <a:xfrm>
             <a:off x="274320" y="4224600"/>
-            <a:ext cx="4205880" cy="365400"/>
+            <a:ext cx="4205520" cy="365040"/>
           </a:xfrm>
           <a:prstGeom prst="rect">
             <a:avLst/>
@@ -24447,6 +25571,11 @@
             <a:noAutofit/>
           </a:bodyPr>
           <a:p>
+            <a:pPr>
+              <a:lnSpc>
+                <a:spcPct val="100000"/>
+              </a:lnSpc>
+            </a:pPr>
             <a:endParaRPr b="0" lang="en-US" sz="1800" spc="-1" strike="noStrike">
               <a:solidFill>
                 <a:srgbClr val="ffffff"/>
@@ -24465,7 +25594,7 @@
         <p:spPr>
           <a:xfrm>
             <a:off x="384120" y="4306680"/>
-            <a:ext cx="200880" cy="200880"/>
+            <a:ext cx="200520" cy="200520"/>
           </a:xfrm>
           <a:prstGeom prst="ellipse">
             <a:avLst/>
@@ -24491,6 +25620,11 @@
             <a:noAutofit/>
           </a:bodyPr>
           <a:p>
+            <a:pPr>
+              <a:lnSpc>
+                <a:spcPct val="100000"/>
+              </a:lnSpc>
+            </a:pPr>
             <a:endParaRPr b="0" lang="en-US" sz="1800" spc="-1" strike="noStrike">
               <a:solidFill>
                 <a:srgbClr val="ffffff"/>
@@ -24509,7 +25643,7 @@
         <p:spPr>
           <a:xfrm>
             <a:off x="658440" y="4242960"/>
-            <a:ext cx="1828440" cy="182520"/>
+            <a:ext cx="1828080" cy="182160"/>
           </a:xfrm>
           <a:prstGeom prst="rect">
             <a:avLst/>
@@ -24565,7 +25699,7 @@
         <p:spPr>
           <a:xfrm>
             <a:off x="658440" y="4425840"/>
-            <a:ext cx="3702960" cy="145800"/>
+            <a:ext cx="3702600" cy="145440"/>
           </a:xfrm>
           <a:prstGeom prst="rect">
             <a:avLst/>
@@ -24621,7 +25755,7 @@
         <p:spPr>
           <a:xfrm>
             <a:off x="4709160" y="4224600"/>
-            <a:ext cx="4205880" cy="365400"/>
+            <a:ext cx="4205520" cy="365040"/>
           </a:xfrm>
           <a:prstGeom prst="rect">
             <a:avLst/>
@@ -24647,6 +25781,11 @@
             <a:noAutofit/>
           </a:bodyPr>
           <a:p>
+            <a:pPr>
+              <a:lnSpc>
+                <a:spcPct val="100000"/>
+              </a:lnSpc>
+            </a:pPr>
             <a:endParaRPr b="0" lang="en-US" sz="1800" spc="-1" strike="noStrike">
               <a:solidFill>
                 <a:srgbClr val="ffffff"/>
@@ -24665,7 +25804,7 @@
         <p:spPr>
           <a:xfrm>
             <a:off x="4818960" y="4306680"/>
-            <a:ext cx="200880" cy="200880"/>
+            <a:ext cx="200520" cy="200520"/>
           </a:xfrm>
           <a:prstGeom prst="ellipse">
             <a:avLst/>
@@ -24691,6 +25830,11 @@
             <a:noAutofit/>
           </a:bodyPr>
           <a:p>
+            <a:pPr>
+              <a:lnSpc>
+                <a:spcPct val="100000"/>
+              </a:lnSpc>
+            </a:pPr>
             <a:endParaRPr b="0" lang="en-US" sz="1800" spc="-1" strike="noStrike">
               <a:solidFill>
                 <a:srgbClr val="ffffff"/>
@@ -24709,7 +25853,7 @@
         <p:spPr>
           <a:xfrm>
             <a:off x="5093280" y="4242960"/>
-            <a:ext cx="1828440" cy="182520"/>
+            <a:ext cx="1828080" cy="182160"/>
           </a:xfrm>
           <a:prstGeom prst="rect">
             <a:avLst/>
@@ -24765,7 +25909,7 @@
         <p:spPr>
           <a:xfrm>
             <a:off x="5093280" y="4425840"/>
-            <a:ext cx="3702960" cy="145800"/>
+            <a:ext cx="3702600" cy="145440"/>
           </a:xfrm>
           <a:prstGeom prst="rect">
             <a:avLst/>
@@ -24821,7 +25965,7 @@
         <p:spPr>
           <a:xfrm>
             <a:off x="274320" y="4663440"/>
-            <a:ext cx="4205880" cy="365400"/>
+            <a:ext cx="4205520" cy="365040"/>
           </a:xfrm>
           <a:prstGeom prst="rect">
             <a:avLst/>
@@ -24847,6 +25991,11 @@
             <a:noAutofit/>
           </a:bodyPr>
           <a:p>
+            <a:pPr>
+              <a:lnSpc>
+                <a:spcPct val="100000"/>
+              </a:lnSpc>
+            </a:pPr>
             <a:endParaRPr b="0" lang="en-US" sz="1800" spc="-1" strike="noStrike">
               <a:solidFill>
                 <a:srgbClr val="ffffff"/>
@@ -24865,7 +26014,7 @@
         <p:spPr>
           <a:xfrm>
             <a:off x="384120" y="4745880"/>
-            <a:ext cx="200880" cy="200880"/>
+            <a:ext cx="200520" cy="200520"/>
           </a:xfrm>
           <a:prstGeom prst="ellipse">
             <a:avLst/>
@@ -24891,6 +26040,11 @@
             <a:noAutofit/>
           </a:bodyPr>
           <a:p>
+            <a:pPr>
+              <a:lnSpc>
+                <a:spcPct val="100000"/>
+              </a:lnSpc>
+            </a:pPr>
             <a:endParaRPr b="0" lang="en-US" sz="1800" spc="-1" strike="noStrike">
               <a:solidFill>
                 <a:srgbClr val="ffffff"/>
@@ -24909,7 +26063,7 @@
         <p:spPr>
           <a:xfrm>
             <a:off x="658440" y="4681800"/>
-            <a:ext cx="1828440" cy="182520"/>
+            <a:ext cx="1828080" cy="182160"/>
           </a:xfrm>
           <a:prstGeom prst="rect">
             <a:avLst/>
@@ -24965,7 +26119,7 @@
         <p:spPr>
           <a:xfrm>
             <a:off x="658440" y="4864680"/>
-            <a:ext cx="3702960" cy="145800"/>
+            <a:ext cx="3702600" cy="145440"/>
           </a:xfrm>
           <a:prstGeom prst="rect">
             <a:avLst/>
@@ -25021,7 +26175,7 @@
         <p:spPr>
           <a:xfrm>
             <a:off x="4709160" y="4663440"/>
-            <a:ext cx="4205880" cy="365400"/>
+            <a:ext cx="4205520" cy="365040"/>
           </a:xfrm>
           <a:prstGeom prst="rect">
             <a:avLst/>
@@ -25047,6 +26201,11 @@
             <a:noAutofit/>
           </a:bodyPr>
           <a:p>
+            <a:pPr>
+              <a:lnSpc>
+                <a:spcPct val="100000"/>
+              </a:lnSpc>
+            </a:pPr>
             <a:endParaRPr b="0" lang="en-US" sz="1800" spc="-1" strike="noStrike">
               <a:solidFill>
                 <a:srgbClr val="ffffff"/>
@@ -25065,7 +26224,7 @@
         <p:spPr>
           <a:xfrm>
             <a:off x="4818960" y="4745880"/>
-            <a:ext cx="200880" cy="200880"/>
+            <a:ext cx="200520" cy="200520"/>
           </a:xfrm>
           <a:prstGeom prst="ellipse">
             <a:avLst/>
@@ -25091,6 +26250,11 @@
             <a:noAutofit/>
           </a:bodyPr>
           <a:p>
+            <a:pPr>
+              <a:lnSpc>
+                <a:spcPct val="100000"/>
+              </a:lnSpc>
+            </a:pPr>
             <a:endParaRPr b="0" lang="en-US" sz="1800" spc="-1" strike="noStrike">
               <a:solidFill>
                 <a:srgbClr val="ffffff"/>
@@ -25109,7 +26273,7 @@
         <p:spPr>
           <a:xfrm>
             <a:off x="5093280" y="4681800"/>
-            <a:ext cx="1828440" cy="182520"/>
+            <a:ext cx="1828080" cy="182160"/>
           </a:xfrm>
           <a:prstGeom prst="rect">
             <a:avLst/>
@@ -25165,7 +26329,7 @@
         <p:spPr>
           <a:xfrm>
             <a:off x="5093280" y="4864680"/>
-            <a:ext cx="3702960" cy="145800"/>
+            <a:ext cx="3702600" cy="145440"/>
           </a:xfrm>
           <a:prstGeom prst="rect">
             <a:avLst/>
